--- a/manuscript/fig/fig1a.pptx
+++ b/manuscript/fig/fig1a.pptx
@@ -5,10 +5,12 @@
     <p:sldMasterId id="2147483648" r:id="rId1"/>
   </p:sldMasterIdLst>
   <p:notesMasterIdLst>
-    <p:notesMasterId r:id="rId3"/>
+    <p:notesMasterId r:id="rId5"/>
   </p:notesMasterIdLst>
   <p:sldIdLst>
     <p:sldId id="342" r:id="rId2"/>
+    <p:sldId id="343" r:id="rId3"/>
+    <p:sldId id="344" r:id="rId4"/>
   </p:sldIdLst>
   <p:sldSz cx="12192000" cy="6858000"/>
   <p:notesSz cx="6858000" cy="9144000"/>
@@ -6710,7 +6712,7 @@
   <dgm:whole/>
   <dgm:extLst>
     <a:ext uri="http://schemas.microsoft.com/office/drawing/2008/diagram">
-      <dsp:dataModelExt xmlns:dsp="http://schemas.microsoft.com/office/drawing/2008/diagram" relId="rId8" minVer="http://schemas.openxmlformats.org/drawingml/2006/diagram"/>
+      <dsp:dataModelExt xmlns:dsp="http://schemas.microsoft.com/office/drawing/2008/diagram" relId="rId10" minVer="http://schemas.openxmlformats.org/drawingml/2006/diagram"/>
     </a:ext>
   </dgm:extLst>
 </dgm:dataModel>
@@ -7341,7 +7343,7 @@
   <dgm:whole/>
   <dgm:extLst>
     <a:ext uri="http://schemas.microsoft.com/office/drawing/2008/diagram">
-      <dsp:dataModelExt xmlns:dsp="http://schemas.microsoft.com/office/drawing/2008/diagram" relId="rId13" minVer="http://schemas.openxmlformats.org/drawingml/2006/diagram"/>
+      <dsp:dataModelExt xmlns:dsp="http://schemas.microsoft.com/office/drawing/2008/diagram" relId="rId15" minVer="http://schemas.openxmlformats.org/drawingml/2006/diagram"/>
     </a:ext>
   </dgm:extLst>
 </dgm:dataModel>
@@ -7972,7 +7974,7 @@
   <dgm:whole/>
   <dgm:extLst>
     <a:ext uri="http://schemas.microsoft.com/office/drawing/2008/diagram">
-      <dsp:dataModelExt xmlns:dsp="http://schemas.microsoft.com/office/drawing/2008/diagram" relId="rId18" minVer="http://schemas.openxmlformats.org/drawingml/2006/diagram"/>
+      <dsp:dataModelExt xmlns:dsp="http://schemas.microsoft.com/office/drawing/2008/diagram" relId="rId20" minVer="http://schemas.openxmlformats.org/drawingml/2006/diagram"/>
     </a:ext>
   </dgm:extLst>
 </dgm:dataModel>
@@ -8609,7 +8611,7 @@
   <dgm:whole/>
   <dgm:extLst>
     <a:ext uri="http://schemas.microsoft.com/office/drawing/2008/diagram">
-      <dsp:dataModelExt xmlns:dsp="http://schemas.microsoft.com/office/drawing/2008/diagram" relId="rId27" minVer="http://schemas.openxmlformats.org/drawingml/2006/diagram"/>
+      <dsp:dataModelExt xmlns:dsp="http://schemas.microsoft.com/office/drawing/2008/diagram" relId="rId29" minVer="http://schemas.openxmlformats.org/drawingml/2006/diagram"/>
     </a:ext>
   </dgm:extLst>
 </dgm:dataModel>
@@ -9238,7 +9240,7 @@
   <dgm:whole/>
   <dgm:extLst>
     <a:ext uri="http://schemas.microsoft.com/office/drawing/2008/diagram">
-      <dsp:dataModelExt xmlns:dsp="http://schemas.microsoft.com/office/drawing/2008/diagram" relId="rId32" minVer="http://schemas.openxmlformats.org/drawingml/2006/diagram"/>
+      <dsp:dataModelExt xmlns:dsp="http://schemas.microsoft.com/office/drawing/2008/diagram" relId="rId34" minVer="http://schemas.openxmlformats.org/drawingml/2006/diagram"/>
     </a:ext>
   </dgm:extLst>
 </dgm:dataModel>
@@ -9872,7 +9874,7 @@
   <dgm:whole/>
   <dgm:extLst>
     <a:ext uri="http://schemas.microsoft.com/office/drawing/2008/diagram">
-      <dsp:dataModelExt xmlns:dsp="http://schemas.microsoft.com/office/drawing/2008/diagram" relId="rId37" minVer="http://schemas.openxmlformats.org/drawingml/2006/diagram"/>
+      <dsp:dataModelExt xmlns:dsp="http://schemas.microsoft.com/office/drawing/2008/diagram" relId="rId39" minVer="http://schemas.openxmlformats.org/drawingml/2006/diagram"/>
     </a:ext>
   </dgm:extLst>
 </dgm:dataModel>
@@ -10507,7 +10509,7 @@
   <dgm:whole/>
   <dgm:extLst>
     <a:ext uri="http://schemas.microsoft.com/office/drawing/2008/diagram">
-      <dsp:dataModelExt xmlns:dsp="http://schemas.microsoft.com/office/drawing/2008/diagram" relId="rId42" minVer="http://schemas.openxmlformats.org/drawingml/2006/diagram"/>
+      <dsp:dataModelExt xmlns:dsp="http://schemas.microsoft.com/office/drawing/2008/diagram" relId="rId44" minVer="http://schemas.openxmlformats.org/drawingml/2006/diagram"/>
     </a:ext>
   </dgm:extLst>
 </dgm:dataModel>
@@ -11148,7 +11150,7 @@
   <dgm:whole/>
   <dgm:extLst>
     <a:ext uri="http://schemas.microsoft.com/office/drawing/2008/diagram">
-      <dsp:dataModelExt xmlns:dsp="http://schemas.microsoft.com/office/drawing/2008/diagram" relId="rId47" minVer="http://schemas.openxmlformats.org/drawingml/2006/diagram"/>
+      <dsp:dataModelExt xmlns:dsp="http://schemas.microsoft.com/office/drawing/2008/diagram" relId="rId49" minVer="http://schemas.openxmlformats.org/drawingml/2006/diagram"/>
     </a:ext>
   </dgm:extLst>
 </dgm:dataModel>
@@ -32247,7 +32249,7 @@
           <a:p>
             <a:fld id="{A6396BCE-8436-5E4B-B2EC-45A9B03F3405}" type="datetimeFigureOut">
               <a:rPr lang="en-US" smtClean="0"/>
-              <a:t>8/28/25</a:t>
+              <a:t>10/2/25</a:t>
             </a:fld>
             <a:endParaRPr lang="en-US"/>
           </a:p>
@@ -32637,6 +32639,129 @@
 </p:notes>
 </file>
 
+<file path=ppt/notesSlides/notesSlide2.xml><?xml version="1.0" encoding="utf-8"?>
+<p:notes xmlns:a="http://schemas.openxmlformats.org/drawingml/2006/main" xmlns:r="http://schemas.openxmlformats.org/officeDocument/2006/relationships" xmlns:p="http://schemas.openxmlformats.org/presentationml/2006/main">
+  <p:cSld>
+    <p:spTree>
+      <p:nvGrpSpPr>
+        <p:cNvPr id="1" name="">
+          <a:extLst>
+            <a:ext uri="{FF2B5EF4-FFF2-40B4-BE49-F238E27FC236}">
+              <a16:creationId xmlns:a16="http://schemas.microsoft.com/office/drawing/2014/main" id="{F4C75C39-0993-F32E-4AF7-0D3A5E4D861F}"/>
+            </a:ext>
+          </a:extLst>
+        </p:cNvPr>
+        <p:cNvGrpSpPr/>
+        <p:nvPr/>
+      </p:nvGrpSpPr>
+      <p:grpSpPr>
+        <a:xfrm>
+          <a:off x="0" y="0"/>
+          <a:ext cx="0" cy="0"/>
+          <a:chOff x="0" y="0"/>
+          <a:chExt cx="0" cy="0"/>
+        </a:xfrm>
+      </p:grpSpPr>
+      <p:sp>
+        <p:nvSpPr>
+          <p:cNvPr id="2" name="Slide Image Placeholder 1">
+            <a:extLst>
+              <a:ext uri="{FF2B5EF4-FFF2-40B4-BE49-F238E27FC236}">
+                <a16:creationId xmlns:a16="http://schemas.microsoft.com/office/drawing/2014/main" id="{8BDCDC79-82EF-3224-4CD0-D05BFC7BF3BB}"/>
+              </a:ext>
+            </a:extLst>
+          </p:cNvPr>
+          <p:cNvSpPr>
+            <a:spLocks noGrp="1" noRot="1" noChangeAspect="1"/>
+          </p:cNvSpPr>
+          <p:nvPr>
+            <p:ph type="sldImg"/>
+          </p:nvPr>
+        </p:nvSpPr>
+        <p:spPr/>
+      </p:sp>
+      <p:sp>
+        <p:nvSpPr>
+          <p:cNvPr id="3" name="Notes Placeholder 2">
+            <a:extLst>
+              <a:ext uri="{FF2B5EF4-FFF2-40B4-BE49-F238E27FC236}">
+                <a16:creationId xmlns:a16="http://schemas.microsoft.com/office/drawing/2014/main" id="{D5A4E742-A025-17C1-AE1A-76F730A9C29D}"/>
+              </a:ext>
+            </a:extLst>
+          </p:cNvPr>
+          <p:cNvSpPr>
+            <a:spLocks noGrp="1"/>
+          </p:cNvSpPr>
+          <p:nvPr>
+            <p:ph type="body" idx="1"/>
+          </p:nvPr>
+        </p:nvSpPr>
+        <p:spPr/>
+        <p:txBody>
+          <a:bodyPr/>
+          <a:lstStyle/>
+          <a:p>
+            <a:r>
+              <a:rPr lang="en-US" dirty="0"/>
+              <a:t>We took a different approach. </a:t>
+            </a:r>
+          </a:p>
+          <a:p>
+            <a:endParaRPr lang="en-US" dirty="0"/>
+          </a:p>
+          <a:p>
+            <a:r>
+              <a:rPr lang="en-US" dirty="0"/>
+              <a:t>Instead of just computing VEP on a single reference sequence, we repeated the VEP procedure on personalized genomes from thousands of individuals to a build distribution of VEPs, and see where the reference falls within that distribution. </a:t>
+            </a:r>
+          </a:p>
+          <a:p>
+            <a:endParaRPr lang="en-US" dirty="0"/>
+          </a:p>
+        </p:txBody>
+      </p:sp>
+      <p:sp>
+        <p:nvSpPr>
+          <p:cNvPr id="4" name="Slide Number Placeholder 3">
+            <a:extLst>
+              <a:ext uri="{FF2B5EF4-FFF2-40B4-BE49-F238E27FC236}">
+                <a16:creationId xmlns:a16="http://schemas.microsoft.com/office/drawing/2014/main" id="{9469268A-9B6E-98E0-DD85-3FE409C0C133}"/>
+              </a:ext>
+            </a:extLst>
+          </p:cNvPr>
+          <p:cNvSpPr>
+            <a:spLocks noGrp="1"/>
+          </p:cNvSpPr>
+          <p:nvPr>
+            <p:ph type="sldNum" sz="quarter" idx="5"/>
+          </p:nvPr>
+        </p:nvSpPr>
+        <p:spPr/>
+        <p:txBody>
+          <a:bodyPr/>
+          <a:lstStyle/>
+          <a:p>
+            <a:fld id="{72BCE897-EDB9-C040-A1BE-C24B073651EF}" type="slidenum">
+              <a:rPr lang="en-US" smtClean="0"/>
+              <a:t>2</a:t>
+            </a:fld>
+            <a:endParaRPr lang="en-US"/>
+          </a:p>
+        </p:txBody>
+      </p:sp>
+    </p:spTree>
+    <p:extLst>
+      <p:ext uri="{BB962C8B-B14F-4D97-AF65-F5344CB8AC3E}">
+        <p14:creationId xmlns:p14="http://schemas.microsoft.com/office/powerpoint/2010/main" val="2732424615"/>
+      </p:ext>
+    </p:extLst>
+  </p:cSld>
+  <p:clrMapOvr>
+    <a:masterClrMapping/>
+  </p:clrMapOvr>
+</p:notes>
+</file>
+
 <file path=ppt/slideLayouts/slideLayout1.xml><?xml version="1.0" encoding="utf-8"?>
 <p:sldLayout xmlns:a="http://schemas.openxmlformats.org/drawingml/2006/main" xmlns:r="http://schemas.openxmlformats.org/officeDocument/2006/relationships" xmlns:p="http://schemas.openxmlformats.org/presentationml/2006/main" type="title" preserve="1">
   <p:cSld name="Title Slide">
@@ -32784,7 +32909,7 @@
           <a:p>
             <a:fld id="{93551A73-5757-9E4F-9CE4-87C840708D9E}" type="datetimeFigureOut">
               <a:rPr lang="en-US" smtClean="0"/>
-              <a:t>8/28/25</a:t>
+              <a:t>10/2/25</a:t>
             </a:fld>
             <a:endParaRPr lang="en-US"/>
           </a:p>
@@ -32982,7 +33107,7 @@
           <a:p>
             <a:fld id="{93551A73-5757-9E4F-9CE4-87C840708D9E}" type="datetimeFigureOut">
               <a:rPr lang="en-US" smtClean="0"/>
-              <a:t>8/28/25</a:t>
+              <a:t>10/2/25</a:t>
             </a:fld>
             <a:endParaRPr lang="en-US"/>
           </a:p>
@@ -33190,7 +33315,7 @@
           <a:p>
             <a:fld id="{93551A73-5757-9E4F-9CE4-87C840708D9E}" type="datetimeFigureOut">
               <a:rPr lang="en-US" smtClean="0"/>
-              <a:t>8/28/25</a:t>
+              <a:t>10/2/25</a:t>
             </a:fld>
             <a:endParaRPr lang="en-US"/>
           </a:p>
@@ -33388,7 +33513,7 @@
           <a:p>
             <a:fld id="{93551A73-5757-9E4F-9CE4-87C840708D9E}" type="datetimeFigureOut">
               <a:rPr lang="en-US" smtClean="0"/>
-              <a:t>8/28/25</a:t>
+              <a:t>10/2/25</a:t>
             </a:fld>
             <a:endParaRPr lang="en-US"/>
           </a:p>
@@ -33663,7 +33788,7 @@
           <a:p>
             <a:fld id="{93551A73-5757-9E4F-9CE4-87C840708D9E}" type="datetimeFigureOut">
               <a:rPr lang="en-US" smtClean="0"/>
-              <a:t>8/28/25</a:t>
+              <a:t>10/2/25</a:t>
             </a:fld>
             <a:endParaRPr lang="en-US"/>
           </a:p>
@@ -33928,7 +34053,7 @@
           <a:p>
             <a:fld id="{93551A73-5757-9E4F-9CE4-87C840708D9E}" type="datetimeFigureOut">
               <a:rPr lang="en-US" smtClean="0"/>
-              <a:t>8/28/25</a:t>
+              <a:t>10/2/25</a:t>
             </a:fld>
             <a:endParaRPr lang="en-US"/>
           </a:p>
@@ -34340,7 +34465,7 @@
           <a:p>
             <a:fld id="{93551A73-5757-9E4F-9CE4-87C840708D9E}" type="datetimeFigureOut">
               <a:rPr lang="en-US" smtClean="0"/>
-              <a:t>8/28/25</a:t>
+              <a:t>10/2/25</a:t>
             </a:fld>
             <a:endParaRPr lang="en-US"/>
           </a:p>
@@ -34481,7 +34606,7 @@
           <a:p>
             <a:fld id="{93551A73-5757-9E4F-9CE4-87C840708D9E}" type="datetimeFigureOut">
               <a:rPr lang="en-US" smtClean="0"/>
-              <a:t>8/28/25</a:t>
+              <a:t>10/2/25</a:t>
             </a:fld>
             <a:endParaRPr lang="en-US"/>
           </a:p>
@@ -34594,7 +34719,7 @@
           <a:p>
             <a:fld id="{93551A73-5757-9E4F-9CE4-87C840708D9E}" type="datetimeFigureOut">
               <a:rPr lang="en-US" smtClean="0"/>
-              <a:t>8/28/25</a:t>
+              <a:t>10/2/25</a:t>
             </a:fld>
             <a:endParaRPr lang="en-US"/>
           </a:p>
@@ -34905,7 +35030,7 @@
           <a:p>
             <a:fld id="{93551A73-5757-9E4F-9CE4-87C840708D9E}" type="datetimeFigureOut">
               <a:rPr lang="en-US" smtClean="0"/>
-              <a:t>8/28/25</a:t>
+              <a:t>10/2/25</a:t>
             </a:fld>
             <a:endParaRPr lang="en-US"/>
           </a:p>
@@ -35193,7 +35318,7 @@
           <a:p>
             <a:fld id="{93551A73-5757-9E4F-9CE4-87C840708D9E}" type="datetimeFigureOut">
               <a:rPr lang="en-US" smtClean="0"/>
-              <a:t>8/28/25</a:t>
+              <a:t>10/2/25</a:t>
             </a:fld>
             <a:endParaRPr lang="en-US"/>
           </a:p>
@@ -35434,7 +35559,7 @@
           <a:p>
             <a:fld id="{93551A73-5757-9E4F-9CE4-87C840708D9E}" type="datetimeFigureOut">
               <a:rPr lang="en-US" smtClean="0"/>
-              <a:t>8/28/25</a:t>
+              <a:t>10/2/25</a:t>
             </a:fld>
             <a:endParaRPr lang="en-US"/>
           </a:p>
@@ -35857,36 +35982,121 @@
           <a:chExt cx="0" cy="0"/>
         </a:xfrm>
       </p:grpSpPr>
-      <p:pic>
-        <p:nvPicPr>
-          <p:cNvPr id="52" name="Picture 51" descr="A blue and yellow spirals&#10;&#10;AI-generated content may be incorrect.">
+      <p:grpSp>
+        <p:nvGrpSpPr>
+          <p:cNvPr id="53" name="Group 52">
             <a:extLst>
               <a:ext uri="{FF2B5EF4-FFF2-40B4-BE49-F238E27FC236}">
-                <a16:creationId xmlns:a16="http://schemas.microsoft.com/office/drawing/2014/main" id="{7FE3E4ED-8283-1541-9EDC-EB37F28CC656}"/>
+                <a16:creationId xmlns:a16="http://schemas.microsoft.com/office/drawing/2014/main" id="{ED1487F7-0183-862B-1F0F-A115D82DB694}"/>
               </a:ext>
             </a:extLst>
           </p:cNvPr>
-          <p:cNvPicPr>
-            <a:picLocks noChangeAspect="1"/>
-          </p:cNvPicPr>
+          <p:cNvGrpSpPr>
+            <a:grpSpLocks noChangeAspect="1"/>
+          </p:cNvGrpSpPr>
           <p:nvPr/>
-        </p:nvPicPr>
-        <p:blipFill>
-          <a:blip r:embed="rId3"/>
-          <a:stretch>
-            <a:fillRect/>
-          </a:stretch>
-        </p:blipFill>
-        <p:spPr>
+        </p:nvGrpSpPr>
+        <p:grpSpPr>
           <a:xfrm>
-            <a:off x="11845871" y="522640"/>
-            <a:ext cx="1245273" cy="1882020"/>
+            <a:off x="10041426" y="858505"/>
+            <a:ext cx="3044851" cy="1293279"/>
+            <a:chOff x="-2466454" y="-180476"/>
+            <a:chExt cx="16387064" cy="6960286"/>
           </a:xfrm>
-          <a:prstGeom prst="rect">
-            <a:avLst/>
-          </a:prstGeom>
-        </p:spPr>
-      </p:pic>
+        </p:grpSpPr>
+        <p:pic>
+          <p:nvPicPr>
+            <p:cNvPr id="52" name="Picture 51" descr="A blue and yellow spirals&#10;&#10;AI-generated content may be incorrect.">
+              <a:extLst>
+                <a:ext uri="{FF2B5EF4-FFF2-40B4-BE49-F238E27FC236}">
+                  <a16:creationId xmlns:a16="http://schemas.microsoft.com/office/drawing/2014/main" id="{7FE3E4ED-8283-1541-9EDC-EB37F28CC656}"/>
+                </a:ext>
+              </a:extLst>
+            </p:cNvPr>
+            <p:cNvPicPr>
+              <a:picLocks noChangeAspect="1"/>
+            </p:cNvPicPr>
+            <p:nvPr/>
+          </p:nvPicPr>
+          <p:blipFill>
+            <a:blip r:embed="rId3"/>
+            <a:stretch>
+              <a:fillRect/>
+            </a:stretch>
+          </p:blipFill>
+          <p:spPr>
+            <a:xfrm>
+              <a:off x="9382890" y="-78190"/>
+              <a:ext cx="4537720" cy="6858000"/>
+            </a:xfrm>
+            <a:prstGeom prst="rect">
+              <a:avLst/>
+            </a:prstGeom>
+          </p:spPr>
+        </p:pic>
+        <p:pic>
+          <p:nvPicPr>
+            <p:cNvPr id="6" name="Picture 5" descr="A blue and yellow spiraled protein&#10;&#10;AI-generated content may be incorrect.">
+              <a:extLst>
+                <a:ext uri="{FF2B5EF4-FFF2-40B4-BE49-F238E27FC236}">
+                  <a16:creationId xmlns:a16="http://schemas.microsoft.com/office/drawing/2014/main" id="{D5179EF8-E609-CF85-600D-DC86567C1EF0}"/>
+                </a:ext>
+              </a:extLst>
+            </p:cNvPr>
+            <p:cNvPicPr>
+              <a:picLocks noChangeAspect="1"/>
+            </p:cNvPicPr>
+            <p:nvPr/>
+          </p:nvPicPr>
+          <p:blipFill>
+            <a:blip r:embed="rId4"/>
+            <a:srcRect r="5682"/>
+            <a:stretch>
+              <a:fillRect/>
+            </a:stretch>
+          </p:blipFill>
+          <p:spPr>
+            <a:xfrm>
+              <a:off x="4056524" y="-180476"/>
+              <a:ext cx="5771767" cy="6858000"/>
+            </a:xfrm>
+            <a:prstGeom prst="rect">
+              <a:avLst/>
+            </a:prstGeom>
+          </p:spPr>
+        </p:pic>
+        <p:pic>
+          <p:nvPicPr>
+            <p:cNvPr id="50" name="Picture 49" descr="A blue and yellow spiral structure&#10;&#10;AI-generated content may be incorrect.">
+              <a:extLst>
+                <a:ext uri="{FF2B5EF4-FFF2-40B4-BE49-F238E27FC236}">
+                  <a16:creationId xmlns:a16="http://schemas.microsoft.com/office/drawing/2014/main" id="{40D737F6-7F7D-00DA-5797-C7BEDEFA3A19}"/>
+                </a:ext>
+              </a:extLst>
+            </p:cNvPr>
+            <p:cNvPicPr>
+              <a:picLocks noChangeAspect="1"/>
+            </p:cNvPicPr>
+            <p:nvPr/>
+          </p:nvPicPr>
+          <p:blipFill>
+            <a:blip r:embed="rId5"/>
+            <a:srcRect r="6884"/>
+            <a:stretch>
+              <a:fillRect/>
+            </a:stretch>
+          </p:blipFill>
+          <p:spPr>
+            <a:xfrm>
+              <a:off x="-2466454" y="-85186"/>
+              <a:ext cx="7237347" cy="6711297"/>
+            </a:xfrm>
+            <a:prstGeom prst="rect">
+              <a:avLst/>
+            </a:prstGeom>
+          </p:spPr>
+        </p:pic>
+      </p:grpSp>
       <p:sp>
         <p:nvSpPr>
           <p:cNvPr id="7" name="Bent-Up Arrow 6">
@@ -36393,7 +36603,7 @@
         </p:xfrm>
         <a:graphic>
           <a:graphicData uri="http://schemas.openxmlformats.org/drawingml/2006/diagram">
-            <dgm:relIds xmlns:dgm="http://schemas.openxmlformats.org/drawingml/2006/diagram" xmlns:r="http://schemas.openxmlformats.org/officeDocument/2006/relationships" r:dm="rId4" r:lo="rId5" r:qs="rId6" r:cs="rId7"/>
+            <dgm:relIds xmlns:dgm="http://schemas.openxmlformats.org/drawingml/2006/diagram" xmlns:r="http://schemas.openxmlformats.org/officeDocument/2006/relationships" r:dm="rId6" r:lo="rId7" r:qs="rId8" r:cs="rId9"/>
           </a:graphicData>
         </a:graphic>
       </p:graphicFrame>
@@ -36474,7 +36684,7 @@
         </p:xfrm>
         <a:graphic>
           <a:graphicData uri="http://schemas.openxmlformats.org/drawingml/2006/diagram">
-            <dgm:relIds xmlns:dgm="http://schemas.openxmlformats.org/drawingml/2006/diagram" xmlns:r="http://schemas.openxmlformats.org/officeDocument/2006/relationships" r:dm="rId9" r:lo="rId10" r:qs="rId11" r:cs="rId12"/>
+            <dgm:relIds xmlns:dgm="http://schemas.openxmlformats.org/drawingml/2006/diagram" xmlns:r="http://schemas.openxmlformats.org/officeDocument/2006/relationships" r:dm="rId11" r:lo="rId12" r:qs="rId13" r:cs="rId14"/>
           </a:graphicData>
         </a:graphic>
       </p:graphicFrame>
@@ -36502,7 +36712,7 @@
         </p:xfrm>
         <a:graphic>
           <a:graphicData uri="http://schemas.openxmlformats.org/drawingml/2006/diagram">
-            <dgm:relIds xmlns:dgm="http://schemas.openxmlformats.org/drawingml/2006/diagram" xmlns:r="http://schemas.openxmlformats.org/officeDocument/2006/relationships" r:dm="rId14" r:lo="rId15" r:qs="rId16" r:cs="rId17"/>
+            <dgm:relIds xmlns:dgm="http://schemas.openxmlformats.org/drawingml/2006/diagram" xmlns:r="http://schemas.openxmlformats.org/officeDocument/2006/relationships" r:dm="rId16" r:lo="rId17" r:qs="rId18" r:cs="rId19"/>
           </a:graphicData>
         </a:graphic>
       </p:graphicFrame>
@@ -36521,10 +36731,10 @@
           <p:nvPr/>
         </p:nvPicPr>
         <p:blipFill>
-          <a:blip r:embed="rId19">
+          <a:blip r:embed="rId21">
             <a:extLst>
               <a:ext uri="{96DAC541-7B7A-43D3-8B79-37D633B846F1}">
-                <asvg:svgBlip xmlns:asvg="http://schemas.microsoft.com/office/drawing/2016/SVG/main" r:embed="rId20"/>
+                <asvg:svgBlip xmlns:asvg="http://schemas.microsoft.com/office/drawing/2016/SVG/main" r:embed="rId22"/>
               </a:ext>
             </a:extLst>
           </a:blip>
@@ -36557,10 +36767,10 @@
           <p:nvPr/>
         </p:nvPicPr>
         <p:blipFill>
-          <a:blip r:embed="rId21">
+          <a:blip r:embed="rId23">
             <a:extLst>
               <a:ext uri="{96DAC541-7B7A-43D3-8B79-37D633B846F1}">
-                <asvg:svgBlip xmlns:asvg="http://schemas.microsoft.com/office/drawing/2016/SVG/main" r:embed="rId22"/>
+                <asvg:svgBlip xmlns:asvg="http://schemas.microsoft.com/office/drawing/2016/SVG/main" r:embed="rId24"/>
               </a:ext>
             </a:extLst>
           </a:blip>
@@ -36602,7 +36812,7 @@
         </p:xfrm>
         <a:graphic>
           <a:graphicData uri="http://schemas.openxmlformats.org/drawingml/2006/diagram">
-            <dgm:relIds xmlns:dgm="http://schemas.openxmlformats.org/drawingml/2006/diagram" xmlns:r="http://schemas.openxmlformats.org/officeDocument/2006/relationships" r:dm="rId23" r:lo="rId24" r:qs="rId25" r:cs="rId26"/>
+            <dgm:relIds xmlns:dgm="http://schemas.openxmlformats.org/drawingml/2006/diagram" xmlns:r="http://schemas.openxmlformats.org/officeDocument/2006/relationships" r:dm="rId25" r:lo="rId26" r:qs="rId27" r:cs="rId28"/>
           </a:graphicData>
         </a:graphic>
       </p:graphicFrame>
@@ -36953,7 +37163,7 @@
         </p:xfrm>
         <a:graphic>
           <a:graphicData uri="http://schemas.openxmlformats.org/drawingml/2006/diagram">
-            <dgm:relIds xmlns:dgm="http://schemas.openxmlformats.org/drawingml/2006/diagram" xmlns:r="http://schemas.openxmlformats.org/officeDocument/2006/relationships" r:dm="rId28" r:lo="rId29" r:qs="rId30" r:cs="rId31"/>
+            <dgm:relIds xmlns:dgm="http://schemas.openxmlformats.org/drawingml/2006/diagram" xmlns:r="http://schemas.openxmlformats.org/officeDocument/2006/relationships" r:dm="rId30" r:lo="rId31" r:qs="rId32" r:cs="rId33"/>
           </a:graphicData>
         </a:graphic>
       </p:graphicFrame>
@@ -36981,7 +37191,7 @@
         </p:xfrm>
         <a:graphic>
           <a:graphicData uri="http://schemas.openxmlformats.org/drawingml/2006/diagram">
-            <dgm:relIds xmlns:dgm="http://schemas.openxmlformats.org/drawingml/2006/diagram" xmlns:r="http://schemas.openxmlformats.org/officeDocument/2006/relationships" r:dm="rId33" r:lo="rId34" r:qs="rId35" r:cs="rId36"/>
+            <dgm:relIds xmlns:dgm="http://schemas.openxmlformats.org/drawingml/2006/diagram" xmlns:r="http://schemas.openxmlformats.org/officeDocument/2006/relationships" r:dm="rId35" r:lo="rId36" r:qs="rId37" r:cs="rId38"/>
           </a:graphicData>
         </a:graphic>
       </p:graphicFrame>
@@ -37009,7 +37219,7 @@
         </p:xfrm>
         <a:graphic>
           <a:graphicData uri="http://schemas.openxmlformats.org/drawingml/2006/diagram">
-            <dgm:relIds xmlns:dgm="http://schemas.openxmlformats.org/drawingml/2006/diagram" xmlns:r="http://schemas.openxmlformats.org/officeDocument/2006/relationships" r:dm="rId38" r:lo="rId39" r:qs="rId40" r:cs="rId41"/>
+            <dgm:relIds xmlns:dgm="http://schemas.openxmlformats.org/drawingml/2006/diagram" xmlns:r="http://schemas.openxmlformats.org/officeDocument/2006/relationships" r:dm="rId40" r:lo="rId41" r:qs="rId42" r:cs="rId43"/>
           </a:graphicData>
         </a:graphic>
       </p:graphicFrame>
@@ -37028,10 +37238,10 @@
           <p:nvPr/>
         </p:nvPicPr>
         <p:blipFill>
-          <a:blip r:embed="rId19">
+          <a:blip r:embed="rId21">
             <a:extLst>
               <a:ext uri="{96DAC541-7B7A-43D3-8B79-37D633B846F1}">
-                <asvg:svgBlip xmlns:asvg="http://schemas.microsoft.com/office/drawing/2016/SVG/main" r:embed="rId20"/>
+                <asvg:svgBlip xmlns:asvg="http://schemas.microsoft.com/office/drawing/2016/SVG/main" r:embed="rId22"/>
               </a:ext>
             </a:extLst>
           </a:blip>
@@ -37064,10 +37274,10 @@
           <p:nvPr/>
         </p:nvPicPr>
         <p:blipFill>
-          <a:blip r:embed="rId21">
+          <a:blip r:embed="rId23">
             <a:extLst>
               <a:ext uri="{96DAC541-7B7A-43D3-8B79-37D633B846F1}">
-                <asvg:svgBlip xmlns:asvg="http://schemas.microsoft.com/office/drawing/2016/SVG/main" r:embed="rId22"/>
+                <asvg:svgBlip xmlns:asvg="http://schemas.microsoft.com/office/drawing/2016/SVG/main" r:embed="rId24"/>
               </a:ext>
             </a:extLst>
           </a:blip>
@@ -37109,7 +37319,7 @@
         </p:xfrm>
         <a:graphic>
           <a:graphicData uri="http://schemas.openxmlformats.org/drawingml/2006/diagram">
-            <dgm:relIds xmlns:dgm="http://schemas.openxmlformats.org/drawingml/2006/diagram" xmlns:r="http://schemas.openxmlformats.org/officeDocument/2006/relationships" r:dm="rId43" r:lo="rId44" r:qs="rId45" r:cs="rId46"/>
+            <dgm:relIds xmlns:dgm="http://schemas.openxmlformats.org/drawingml/2006/diagram" xmlns:r="http://schemas.openxmlformats.org/officeDocument/2006/relationships" r:dm="rId45" r:lo="rId46" r:qs="rId47" r:cs="rId48"/>
           </a:graphicData>
         </a:graphic>
       </p:graphicFrame>
@@ -37468,7 +37678,7 @@
           <p:nvPr/>
         </p:nvPicPr>
         <p:blipFill>
-          <a:blip r:embed="rId48"/>
+          <a:blip r:embed="rId50"/>
           <a:stretch>
             <a:fillRect/>
           </a:stretch>
@@ -38034,6 +38244,5628 @@
     <p:extLst>
       <p:ext uri="{BB962C8B-B14F-4D97-AF65-F5344CB8AC3E}">
         <p14:creationId xmlns:p14="http://schemas.microsoft.com/office/powerpoint/2010/main" val="681157422"/>
+      </p:ext>
+    </p:extLst>
+  </p:cSld>
+  <p:clrMapOvr>
+    <a:masterClrMapping/>
+  </p:clrMapOvr>
+</p:sld>
+</file>
+
+<file path=ppt/slides/slide2.xml><?xml version="1.0" encoding="utf-8"?>
+<p:sld xmlns:a="http://schemas.openxmlformats.org/drawingml/2006/main" xmlns:r="http://schemas.openxmlformats.org/officeDocument/2006/relationships" xmlns:p="http://schemas.openxmlformats.org/presentationml/2006/main">
+  <p:cSld>
+    <p:spTree>
+      <p:nvGrpSpPr>
+        <p:cNvPr id="1" name="">
+          <a:extLst>
+            <a:ext uri="{FF2B5EF4-FFF2-40B4-BE49-F238E27FC236}">
+              <a16:creationId xmlns:a16="http://schemas.microsoft.com/office/drawing/2014/main" id="{770507B4-6F35-93EE-0920-FE29C7133C2D}"/>
+            </a:ext>
+          </a:extLst>
+        </p:cNvPr>
+        <p:cNvGrpSpPr/>
+        <p:nvPr/>
+      </p:nvGrpSpPr>
+      <p:grpSpPr>
+        <a:xfrm>
+          <a:off x="0" y="0"/>
+          <a:ext cx="0" cy="0"/>
+          <a:chOff x="0" y="0"/>
+          <a:chExt cx="0" cy="0"/>
+        </a:xfrm>
+      </p:grpSpPr>
+      <p:sp>
+        <p:nvSpPr>
+          <p:cNvPr id="8" name="Triangle 7">
+            <a:extLst>
+              <a:ext uri="{FF2B5EF4-FFF2-40B4-BE49-F238E27FC236}">
+                <a16:creationId xmlns:a16="http://schemas.microsoft.com/office/drawing/2014/main" id="{8715A702-56CB-6595-2118-55A9EED1C503}"/>
+              </a:ext>
+            </a:extLst>
+          </p:cNvPr>
+          <p:cNvSpPr/>
+          <p:nvPr/>
+        </p:nvSpPr>
+        <p:spPr>
+          <a:xfrm rot="5400000">
+            <a:off x="6546262" y="1276673"/>
+            <a:ext cx="2351370" cy="877641"/>
+          </a:xfrm>
+          <a:prstGeom prst="triangle">
+            <a:avLst/>
+          </a:prstGeom>
+          <a:solidFill>
+            <a:schemeClr val="tx1">
+              <a:lumMod val="65000"/>
+              <a:lumOff val="35000"/>
+            </a:schemeClr>
+          </a:solidFill>
+          <a:ln w="12700" cap="flat" cmpd="sng" algn="ctr">
+            <a:noFill/>
+            <a:prstDash val="solid"/>
+            <a:miter lim="800000"/>
+          </a:ln>
+          <a:effectLst/>
+        </p:spPr>
+        <p:style>
+          <a:lnRef idx="2">
+            <a:schemeClr val="accent1">
+              <a:shade val="50000"/>
+            </a:schemeClr>
+          </a:lnRef>
+          <a:fillRef idx="1">
+            <a:schemeClr val="accent1"/>
+          </a:fillRef>
+          <a:effectRef idx="0">
+            <a:schemeClr val="accent1"/>
+          </a:effectRef>
+          <a:fontRef idx="minor">
+            <a:schemeClr val="lt1"/>
+          </a:fontRef>
+        </p:style>
+        <p:txBody>
+          <a:bodyPr rtlCol="0" anchor="ctr"/>
+          <a:lstStyle/>
+          <a:p>
+            <a:pPr algn="ctr"/>
+            <a:endParaRPr lang="en-US"/>
+          </a:p>
+        </p:txBody>
+      </p:sp>
+      <p:sp>
+        <p:nvSpPr>
+          <p:cNvPr id="10" name="TextBox 9">
+            <a:extLst>
+              <a:ext uri="{FF2B5EF4-FFF2-40B4-BE49-F238E27FC236}">
+                <a16:creationId xmlns:a16="http://schemas.microsoft.com/office/drawing/2014/main" id="{6CFBEDE3-06C8-FC58-003F-010EBC4F83CC}"/>
+              </a:ext>
+            </a:extLst>
+          </p:cNvPr>
+          <p:cNvSpPr txBox="1"/>
+          <p:nvPr/>
+        </p:nvSpPr>
+        <p:spPr>
+          <a:xfrm>
+            <a:off x="4096502" y="3322082"/>
+            <a:ext cx="825097" cy="357545"/>
+          </a:xfrm>
+          <a:prstGeom prst="roundRect">
+            <a:avLst/>
+          </a:prstGeom>
+          <a:solidFill>
+            <a:srgbClr val="FF2600"/>
+          </a:solidFill>
+          <a:ln>
+            <a:noFill/>
+          </a:ln>
+        </p:spPr>
+        <p:txBody>
+          <a:bodyPr wrap="square" rtlCol="0" anchor="ctr">
+            <a:spAutoFit/>
+          </a:bodyPr>
+          <a:lstStyle/>
+          <a:p>
+            <a:pPr algn="ctr"/>
+            <a:r>
+              <a:rPr lang="en-US" sz="1500" dirty="0">
+                <a:solidFill>
+                  <a:schemeClr val="bg1"/>
+                </a:solidFill>
+                <a:latin typeface="Calibri" panose="020F0502020204030204" pitchFamily="34" charset="0"/>
+                <a:cs typeface="Calibri" panose="020F0502020204030204" pitchFamily="34" charset="0"/>
+              </a:rPr>
+              <a:t>c.9T&gt;G</a:t>
+            </a:r>
+          </a:p>
+        </p:txBody>
+      </p:sp>
+      <p:sp>
+        <p:nvSpPr>
+          <p:cNvPr id="16" name="Rectangle 15">
+            <a:extLst>
+              <a:ext uri="{FF2B5EF4-FFF2-40B4-BE49-F238E27FC236}">
+                <a16:creationId xmlns:a16="http://schemas.microsoft.com/office/drawing/2014/main" id="{1A9915F2-3690-D8F2-502D-B8EE0F791F63}"/>
+              </a:ext>
+            </a:extLst>
+          </p:cNvPr>
+          <p:cNvSpPr/>
+          <p:nvPr/>
+        </p:nvSpPr>
+        <p:spPr>
+          <a:xfrm>
+            <a:off x="157649" y="527116"/>
+            <a:ext cx="7117014" cy="2351369"/>
+          </a:xfrm>
+          <a:prstGeom prst="rect">
+            <a:avLst/>
+          </a:prstGeom>
+          <a:solidFill>
+            <a:srgbClr val="7675E5">
+              <a:alpha val="25000"/>
+            </a:srgbClr>
+          </a:solidFill>
+          <a:ln w="12700" cap="flat" cmpd="sng" algn="ctr">
+            <a:noFill/>
+            <a:prstDash val="solid"/>
+            <a:miter lim="800000"/>
+          </a:ln>
+          <a:effectLst/>
+        </p:spPr>
+        <p:style>
+          <a:lnRef idx="2">
+            <a:schemeClr val="accent1">
+              <a:shade val="50000"/>
+            </a:schemeClr>
+          </a:lnRef>
+          <a:fillRef idx="1">
+            <a:schemeClr val="accent1"/>
+          </a:fillRef>
+          <a:effectRef idx="0">
+            <a:schemeClr val="accent1"/>
+          </a:effectRef>
+          <a:fontRef idx="minor">
+            <a:schemeClr val="lt1"/>
+          </a:fontRef>
+        </p:style>
+        <p:txBody>
+          <a:bodyPr tIns="182880" rtlCol="0" anchor="t"/>
+          <a:lstStyle/>
+          <a:p>
+            <a:r>
+              <a:rPr lang="en-US" b="1" dirty="0">
+                <a:solidFill>
+                  <a:schemeClr val="tx1"/>
+                </a:solidFill>
+                <a:latin typeface="Calibri" panose="020F0502020204030204" pitchFamily="34" charset="0"/>
+                <a:cs typeface="Calibri" panose="020F0502020204030204" pitchFamily="34" charset="0"/>
+              </a:rPr>
+              <a:t>Wildtype </a:t>
+            </a:r>
+          </a:p>
+          <a:p>
+            <a:r>
+              <a:rPr lang="en-US" b="1" dirty="0">
+                <a:solidFill>
+                  <a:schemeClr val="tx1"/>
+                </a:solidFill>
+                <a:latin typeface="Calibri" panose="020F0502020204030204" pitchFamily="34" charset="0"/>
+                <a:cs typeface="Calibri" panose="020F0502020204030204" pitchFamily="34" charset="0"/>
+              </a:rPr>
+              <a:t>Sequences</a:t>
+            </a:r>
+          </a:p>
+          <a:p>
+            <a:r>
+              <a:rPr lang="en-US" b="1" dirty="0">
+                <a:solidFill>
+                  <a:schemeClr val="tx1"/>
+                </a:solidFill>
+                <a:latin typeface="Calibri" panose="020F0502020204030204" pitchFamily="34" charset="0"/>
+                <a:cs typeface="Calibri" panose="020F0502020204030204" pitchFamily="34" charset="0"/>
+              </a:rPr>
+              <a:t>(WT)</a:t>
+            </a:r>
+          </a:p>
+        </p:txBody>
+      </p:sp>
+      <p:sp>
+        <p:nvSpPr>
+          <p:cNvPr id="17" name="Rectangle 16">
+            <a:extLst>
+              <a:ext uri="{FF2B5EF4-FFF2-40B4-BE49-F238E27FC236}">
+                <a16:creationId xmlns:a16="http://schemas.microsoft.com/office/drawing/2014/main" id="{80468BF8-2F74-724E-25FB-B325DEAF0B17}"/>
+              </a:ext>
+            </a:extLst>
+          </p:cNvPr>
+          <p:cNvSpPr/>
+          <p:nvPr/>
+        </p:nvSpPr>
+        <p:spPr>
+          <a:xfrm>
+            <a:off x="1346741" y="773788"/>
+            <a:ext cx="5960793" cy="399693"/>
+          </a:xfrm>
+          <a:prstGeom prst="rect">
+            <a:avLst/>
+          </a:prstGeom>
+          <a:solidFill>
+            <a:srgbClr val="7675E5">
+              <a:alpha val="25000"/>
+            </a:srgbClr>
+          </a:solidFill>
+          <a:ln w="12700" cap="flat" cmpd="sng" algn="ctr">
+            <a:noFill/>
+            <a:prstDash val="solid"/>
+            <a:miter lim="800000"/>
+          </a:ln>
+          <a:effectLst/>
+        </p:spPr>
+        <p:style>
+          <a:lnRef idx="2">
+            <a:schemeClr val="accent1">
+              <a:shade val="50000"/>
+            </a:schemeClr>
+          </a:lnRef>
+          <a:fillRef idx="1">
+            <a:schemeClr val="accent1"/>
+          </a:fillRef>
+          <a:effectRef idx="0">
+            <a:schemeClr val="accent1"/>
+          </a:effectRef>
+          <a:fontRef idx="minor">
+            <a:schemeClr val="lt1"/>
+          </a:fontRef>
+        </p:style>
+        <p:txBody>
+          <a:bodyPr rtlCol="0" anchor="t"/>
+          <a:lstStyle/>
+          <a:p>
+            <a:r>
+              <a:rPr lang="en-US" sz="1200" dirty="0">
+                <a:solidFill>
+                  <a:schemeClr val="tx1"/>
+                </a:solidFill>
+                <a:latin typeface="Calibri" panose="020F0502020204030204" pitchFamily="34" charset="0"/>
+                <a:cs typeface="Calibri" panose="020F0502020204030204" pitchFamily="34" charset="0"/>
+              </a:rPr>
+              <a:t>Reference</a:t>
+            </a:r>
+          </a:p>
+          <a:p>
+            <a:r>
+              <a:rPr lang="en-US" sz="1200" dirty="0">
+                <a:solidFill>
+                  <a:schemeClr val="tx1"/>
+                </a:solidFill>
+                <a:latin typeface="Calibri" panose="020F0502020204030204" pitchFamily="34" charset="0"/>
+                <a:cs typeface="Calibri" panose="020F0502020204030204" pitchFamily="34" charset="0"/>
+              </a:rPr>
+              <a:t>Genome</a:t>
+            </a:r>
+          </a:p>
+        </p:txBody>
+      </p:sp>
+      <p:sp>
+        <p:nvSpPr>
+          <p:cNvPr id="18" name="Rectangle 17">
+            <a:extLst>
+              <a:ext uri="{FF2B5EF4-FFF2-40B4-BE49-F238E27FC236}">
+                <a16:creationId xmlns:a16="http://schemas.microsoft.com/office/drawing/2014/main" id="{2EFB814B-D696-4830-8495-E5FCB806FD42}"/>
+              </a:ext>
+            </a:extLst>
+          </p:cNvPr>
+          <p:cNvSpPr/>
+          <p:nvPr/>
+        </p:nvSpPr>
+        <p:spPr>
+          <a:xfrm>
+            <a:off x="1346741" y="1253905"/>
+            <a:ext cx="5960793" cy="1477446"/>
+          </a:xfrm>
+          <a:prstGeom prst="rect">
+            <a:avLst/>
+          </a:prstGeom>
+          <a:solidFill>
+            <a:srgbClr val="7675E5">
+              <a:alpha val="25000"/>
+            </a:srgbClr>
+          </a:solidFill>
+          <a:ln w="12700" cap="flat" cmpd="sng" algn="ctr">
+            <a:noFill/>
+            <a:prstDash val="solid"/>
+            <a:miter lim="800000"/>
+          </a:ln>
+          <a:effectLst/>
+        </p:spPr>
+        <p:style>
+          <a:lnRef idx="2">
+            <a:schemeClr val="accent1">
+              <a:shade val="50000"/>
+            </a:schemeClr>
+          </a:lnRef>
+          <a:fillRef idx="1">
+            <a:schemeClr val="accent1"/>
+          </a:fillRef>
+          <a:effectRef idx="0">
+            <a:schemeClr val="accent1"/>
+          </a:effectRef>
+          <a:fontRef idx="minor">
+            <a:schemeClr val="lt1"/>
+          </a:fontRef>
+        </p:style>
+        <p:txBody>
+          <a:bodyPr rtlCol="0" anchor="t"/>
+          <a:lstStyle/>
+          <a:p>
+            <a:r>
+              <a:rPr lang="en-US" sz="1200" dirty="0">
+                <a:solidFill>
+                  <a:schemeClr val="tx1"/>
+                </a:solidFill>
+                <a:latin typeface="Calibri" panose="020F0502020204030204" pitchFamily="34" charset="0"/>
+                <a:cs typeface="Calibri" panose="020F0502020204030204" pitchFamily="34" charset="0"/>
+              </a:rPr>
+              <a:t>Personalized</a:t>
+            </a:r>
+          </a:p>
+          <a:p>
+            <a:r>
+              <a:rPr lang="en-US" sz="1200" dirty="0">
+                <a:solidFill>
+                  <a:schemeClr val="tx1"/>
+                </a:solidFill>
+                <a:latin typeface="Calibri" panose="020F0502020204030204" pitchFamily="34" charset="0"/>
+                <a:cs typeface="Calibri" panose="020F0502020204030204" pitchFamily="34" charset="0"/>
+              </a:rPr>
+              <a:t>Genomes</a:t>
+            </a:r>
+          </a:p>
+        </p:txBody>
+      </p:sp>
+      <p:sp>
+        <p:nvSpPr>
+          <p:cNvPr id="20" name="TextBox 19">
+            <a:extLst>
+              <a:ext uri="{FF2B5EF4-FFF2-40B4-BE49-F238E27FC236}">
+                <a16:creationId xmlns:a16="http://schemas.microsoft.com/office/drawing/2014/main" id="{98CF97F6-01B3-BB3C-B001-1642A30822A7}"/>
+              </a:ext>
+            </a:extLst>
+          </p:cNvPr>
+          <p:cNvSpPr txBox="1"/>
+          <p:nvPr/>
+        </p:nvSpPr>
+        <p:spPr>
+          <a:xfrm>
+            <a:off x="3861241" y="3047089"/>
+            <a:ext cx="1519227" cy="323165"/>
+          </a:xfrm>
+          <a:prstGeom prst="rect">
+            <a:avLst/>
+          </a:prstGeom>
+          <a:noFill/>
+        </p:spPr>
+        <p:txBody>
+          <a:bodyPr wrap="square" rtlCol="0">
+            <a:spAutoFit/>
+          </a:bodyPr>
+          <a:lstStyle/>
+          <a:p>
+            <a:r>
+              <a:rPr lang="en-US" sz="1500" dirty="0">
+                <a:solidFill>
+                  <a:srgbClr val="EA7978"/>
+                </a:solidFill>
+                <a:latin typeface="Calibri" panose="020F0502020204030204" pitchFamily="34" charset="0"/>
+                <a:cs typeface="Calibri" panose="020F0502020204030204" pitchFamily="34" charset="0"/>
+              </a:rPr>
+              <a:t>Clinical Variant</a:t>
+            </a:r>
+          </a:p>
+        </p:txBody>
+      </p:sp>
+      <p:pic>
+        <p:nvPicPr>
+          <p:cNvPr id="23" name="Graphic 22" descr="Group of people with solid fill">
+            <a:extLst>
+              <a:ext uri="{FF2B5EF4-FFF2-40B4-BE49-F238E27FC236}">
+                <a16:creationId xmlns:a16="http://schemas.microsoft.com/office/drawing/2014/main" id="{E046E72C-D71D-1D2A-B701-3C46E5BF0113}"/>
+              </a:ext>
+            </a:extLst>
+          </p:cNvPr>
+          <p:cNvPicPr>
+            <a:picLocks noChangeAspect="1"/>
+          </p:cNvPicPr>
+          <p:nvPr/>
+        </p:nvPicPr>
+        <p:blipFill>
+          <a:blip r:embed="rId3">
+            <a:extLst>
+              <a:ext uri="{96DAC541-7B7A-43D3-8B79-37D633B846F1}">
+                <asvg:svgBlip xmlns:asvg="http://schemas.microsoft.com/office/drawing/2016/SVG/main" r:embed="rId4"/>
+              </a:ext>
+            </a:extLst>
+          </a:blip>
+          <a:stretch>
+            <a:fillRect/>
+          </a:stretch>
+        </p:blipFill>
+        <p:spPr>
+          <a:xfrm>
+            <a:off x="1744607" y="1565755"/>
+            <a:ext cx="1047931" cy="1047931"/>
+          </a:xfrm>
+          <a:prstGeom prst="rect">
+            <a:avLst/>
+          </a:prstGeom>
+        </p:spPr>
+      </p:pic>
+      <p:pic>
+        <p:nvPicPr>
+          <p:cNvPr id="25" name="Graphic 24" descr="Man with solid fill">
+            <a:extLst>
+              <a:ext uri="{FF2B5EF4-FFF2-40B4-BE49-F238E27FC236}">
+                <a16:creationId xmlns:a16="http://schemas.microsoft.com/office/drawing/2014/main" id="{803A7B91-D2A1-0E8D-EC7D-99D3EA7A55DD}"/>
+              </a:ext>
+            </a:extLst>
+          </p:cNvPr>
+          <p:cNvPicPr>
+            <a:picLocks noChangeAspect="1"/>
+          </p:cNvPicPr>
+          <p:nvPr/>
+        </p:nvPicPr>
+        <p:blipFill>
+          <a:blip r:embed="rId5">
+            <a:extLst>
+              <a:ext uri="{96DAC541-7B7A-43D3-8B79-37D633B846F1}">
+                <asvg:svgBlip xmlns:asvg="http://schemas.microsoft.com/office/drawing/2016/SVG/main" r:embed="rId6"/>
+              </a:ext>
+            </a:extLst>
+          </a:blip>
+          <a:stretch>
+            <a:fillRect/>
+          </a:stretch>
+        </p:blipFill>
+        <p:spPr>
+          <a:xfrm>
+            <a:off x="2123271" y="827937"/>
+            <a:ext cx="291042" cy="291042"/>
+          </a:xfrm>
+          <a:prstGeom prst="rect">
+            <a:avLst/>
+          </a:prstGeom>
+        </p:spPr>
+      </p:pic>
+      <p:sp>
+        <p:nvSpPr>
+          <p:cNvPr id="27" name="TextBox 26">
+            <a:extLst>
+              <a:ext uri="{FF2B5EF4-FFF2-40B4-BE49-F238E27FC236}">
+                <a16:creationId xmlns:a16="http://schemas.microsoft.com/office/drawing/2014/main" id="{AB9EC2D6-FCF2-6071-AF51-C8E69EA6EBAF}"/>
+              </a:ext>
+            </a:extLst>
+          </p:cNvPr>
+          <p:cNvSpPr txBox="1"/>
+          <p:nvPr/>
+        </p:nvSpPr>
+        <p:spPr>
+          <a:xfrm>
+            <a:off x="4576431" y="1684338"/>
+            <a:ext cx="920445" cy="707886"/>
+          </a:xfrm>
+          <a:prstGeom prst="rect">
+            <a:avLst/>
+          </a:prstGeom>
+          <a:noFill/>
+        </p:spPr>
+        <p:txBody>
+          <a:bodyPr wrap="square" rtlCol="0">
+            <a:spAutoFit/>
+          </a:bodyPr>
+          <a:lstStyle/>
+          <a:p>
+            <a:r>
+              <a:rPr lang="en-US" sz="4000" dirty="0">
+                <a:solidFill>
+                  <a:schemeClr val="tx1">
+                    <a:lumMod val="85000"/>
+                    <a:lumOff val="15000"/>
+                  </a:schemeClr>
+                </a:solidFill>
+                <a:latin typeface="Calibri" panose="020F0502020204030204" pitchFamily="34" charset="0"/>
+                <a:cs typeface="Calibri" panose="020F0502020204030204" pitchFamily="34" charset="0"/>
+              </a:rPr>
+              <a:t> . . .</a:t>
+            </a:r>
+          </a:p>
+        </p:txBody>
+      </p:sp>
+      <p:sp>
+        <p:nvSpPr>
+          <p:cNvPr id="29" name="Rectangle 28">
+            <a:extLst>
+              <a:ext uri="{FF2B5EF4-FFF2-40B4-BE49-F238E27FC236}">
+                <a16:creationId xmlns:a16="http://schemas.microsoft.com/office/drawing/2014/main" id="{CF7D29FB-4A1F-0547-870F-43590E4FE440}"/>
+              </a:ext>
+            </a:extLst>
+          </p:cNvPr>
+          <p:cNvSpPr/>
+          <p:nvPr/>
+        </p:nvSpPr>
+        <p:spPr>
+          <a:xfrm>
+            <a:off x="157649" y="3951495"/>
+            <a:ext cx="7117014" cy="2351369"/>
+          </a:xfrm>
+          <a:prstGeom prst="rect">
+            <a:avLst/>
+          </a:prstGeom>
+          <a:solidFill>
+            <a:srgbClr val="EA7978">
+              <a:alpha val="30000"/>
+            </a:srgbClr>
+          </a:solidFill>
+          <a:ln w="12700" cap="flat" cmpd="sng" algn="ctr">
+            <a:noFill/>
+            <a:prstDash val="solid"/>
+            <a:miter lim="800000"/>
+          </a:ln>
+          <a:effectLst/>
+        </p:spPr>
+        <p:style>
+          <a:lnRef idx="2">
+            <a:schemeClr val="accent1">
+              <a:shade val="50000"/>
+            </a:schemeClr>
+          </a:lnRef>
+          <a:fillRef idx="1">
+            <a:schemeClr val="accent1"/>
+          </a:fillRef>
+          <a:effectRef idx="0">
+            <a:schemeClr val="accent1"/>
+          </a:effectRef>
+          <a:fontRef idx="minor">
+            <a:schemeClr val="lt1"/>
+          </a:fontRef>
+        </p:style>
+        <p:txBody>
+          <a:bodyPr tIns="182880" rtlCol="0" anchor="t"/>
+          <a:lstStyle/>
+          <a:p>
+            <a:r>
+              <a:rPr lang="en-US" b="1" dirty="0">
+                <a:solidFill>
+                  <a:schemeClr val="tx1"/>
+                </a:solidFill>
+                <a:latin typeface="Calibri" panose="020F0502020204030204" pitchFamily="34" charset="0"/>
+                <a:cs typeface="Calibri" panose="020F0502020204030204" pitchFamily="34" charset="0"/>
+              </a:rPr>
+              <a:t>Mutated </a:t>
+            </a:r>
+          </a:p>
+          <a:p>
+            <a:r>
+              <a:rPr lang="en-US" b="1" dirty="0">
+                <a:solidFill>
+                  <a:schemeClr val="tx1"/>
+                </a:solidFill>
+                <a:latin typeface="Calibri" panose="020F0502020204030204" pitchFamily="34" charset="0"/>
+                <a:cs typeface="Calibri" panose="020F0502020204030204" pitchFamily="34" charset="0"/>
+              </a:rPr>
+              <a:t>Sequences</a:t>
+            </a:r>
+          </a:p>
+          <a:p>
+            <a:r>
+              <a:rPr lang="en-US" b="1" dirty="0">
+                <a:solidFill>
+                  <a:schemeClr val="tx1"/>
+                </a:solidFill>
+                <a:latin typeface="Calibri" panose="020F0502020204030204" pitchFamily="34" charset="0"/>
+                <a:cs typeface="Calibri" panose="020F0502020204030204" pitchFamily="34" charset="0"/>
+              </a:rPr>
+              <a:t>(MUT)</a:t>
+            </a:r>
+          </a:p>
+        </p:txBody>
+      </p:sp>
+      <p:sp>
+        <p:nvSpPr>
+          <p:cNvPr id="30" name="Rectangle 29">
+            <a:extLst>
+              <a:ext uri="{FF2B5EF4-FFF2-40B4-BE49-F238E27FC236}">
+                <a16:creationId xmlns:a16="http://schemas.microsoft.com/office/drawing/2014/main" id="{A839C3AD-797A-C8BC-0D05-8CC8E1D52072}"/>
+              </a:ext>
+            </a:extLst>
+          </p:cNvPr>
+          <p:cNvSpPr/>
+          <p:nvPr/>
+        </p:nvSpPr>
+        <p:spPr>
+          <a:xfrm>
+            <a:off x="1346740" y="4640514"/>
+            <a:ext cx="5960793" cy="1477446"/>
+          </a:xfrm>
+          <a:prstGeom prst="rect">
+            <a:avLst/>
+          </a:prstGeom>
+          <a:solidFill>
+            <a:srgbClr val="EA7978">
+              <a:alpha val="30000"/>
+            </a:srgbClr>
+          </a:solidFill>
+          <a:ln w="12700" cap="flat" cmpd="sng" algn="ctr">
+            <a:noFill/>
+            <a:prstDash val="solid"/>
+            <a:miter lim="800000"/>
+          </a:ln>
+          <a:effectLst/>
+        </p:spPr>
+        <p:style>
+          <a:lnRef idx="2">
+            <a:schemeClr val="accent1">
+              <a:shade val="50000"/>
+            </a:schemeClr>
+          </a:lnRef>
+          <a:fillRef idx="1">
+            <a:schemeClr val="accent1"/>
+          </a:fillRef>
+          <a:effectRef idx="0">
+            <a:schemeClr val="accent1"/>
+          </a:effectRef>
+          <a:fontRef idx="minor">
+            <a:schemeClr val="lt1"/>
+          </a:fontRef>
+        </p:style>
+        <p:txBody>
+          <a:bodyPr rtlCol="0" anchor="t"/>
+          <a:lstStyle/>
+          <a:p>
+            <a:r>
+              <a:rPr lang="en-US" sz="1200" dirty="0">
+                <a:solidFill>
+                  <a:schemeClr val="tx1"/>
+                </a:solidFill>
+                <a:latin typeface="Calibri" panose="020F0502020204030204" pitchFamily="34" charset="0"/>
+                <a:cs typeface="Calibri" panose="020F0502020204030204" pitchFamily="34" charset="0"/>
+              </a:rPr>
+              <a:t>Personalized</a:t>
+            </a:r>
+          </a:p>
+          <a:p>
+            <a:r>
+              <a:rPr lang="en-US" sz="1200" dirty="0">
+                <a:solidFill>
+                  <a:schemeClr val="tx1"/>
+                </a:solidFill>
+                <a:latin typeface="Calibri" panose="020F0502020204030204" pitchFamily="34" charset="0"/>
+                <a:cs typeface="Calibri" panose="020F0502020204030204" pitchFamily="34" charset="0"/>
+              </a:rPr>
+              <a:t>Genomes</a:t>
+            </a:r>
+          </a:p>
+        </p:txBody>
+      </p:sp>
+      <p:sp>
+        <p:nvSpPr>
+          <p:cNvPr id="31" name="Rectangle 30">
+            <a:extLst>
+              <a:ext uri="{FF2B5EF4-FFF2-40B4-BE49-F238E27FC236}">
+                <a16:creationId xmlns:a16="http://schemas.microsoft.com/office/drawing/2014/main" id="{38DB24DD-29D4-3E45-F67E-8A47756516E8}"/>
+              </a:ext>
+            </a:extLst>
+          </p:cNvPr>
+          <p:cNvSpPr/>
+          <p:nvPr/>
+        </p:nvSpPr>
+        <p:spPr>
+          <a:xfrm>
+            <a:off x="1346740" y="4160397"/>
+            <a:ext cx="5960793" cy="399693"/>
+          </a:xfrm>
+          <a:prstGeom prst="rect">
+            <a:avLst/>
+          </a:prstGeom>
+          <a:solidFill>
+            <a:srgbClr val="EA7978">
+              <a:alpha val="30000"/>
+            </a:srgbClr>
+          </a:solidFill>
+          <a:ln w="12700" cap="flat" cmpd="sng" algn="ctr">
+            <a:noFill/>
+            <a:prstDash val="solid"/>
+            <a:miter lim="800000"/>
+          </a:ln>
+          <a:effectLst/>
+        </p:spPr>
+        <p:style>
+          <a:lnRef idx="2">
+            <a:schemeClr val="accent1">
+              <a:shade val="50000"/>
+            </a:schemeClr>
+          </a:lnRef>
+          <a:fillRef idx="1">
+            <a:schemeClr val="accent1"/>
+          </a:fillRef>
+          <a:effectRef idx="0">
+            <a:schemeClr val="accent1"/>
+          </a:effectRef>
+          <a:fontRef idx="minor">
+            <a:schemeClr val="lt1"/>
+          </a:fontRef>
+        </p:style>
+        <p:txBody>
+          <a:bodyPr rtlCol="0" anchor="t"/>
+          <a:lstStyle/>
+          <a:p>
+            <a:r>
+              <a:rPr lang="en-US" sz="1200" dirty="0">
+                <a:solidFill>
+                  <a:schemeClr val="tx1"/>
+                </a:solidFill>
+                <a:latin typeface="Calibri" panose="020F0502020204030204" pitchFamily="34" charset="0"/>
+                <a:cs typeface="Calibri" panose="020F0502020204030204" pitchFamily="34" charset="0"/>
+              </a:rPr>
+              <a:t>Reference</a:t>
+            </a:r>
+          </a:p>
+          <a:p>
+            <a:r>
+              <a:rPr lang="en-US" sz="1200" dirty="0">
+                <a:solidFill>
+                  <a:schemeClr val="tx1"/>
+                </a:solidFill>
+                <a:latin typeface="Calibri" panose="020F0502020204030204" pitchFamily="34" charset="0"/>
+                <a:cs typeface="Calibri" panose="020F0502020204030204" pitchFamily="34" charset="0"/>
+              </a:rPr>
+              <a:t>Genome</a:t>
+            </a:r>
+          </a:p>
+        </p:txBody>
+      </p:sp>
+      <p:pic>
+        <p:nvPicPr>
+          <p:cNvPr id="35" name="Graphic 34" descr="Group of people with solid fill">
+            <a:extLst>
+              <a:ext uri="{FF2B5EF4-FFF2-40B4-BE49-F238E27FC236}">
+                <a16:creationId xmlns:a16="http://schemas.microsoft.com/office/drawing/2014/main" id="{7A6CE27A-6686-97D0-DF12-CC67FF5B887A}"/>
+              </a:ext>
+            </a:extLst>
+          </p:cNvPr>
+          <p:cNvPicPr>
+            <a:picLocks noChangeAspect="1"/>
+          </p:cNvPicPr>
+          <p:nvPr/>
+        </p:nvPicPr>
+        <p:blipFill>
+          <a:blip r:embed="rId3">
+            <a:extLst>
+              <a:ext uri="{96DAC541-7B7A-43D3-8B79-37D633B846F1}">
+                <asvg:svgBlip xmlns:asvg="http://schemas.microsoft.com/office/drawing/2016/SVG/main" r:embed="rId4"/>
+              </a:ext>
+            </a:extLst>
+          </a:blip>
+          <a:stretch>
+            <a:fillRect/>
+          </a:stretch>
+        </p:blipFill>
+        <p:spPr>
+          <a:xfrm>
+            <a:off x="1744606" y="4966968"/>
+            <a:ext cx="1047931" cy="1047931"/>
+          </a:xfrm>
+          <a:prstGeom prst="rect">
+            <a:avLst/>
+          </a:prstGeom>
+        </p:spPr>
+      </p:pic>
+      <p:pic>
+        <p:nvPicPr>
+          <p:cNvPr id="36" name="Graphic 35" descr="Man with solid fill">
+            <a:extLst>
+              <a:ext uri="{FF2B5EF4-FFF2-40B4-BE49-F238E27FC236}">
+                <a16:creationId xmlns:a16="http://schemas.microsoft.com/office/drawing/2014/main" id="{DD82DEFE-16A7-5C4C-C8B6-02C01CE3C3B0}"/>
+              </a:ext>
+            </a:extLst>
+          </p:cNvPr>
+          <p:cNvPicPr>
+            <a:picLocks noChangeAspect="1"/>
+          </p:cNvPicPr>
+          <p:nvPr/>
+        </p:nvPicPr>
+        <p:blipFill>
+          <a:blip r:embed="rId5">
+            <a:extLst>
+              <a:ext uri="{96DAC541-7B7A-43D3-8B79-37D633B846F1}">
+                <asvg:svgBlip xmlns:asvg="http://schemas.microsoft.com/office/drawing/2016/SVG/main" r:embed="rId6"/>
+              </a:ext>
+            </a:extLst>
+          </a:blip>
+          <a:stretch>
+            <a:fillRect/>
+          </a:stretch>
+        </p:blipFill>
+        <p:spPr>
+          <a:xfrm>
+            <a:off x="2123271" y="4214722"/>
+            <a:ext cx="291042" cy="291042"/>
+          </a:xfrm>
+          <a:prstGeom prst="rect">
+            <a:avLst/>
+          </a:prstGeom>
+        </p:spPr>
+      </p:pic>
+      <p:sp>
+        <p:nvSpPr>
+          <p:cNvPr id="43" name="TextBox 42">
+            <a:extLst>
+              <a:ext uri="{FF2B5EF4-FFF2-40B4-BE49-F238E27FC236}">
+                <a16:creationId xmlns:a16="http://schemas.microsoft.com/office/drawing/2014/main" id="{C99F6DAF-9D98-9FB0-2F40-3B298424DD2A}"/>
+              </a:ext>
+            </a:extLst>
+          </p:cNvPr>
+          <p:cNvSpPr txBox="1"/>
+          <p:nvPr/>
+        </p:nvSpPr>
+        <p:spPr>
+          <a:xfrm>
+            <a:off x="11227925" y="4138530"/>
+            <a:ext cx="1189215" cy="553998"/>
+          </a:xfrm>
+          <a:prstGeom prst="rect">
+            <a:avLst/>
+          </a:prstGeom>
+          <a:noFill/>
+        </p:spPr>
+        <p:txBody>
+          <a:bodyPr wrap="square" rtlCol="0">
+            <a:spAutoFit/>
+          </a:bodyPr>
+          <a:lstStyle/>
+          <a:p>
+            <a:r>
+              <a:rPr lang="en-US" sz="1500" b="1" dirty="0">
+                <a:latin typeface="Calibri" panose="020F0502020204030204" pitchFamily="34" charset="0"/>
+                <a:cs typeface="Calibri" panose="020F0502020204030204" pitchFamily="34" charset="0"/>
+              </a:rPr>
+              <a:t>VEP Distribution</a:t>
+            </a:r>
+          </a:p>
+        </p:txBody>
+      </p:sp>
+      <p:sp>
+        <p:nvSpPr>
+          <p:cNvPr id="46" name="Triangle 45">
+            <a:extLst>
+              <a:ext uri="{FF2B5EF4-FFF2-40B4-BE49-F238E27FC236}">
+                <a16:creationId xmlns:a16="http://schemas.microsoft.com/office/drawing/2014/main" id="{33F74E12-AC1C-8C89-2EFA-AC97061E2FB5}"/>
+              </a:ext>
+            </a:extLst>
+          </p:cNvPr>
+          <p:cNvSpPr/>
+          <p:nvPr/>
+        </p:nvSpPr>
+        <p:spPr>
+          <a:xfrm rot="5400000">
+            <a:off x="6537824" y="4696517"/>
+            <a:ext cx="2351370" cy="877641"/>
+          </a:xfrm>
+          <a:prstGeom prst="triangle">
+            <a:avLst/>
+          </a:prstGeom>
+          <a:solidFill>
+            <a:schemeClr val="tx1">
+              <a:lumMod val="65000"/>
+              <a:lumOff val="35000"/>
+            </a:schemeClr>
+          </a:solidFill>
+          <a:ln w="12700" cap="flat" cmpd="sng" algn="ctr">
+            <a:noFill/>
+            <a:prstDash val="solid"/>
+            <a:miter lim="800000"/>
+          </a:ln>
+          <a:effectLst/>
+        </p:spPr>
+        <p:style>
+          <a:lnRef idx="2">
+            <a:schemeClr val="accent1">
+              <a:shade val="50000"/>
+            </a:schemeClr>
+          </a:lnRef>
+          <a:fillRef idx="1">
+            <a:schemeClr val="accent1"/>
+          </a:fillRef>
+          <a:effectRef idx="0">
+            <a:schemeClr val="accent1"/>
+          </a:effectRef>
+          <a:fontRef idx="minor">
+            <a:schemeClr val="lt1"/>
+          </a:fontRef>
+        </p:style>
+        <p:txBody>
+          <a:bodyPr rtlCol="0" anchor="ctr"/>
+          <a:lstStyle/>
+          <a:p>
+            <a:pPr algn="ctr"/>
+            <a:endParaRPr lang="en-US"/>
+          </a:p>
+        </p:txBody>
+      </p:sp>
+      <p:sp>
+        <p:nvSpPr>
+          <p:cNvPr id="48" name="Triangle 47">
+            <a:extLst>
+              <a:ext uri="{FF2B5EF4-FFF2-40B4-BE49-F238E27FC236}">
+                <a16:creationId xmlns:a16="http://schemas.microsoft.com/office/drawing/2014/main" id="{62D37E3B-8116-D505-9906-931E599D8EF2}"/>
+              </a:ext>
+            </a:extLst>
+          </p:cNvPr>
+          <p:cNvSpPr/>
+          <p:nvPr/>
+        </p:nvSpPr>
+        <p:spPr>
+          <a:xfrm rot="5400000">
+            <a:off x="6537798" y="1278479"/>
+            <a:ext cx="2351370" cy="877641"/>
+          </a:xfrm>
+          <a:prstGeom prst="triangle">
+            <a:avLst/>
+          </a:prstGeom>
+          <a:solidFill>
+            <a:schemeClr val="tx1">
+              <a:lumMod val="65000"/>
+              <a:lumOff val="35000"/>
+            </a:schemeClr>
+          </a:solidFill>
+          <a:ln w="12700" cap="flat" cmpd="sng" algn="ctr">
+            <a:noFill/>
+            <a:prstDash val="solid"/>
+            <a:miter lim="800000"/>
+          </a:ln>
+          <a:effectLst/>
+        </p:spPr>
+        <p:style>
+          <a:lnRef idx="2">
+            <a:schemeClr val="accent1">
+              <a:shade val="50000"/>
+            </a:schemeClr>
+          </a:lnRef>
+          <a:fillRef idx="1">
+            <a:schemeClr val="accent1"/>
+          </a:fillRef>
+          <a:effectRef idx="0">
+            <a:schemeClr val="accent1"/>
+          </a:effectRef>
+          <a:fontRef idx="minor">
+            <a:schemeClr val="lt1"/>
+          </a:fontRef>
+        </p:style>
+        <p:txBody>
+          <a:bodyPr rtlCol="0" anchor="ctr"/>
+          <a:lstStyle/>
+          <a:p>
+            <a:pPr algn="ctr"/>
+            <a:endParaRPr lang="en-US"/>
+          </a:p>
+        </p:txBody>
+      </p:sp>
+      <p:sp>
+        <p:nvSpPr>
+          <p:cNvPr id="39" name="Cube 38">
+            <a:extLst>
+              <a:ext uri="{FF2B5EF4-FFF2-40B4-BE49-F238E27FC236}">
+                <a16:creationId xmlns:a16="http://schemas.microsoft.com/office/drawing/2014/main" id="{AD986019-E6A7-2200-1FB7-5A69DC506605}"/>
+              </a:ext>
+            </a:extLst>
+          </p:cNvPr>
+          <p:cNvSpPr/>
+          <p:nvPr/>
+        </p:nvSpPr>
+        <p:spPr>
+          <a:xfrm>
+            <a:off x="7805865" y="2608883"/>
+            <a:ext cx="1519228" cy="1477585"/>
+          </a:xfrm>
+          <a:prstGeom prst="cube">
+            <a:avLst>
+              <a:gd name="adj" fmla="val 17431"/>
+            </a:avLst>
+          </a:prstGeom>
+          <a:solidFill>
+            <a:schemeClr val="bg1">
+              <a:lumMod val="95000"/>
+            </a:schemeClr>
+          </a:solidFill>
+          <a:ln w="12700" cap="flat" cmpd="sng" algn="ctr">
+            <a:solidFill>
+              <a:schemeClr val="accent6">
+                <a:lumMod val="50000"/>
+              </a:schemeClr>
+            </a:solidFill>
+            <a:prstDash val="solid"/>
+            <a:miter lim="800000"/>
+          </a:ln>
+          <a:effectLst/>
+        </p:spPr>
+        <p:style>
+          <a:lnRef idx="2">
+            <a:schemeClr val="accent1">
+              <a:shade val="50000"/>
+            </a:schemeClr>
+          </a:lnRef>
+          <a:fillRef idx="1">
+            <a:schemeClr val="accent1"/>
+          </a:fillRef>
+          <a:effectRef idx="0">
+            <a:schemeClr val="accent1"/>
+          </a:effectRef>
+          <a:fontRef idx="minor">
+            <a:schemeClr val="lt1"/>
+          </a:fontRef>
+        </p:style>
+        <p:txBody>
+          <a:bodyPr rtlCol="0" anchor="ctr"/>
+          <a:lstStyle/>
+          <a:p>
+            <a:r>
+              <a:rPr lang="en-US" dirty="0">
+                <a:solidFill>
+                  <a:srgbClr val="7030A0"/>
+                </a:solidFill>
+                <a:latin typeface="Calibri" panose="020F0502020204030204" pitchFamily="34" charset="0"/>
+                <a:cs typeface="Calibri" panose="020F0502020204030204" pitchFamily="34" charset="0"/>
+              </a:rPr>
+              <a:t>Sequence Model</a:t>
+            </a:r>
+          </a:p>
+        </p:txBody>
+      </p:sp>
+      <p:pic>
+        <p:nvPicPr>
+          <p:cNvPr id="13" name="Picture 12" descr="A black background with a black square&#10;&#10;AI-generated content may be incorrect.">
+            <a:extLst>
+              <a:ext uri="{FF2B5EF4-FFF2-40B4-BE49-F238E27FC236}">
+                <a16:creationId xmlns:a16="http://schemas.microsoft.com/office/drawing/2014/main" id="{5E4D1EA6-95EC-1129-8A57-734B6E4968A1}"/>
+              </a:ext>
+            </a:extLst>
+          </p:cNvPr>
+          <p:cNvPicPr>
+            <a:picLocks noChangeAspect="1"/>
+          </p:cNvPicPr>
+          <p:nvPr/>
+        </p:nvPicPr>
+        <p:blipFill>
+          <a:blip r:embed="rId7"/>
+          <a:stretch>
+            <a:fillRect/>
+          </a:stretch>
+        </p:blipFill>
+        <p:spPr>
+          <a:xfrm>
+            <a:off x="11227924" y="2853016"/>
+            <a:ext cx="1189216" cy="1189216"/>
+          </a:xfrm>
+          <a:prstGeom prst="rect">
+            <a:avLst/>
+          </a:prstGeom>
+        </p:spPr>
+        <p:style>
+          <a:lnRef idx="2">
+            <a:schemeClr val="dk1"/>
+          </a:lnRef>
+          <a:fillRef idx="1">
+            <a:schemeClr val="lt1"/>
+          </a:fillRef>
+          <a:effectRef idx="0">
+            <a:schemeClr val="dk1"/>
+          </a:effectRef>
+          <a:fontRef idx="minor">
+            <a:schemeClr val="dk1"/>
+          </a:fontRef>
+        </p:style>
+      </p:pic>
+      <p:sp>
+        <p:nvSpPr>
+          <p:cNvPr id="40" name="Rectangle 39">
+            <a:extLst>
+              <a:ext uri="{FF2B5EF4-FFF2-40B4-BE49-F238E27FC236}">
+                <a16:creationId xmlns:a16="http://schemas.microsoft.com/office/drawing/2014/main" id="{EF3882BF-C9C8-6379-F2BF-4F845A54271B}"/>
+              </a:ext>
+            </a:extLst>
+          </p:cNvPr>
+          <p:cNvSpPr/>
+          <p:nvPr/>
+        </p:nvSpPr>
+        <p:spPr>
+          <a:xfrm>
+            <a:off x="9072421" y="2910625"/>
+            <a:ext cx="902268" cy="429220"/>
+          </a:xfrm>
+          <a:prstGeom prst="rect">
+            <a:avLst/>
+          </a:prstGeom>
+          <a:solidFill>
+            <a:srgbClr val="7675E5">
+              <a:alpha val="99809"/>
+            </a:srgbClr>
+          </a:solidFill>
+          <a:ln w="12700" cap="flat" cmpd="sng" algn="ctr">
+            <a:noFill/>
+            <a:prstDash val="solid"/>
+            <a:miter lim="800000"/>
+          </a:ln>
+          <a:effectLst/>
+        </p:spPr>
+        <p:style>
+          <a:lnRef idx="2">
+            <a:schemeClr val="accent1">
+              <a:shade val="50000"/>
+            </a:schemeClr>
+          </a:lnRef>
+          <a:fillRef idx="1">
+            <a:schemeClr val="accent1"/>
+          </a:fillRef>
+          <a:effectRef idx="0">
+            <a:schemeClr val="accent1"/>
+          </a:effectRef>
+          <a:fontRef idx="minor">
+            <a:schemeClr val="lt1"/>
+          </a:fontRef>
+        </p:style>
+        <p:txBody>
+          <a:bodyPr rtlCol="0" anchor="t"/>
+          <a:lstStyle/>
+          <a:p>
+            <a:r>
+              <a:rPr lang="en-US" sz="1200" dirty="0">
+                <a:solidFill>
+                  <a:schemeClr val="bg1"/>
+                </a:solidFill>
+                <a:latin typeface="Calibri" panose="020F0502020204030204" pitchFamily="34" charset="0"/>
+                <a:cs typeface="Calibri" panose="020F0502020204030204" pitchFamily="34" charset="0"/>
+              </a:rPr>
+              <a:t>WT </a:t>
+            </a:r>
+          </a:p>
+          <a:p>
+            <a:r>
+              <a:rPr lang="en-US" sz="1200" dirty="0">
+                <a:solidFill>
+                  <a:schemeClr val="bg1"/>
+                </a:solidFill>
+                <a:latin typeface="Calibri" panose="020F0502020204030204" pitchFamily="34" charset="0"/>
+                <a:cs typeface="Calibri" panose="020F0502020204030204" pitchFamily="34" charset="0"/>
+              </a:rPr>
+              <a:t>Predictions</a:t>
+            </a:r>
+          </a:p>
+        </p:txBody>
+      </p:sp>
+      <p:sp>
+        <p:nvSpPr>
+          <p:cNvPr id="41" name="Rectangle 40">
+            <a:extLst>
+              <a:ext uri="{FF2B5EF4-FFF2-40B4-BE49-F238E27FC236}">
+                <a16:creationId xmlns:a16="http://schemas.microsoft.com/office/drawing/2014/main" id="{167D1F79-D0E0-0DDA-0407-4A725ED35595}"/>
+              </a:ext>
+            </a:extLst>
+          </p:cNvPr>
+          <p:cNvSpPr/>
+          <p:nvPr/>
+        </p:nvSpPr>
+        <p:spPr>
+          <a:xfrm>
+            <a:off x="9076367" y="3561270"/>
+            <a:ext cx="907670" cy="429220"/>
+          </a:xfrm>
+          <a:prstGeom prst="rect">
+            <a:avLst/>
+          </a:prstGeom>
+          <a:solidFill>
+            <a:srgbClr val="EA7978">
+              <a:alpha val="99809"/>
+            </a:srgbClr>
+          </a:solidFill>
+          <a:ln w="12700" cap="flat" cmpd="sng" algn="ctr">
+            <a:noFill/>
+            <a:prstDash val="solid"/>
+            <a:miter lim="800000"/>
+          </a:ln>
+          <a:effectLst/>
+        </p:spPr>
+        <p:style>
+          <a:lnRef idx="2">
+            <a:schemeClr val="accent1">
+              <a:shade val="50000"/>
+            </a:schemeClr>
+          </a:lnRef>
+          <a:fillRef idx="1">
+            <a:schemeClr val="accent1"/>
+          </a:fillRef>
+          <a:effectRef idx="0">
+            <a:schemeClr val="accent1"/>
+          </a:effectRef>
+          <a:fontRef idx="minor">
+            <a:schemeClr val="lt1"/>
+          </a:fontRef>
+        </p:style>
+        <p:txBody>
+          <a:bodyPr rtlCol="0" anchor="t"/>
+          <a:lstStyle/>
+          <a:p>
+            <a:r>
+              <a:rPr lang="en-US" sz="1200" dirty="0">
+                <a:solidFill>
+                  <a:schemeClr val="bg1"/>
+                </a:solidFill>
+                <a:latin typeface="Calibri" panose="020F0502020204030204" pitchFamily="34" charset="0"/>
+                <a:cs typeface="Calibri" panose="020F0502020204030204" pitchFamily="34" charset="0"/>
+              </a:rPr>
+              <a:t>MUT </a:t>
+            </a:r>
+          </a:p>
+          <a:p>
+            <a:r>
+              <a:rPr lang="en-US" sz="1200" dirty="0">
+                <a:solidFill>
+                  <a:schemeClr val="bg1"/>
+                </a:solidFill>
+                <a:latin typeface="Calibri" panose="020F0502020204030204" pitchFamily="34" charset="0"/>
+                <a:cs typeface="Calibri" panose="020F0502020204030204" pitchFamily="34" charset="0"/>
+              </a:rPr>
+              <a:t>Predictions</a:t>
+            </a:r>
+          </a:p>
+        </p:txBody>
+      </p:sp>
+      <p:sp>
+        <p:nvSpPr>
+          <p:cNvPr id="42" name="TextBox 41">
+            <a:extLst>
+              <a:ext uri="{FF2B5EF4-FFF2-40B4-BE49-F238E27FC236}">
+                <a16:creationId xmlns:a16="http://schemas.microsoft.com/office/drawing/2014/main" id="{BD428AD6-AD43-C06E-B028-D2C5E2A793B7}"/>
+              </a:ext>
+            </a:extLst>
+          </p:cNvPr>
+          <p:cNvSpPr txBox="1"/>
+          <p:nvPr/>
+        </p:nvSpPr>
+        <p:spPr>
+          <a:xfrm>
+            <a:off x="9318499" y="3265926"/>
+            <a:ext cx="317716" cy="369332"/>
+          </a:xfrm>
+          <a:prstGeom prst="rect">
+            <a:avLst/>
+          </a:prstGeom>
+          <a:noFill/>
+        </p:spPr>
+        <p:txBody>
+          <a:bodyPr wrap="square" rtlCol="0">
+            <a:spAutoFit/>
+          </a:bodyPr>
+          <a:lstStyle/>
+          <a:p>
+            <a:r>
+              <a:rPr lang="el-GR" dirty="0">
+                <a:latin typeface="Calibri" panose="020F0502020204030204" pitchFamily="34" charset="0"/>
+                <a:cs typeface="Calibri" panose="020F0502020204030204" pitchFamily="34" charset="0"/>
+              </a:rPr>
+              <a:t>Δ</a:t>
+            </a:r>
+            <a:endParaRPr lang="en-US" dirty="0">
+              <a:latin typeface="Calibri" panose="020F0502020204030204" pitchFamily="34" charset="0"/>
+              <a:cs typeface="Calibri" panose="020F0502020204030204" pitchFamily="34" charset="0"/>
+            </a:endParaRPr>
+          </a:p>
+        </p:txBody>
+      </p:sp>
+      <p:cxnSp>
+        <p:nvCxnSpPr>
+          <p:cNvPr id="44" name="Straight Connector 43">
+            <a:extLst>
+              <a:ext uri="{FF2B5EF4-FFF2-40B4-BE49-F238E27FC236}">
+                <a16:creationId xmlns:a16="http://schemas.microsoft.com/office/drawing/2014/main" id="{BD07320E-CE71-402B-3900-4467A3BB2605}"/>
+              </a:ext>
+            </a:extLst>
+          </p:cNvPr>
+          <p:cNvCxnSpPr>
+            <a:cxnSpLocks/>
+          </p:cNvCxnSpPr>
+          <p:nvPr/>
+        </p:nvCxnSpPr>
+        <p:spPr>
+          <a:xfrm flipH="1">
+            <a:off x="11676944" y="2975031"/>
+            <a:ext cx="30682" cy="850666"/>
+          </a:xfrm>
+          <a:prstGeom prst="line">
+            <a:avLst/>
+          </a:prstGeom>
+          <a:ln w="19050" cap="flat" cmpd="sng" algn="ctr">
+            <a:solidFill>
+              <a:schemeClr val="tx1">
+                <a:lumMod val="50000"/>
+                <a:lumOff val="50000"/>
+              </a:schemeClr>
+            </a:solidFill>
+            <a:prstDash val="dash"/>
+            <a:round/>
+            <a:headEnd type="none" w="med" len="med"/>
+            <a:tailEnd type="none" w="med" len="med"/>
+          </a:ln>
+        </p:spPr>
+        <p:style>
+          <a:lnRef idx="0">
+            <a:scrgbClr r="0" g="0" b="0"/>
+          </a:lnRef>
+          <a:fillRef idx="0">
+            <a:scrgbClr r="0" g="0" b="0"/>
+          </a:fillRef>
+          <a:effectRef idx="0">
+            <a:scrgbClr r="0" g="0" b="0"/>
+          </a:effectRef>
+          <a:fontRef idx="minor">
+            <a:schemeClr val="tx1"/>
+          </a:fontRef>
+        </p:style>
+      </p:cxnSp>
+      <p:sp>
+        <p:nvSpPr>
+          <p:cNvPr id="45" name="TextBox 44">
+            <a:extLst>
+              <a:ext uri="{FF2B5EF4-FFF2-40B4-BE49-F238E27FC236}">
+                <a16:creationId xmlns:a16="http://schemas.microsoft.com/office/drawing/2014/main" id="{51BBADA5-CF1D-D242-32C4-0C2A1640BEAC}"/>
+              </a:ext>
+            </a:extLst>
+          </p:cNvPr>
+          <p:cNvSpPr txBox="1"/>
+          <p:nvPr/>
+        </p:nvSpPr>
+        <p:spPr>
+          <a:xfrm rot="16200000">
+            <a:off x="11286501" y="2827629"/>
+            <a:ext cx="649537" cy="276999"/>
+          </a:xfrm>
+          <a:prstGeom prst="rect">
+            <a:avLst/>
+          </a:prstGeom>
+          <a:noFill/>
+        </p:spPr>
+        <p:txBody>
+          <a:bodyPr wrap="square" rtlCol="0">
+            <a:spAutoFit/>
+          </a:bodyPr>
+          <a:lstStyle/>
+          <a:p>
+            <a:r>
+              <a:rPr lang="en-US" sz="1200" dirty="0">
+                <a:solidFill>
+                  <a:schemeClr val="tx1">
+                    <a:lumMod val="50000"/>
+                    <a:lumOff val="50000"/>
+                  </a:schemeClr>
+                </a:solidFill>
+                <a:latin typeface="Calibri" panose="020F0502020204030204" pitchFamily="34" charset="0"/>
+                <a:cs typeface="Calibri" panose="020F0502020204030204" pitchFamily="34" charset="0"/>
+              </a:rPr>
+              <a:t>REF</a:t>
+            </a:r>
+          </a:p>
+        </p:txBody>
+      </p:sp>
+      <p:sp>
+        <p:nvSpPr>
+          <p:cNvPr id="14" name="Pentagon 13">
+            <a:extLst>
+              <a:ext uri="{FF2B5EF4-FFF2-40B4-BE49-F238E27FC236}">
+                <a16:creationId xmlns:a16="http://schemas.microsoft.com/office/drawing/2014/main" id="{E34AD726-6FA1-25A4-3FBF-A0DBA9B216EC}"/>
+              </a:ext>
+            </a:extLst>
+          </p:cNvPr>
+          <p:cNvSpPr/>
+          <p:nvPr/>
+        </p:nvSpPr>
+        <p:spPr>
+          <a:xfrm>
+            <a:off x="9921875" y="2904760"/>
+            <a:ext cx="1362035" cy="1085730"/>
+          </a:xfrm>
+          <a:prstGeom prst="homePlate">
+            <a:avLst/>
+          </a:prstGeom>
+          <a:solidFill>
+            <a:schemeClr val="tx1">
+              <a:lumMod val="65000"/>
+              <a:lumOff val="35000"/>
+            </a:schemeClr>
+          </a:solidFill>
+          <a:ln/>
+        </p:spPr>
+        <p:style>
+          <a:lnRef idx="3">
+            <a:schemeClr val="lt1"/>
+          </a:lnRef>
+          <a:fillRef idx="1">
+            <a:schemeClr val="accent2"/>
+          </a:fillRef>
+          <a:effectRef idx="1">
+            <a:schemeClr val="accent2"/>
+          </a:effectRef>
+          <a:fontRef idx="minor">
+            <a:schemeClr val="lt1"/>
+          </a:fontRef>
+        </p:style>
+        <p:txBody>
+          <a:bodyPr wrap="none" rIns="0" rtlCol="0" anchor="ctr"/>
+          <a:lstStyle/>
+          <a:p>
+            <a:r>
+              <a:rPr lang="en-US" sz="1500" dirty="0">
+                <a:latin typeface="Calibri" panose="020F0502020204030204" pitchFamily="34" charset="0"/>
+                <a:cs typeface="Calibri" panose="020F0502020204030204" pitchFamily="34" charset="0"/>
+              </a:rPr>
+              <a:t>Personalized</a:t>
+            </a:r>
+          </a:p>
+          <a:p>
+            <a:r>
+              <a:rPr lang="en-US" sz="1500" dirty="0">
+                <a:latin typeface="Calibri" panose="020F0502020204030204" pitchFamily="34" charset="0"/>
+                <a:cs typeface="Calibri" panose="020F0502020204030204" pitchFamily="34" charset="0"/>
+              </a:rPr>
+              <a:t>VEPs</a:t>
+            </a:r>
+          </a:p>
+        </p:txBody>
+      </p:sp>
+      <p:sp>
+        <p:nvSpPr>
+          <p:cNvPr id="15" name="Bent-Up Arrow 14">
+            <a:extLst>
+              <a:ext uri="{FF2B5EF4-FFF2-40B4-BE49-F238E27FC236}">
+                <a16:creationId xmlns:a16="http://schemas.microsoft.com/office/drawing/2014/main" id="{DEE46F15-A0EC-85CD-5B1A-57502E9A5F0E}"/>
+              </a:ext>
+            </a:extLst>
+          </p:cNvPr>
+          <p:cNvSpPr/>
+          <p:nvPr/>
+        </p:nvSpPr>
+        <p:spPr>
+          <a:xfrm>
+            <a:off x="7317451" y="4086468"/>
+            <a:ext cx="1543454" cy="1194587"/>
+          </a:xfrm>
+          <a:prstGeom prst="bentUpArrow">
+            <a:avLst/>
+          </a:prstGeom>
+          <a:solidFill>
+            <a:schemeClr val="tx1">
+              <a:lumMod val="65000"/>
+              <a:lumOff val="35000"/>
+            </a:schemeClr>
+          </a:solidFill>
+          <a:ln w="12700" cap="flat" cmpd="sng" algn="ctr">
+            <a:noFill/>
+            <a:prstDash val="solid"/>
+            <a:miter lim="800000"/>
+          </a:ln>
+          <a:effectLst/>
+        </p:spPr>
+        <p:style>
+          <a:lnRef idx="2">
+            <a:schemeClr val="accent1">
+              <a:shade val="50000"/>
+            </a:schemeClr>
+          </a:lnRef>
+          <a:fillRef idx="1">
+            <a:schemeClr val="accent1"/>
+          </a:fillRef>
+          <a:effectRef idx="0">
+            <a:schemeClr val="accent1"/>
+          </a:effectRef>
+          <a:fontRef idx="minor">
+            <a:schemeClr val="lt1"/>
+          </a:fontRef>
+        </p:style>
+        <p:txBody>
+          <a:bodyPr rtlCol="0" anchor="ctr"/>
+          <a:lstStyle/>
+          <a:p>
+            <a:pPr algn="ctr"/>
+            <a:endParaRPr lang="en-US">
+              <a:latin typeface="Calibri" panose="020F0502020204030204" pitchFamily="34" charset="0"/>
+              <a:cs typeface="Calibri" panose="020F0502020204030204" pitchFamily="34" charset="0"/>
+            </a:endParaRPr>
+          </a:p>
+        </p:txBody>
+      </p:sp>
+      <p:sp>
+        <p:nvSpPr>
+          <p:cNvPr id="55" name="Bent-Up Arrow 54">
+            <a:extLst>
+              <a:ext uri="{FF2B5EF4-FFF2-40B4-BE49-F238E27FC236}">
+                <a16:creationId xmlns:a16="http://schemas.microsoft.com/office/drawing/2014/main" id="{8A7C90A3-E795-2B96-1DCB-8B5492DA5ABF}"/>
+              </a:ext>
+            </a:extLst>
+          </p:cNvPr>
+          <p:cNvSpPr/>
+          <p:nvPr/>
+        </p:nvSpPr>
+        <p:spPr>
+          <a:xfrm flipV="1">
+            <a:off x="7328944" y="1525279"/>
+            <a:ext cx="1543454" cy="1194587"/>
+          </a:xfrm>
+          <a:prstGeom prst="bentUpArrow">
+            <a:avLst/>
+          </a:prstGeom>
+          <a:solidFill>
+            <a:schemeClr val="tx1">
+              <a:lumMod val="65000"/>
+              <a:lumOff val="35000"/>
+            </a:schemeClr>
+          </a:solidFill>
+          <a:ln w="12700" cap="flat" cmpd="sng" algn="ctr">
+            <a:noFill/>
+            <a:prstDash val="solid"/>
+            <a:miter lim="800000"/>
+          </a:ln>
+          <a:effectLst/>
+        </p:spPr>
+        <p:style>
+          <a:lnRef idx="2">
+            <a:schemeClr val="accent1">
+              <a:shade val="50000"/>
+            </a:schemeClr>
+          </a:lnRef>
+          <a:fillRef idx="1">
+            <a:schemeClr val="accent1"/>
+          </a:fillRef>
+          <a:effectRef idx="0">
+            <a:schemeClr val="accent1"/>
+          </a:effectRef>
+          <a:fontRef idx="minor">
+            <a:schemeClr val="lt1"/>
+          </a:fontRef>
+        </p:style>
+        <p:txBody>
+          <a:bodyPr rtlCol="0" anchor="ctr"/>
+          <a:lstStyle/>
+          <a:p>
+            <a:pPr algn="ctr"/>
+            <a:endParaRPr lang="en-US">
+              <a:latin typeface="Calibri" panose="020F0502020204030204" pitchFamily="34" charset="0"/>
+              <a:cs typeface="Calibri" panose="020F0502020204030204" pitchFamily="34" charset="0"/>
+            </a:endParaRPr>
+          </a:p>
+        </p:txBody>
+      </p:sp>
+      <p:graphicFrame>
+        <p:nvGraphicFramePr>
+          <p:cNvPr id="47" name="Table 46">
+            <a:extLst>
+              <a:ext uri="{FF2B5EF4-FFF2-40B4-BE49-F238E27FC236}">
+                <a16:creationId xmlns:a16="http://schemas.microsoft.com/office/drawing/2014/main" id="{5161B86D-33F2-EA6F-BF2A-E3A6FB67867F}"/>
+              </a:ext>
+            </a:extLst>
+          </p:cNvPr>
+          <p:cNvGraphicFramePr>
+            <a:graphicFrameLocks noGrp="1"/>
+          </p:cNvGraphicFramePr>
+          <p:nvPr>
+            <p:extLst>
+              <p:ext uri="{D42A27DB-BD31-4B8C-83A1-F6EECF244321}">
+                <p14:modId xmlns:p14="http://schemas.microsoft.com/office/powerpoint/2010/main" val="126026833"/>
+              </p:ext>
+            </p:extLst>
+          </p:nvPr>
+        </p:nvGraphicFramePr>
+        <p:xfrm>
+          <a:off x="2838356" y="1257834"/>
+          <a:ext cx="4302795" cy="1463040"/>
+        </p:xfrm>
+        <a:graphic>
+          <a:graphicData uri="http://schemas.openxmlformats.org/drawingml/2006/table">
+            <a:tbl>
+              <a:tblPr bandRow="1">
+                <a:tableStyleId>{3C2FFA5D-87B4-456A-9821-1D502468CF0F}</a:tableStyleId>
+              </a:tblPr>
+              <a:tblGrid>
+                <a:gridCol w="614685">
+                  <a:extLst>
+                    <a:ext uri="{9D8B030D-6E8A-4147-A177-3AD203B41FA5}">
+                      <a16:colId xmlns:a16="http://schemas.microsoft.com/office/drawing/2014/main" val="3526854328"/>
+                    </a:ext>
+                  </a:extLst>
+                </a:gridCol>
+                <a:gridCol w="614685">
+                  <a:extLst>
+                    <a:ext uri="{9D8B030D-6E8A-4147-A177-3AD203B41FA5}">
+                      <a16:colId xmlns:a16="http://schemas.microsoft.com/office/drawing/2014/main" val="3363055171"/>
+                    </a:ext>
+                  </a:extLst>
+                </a:gridCol>
+                <a:gridCol w="614685">
+                  <a:extLst>
+                    <a:ext uri="{9D8B030D-6E8A-4147-A177-3AD203B41FA5}">
+                      <a16:colId xmlns:a16="http://schemas.microsoft.com/office/drawing/2014/main" val="2428403401"/>
+                    </a:ext>
+                  </a:extLst>
+                </a:gridCol>
+                <a:gridCol w="614685">
+                  <a:extLst>
+                    <a:ext uri="{9D8B030D-6E8A-4147-A177-3AD203B41FA5}">
+                      <a16:colId xmlns:a16="http://schemas.microsoft.com/office/drawing/2014/main" val="2747732061"/>
+                    </a:ext>
+                  </a:extLst>
+                </a:gridCol>
+                <a:gridCol w="614685">
+                  <a:extLst>
+                    <a:ext uri="{9D8B030D-6E8A-4147-A177-3AD203B41FA5}">
+                      <a16:colId xmlns:a16="http://schemas.microsoft.com/office/drawing/2014/main" val="1869642782"/>
+                    </a:ext>
+                  </a:extLst>
+                </a:gridCol>
+                <a:gridCol w="614685">
+                  <a:extLst>
+                    <a:ext uri="{9D8B030D-6E8A-4147-A177-3AD203B41FA5}">
+                      <a16:colId xmlns:a16="http://schemas.microsoft.com/office/drawing/2014/main" val="1253564834"/>
+                    </a:ext>
+                  </a:extLst>
+                </a:gridCol>
+                <a:gridCol w="614685">
+                  <a:extLst>
+                    <a:ext uri="{9D8B030D-6E8A-4147-A177-3AD203B41FA5}">
+                      <a16:colId xmlns:a16="http://schemas.microsoft.com/office/drawing/2014/main" val="3744933017"/>
+                    </a:ext>
+                  </a:extLst>
+                </a:gridCol>
+              </a:tblGrid>
+              <a:tr h="243597">
+                <a:tc>
+                  <a:txBody>
+                    <a:bodyPr/>
+                    <a:lstStyle/>
+                    <a:p>
+                      <a:pPr algn="ctr">
+                        <a:buNone/>
+                      </a:pPr>
+                      <a:r>
+                        <a:rPr lang="en-US" dirty="0">
+                          <a:latin typeface="Calibri" panose="020F0502020204030204" pitchFamily="34" charset="0"/>
+                          <a:cs typeface="Calibri" panose="020F0502020204030204" pitchFamily="34" charset="0"/>
+                        </a:rPr>
+                        <a:t>ATG</a:t>
+                      </a:r>
+                    </a:p>
+                  </a:txBody>
+                  <a:tcPr anchor="ctr"/>
+                </a:tc>
+                <a:tc>
+                  <a:txBody>
+                    <a:bodyPr/>
+                    <a:lstStyle/>
+                    <a:p>
+                      <a:pPr algn="ctr">
+                        <a:buNone/>
+                      </a:pPr>
+                      <a:r>
+                        <a:rPr lang="en-US" dirty="0">
+                          <a:latin typeface="Calibri" panose="020F0502020204030204" pitchFamily="34" charset="0"/>
+                          <a:cs typeface="Calibri" panose="020F0502020204030204" pitchFamily="34" charset="0"/>
+                        </a:rPr>
+                        <a:t>G</a:t>
+                      </a:r>
+                      <a:r>
+                        <a:rPr lang="en-US" b="1" dirty="0">
+                          <a:solidFill>
+                            <a:srgbClr val="7675E6"/>
+                          </a:solidFill>
+                          <a:latin typeface="Calibri" panose="020F0502020204030204" pitchFamily="34" charset="0"/>
+                          <a:cs typeface="Calibri" panose="020F0502020204030204" pitchFamily="34" charset="0"/>
+                        </a:rPr>
+                        <a:t>T</a:t>
+                      </a:r>
+                      <a:r>
+                        <a:rPr lang="en-US" dirty="0">
+                          <a:latin typeface="Calibri" panose="020F0502020204030204" pitchFamily="34" charset="0"/>
+                          <a:cs typeface="Calibri" panose="020F0502020204030204" pitchFamily="34" charset="0"/>
+                        </a:rPr>
+                        <a:t>T</a:t>
+                      </a:r>
+                    </a:p>
+                  </a:txBody>
+                  <a:tcPr anchor="ctr"/>
+                </a:tc>
+                <a:tc>
+                  <a:txBody>
+                    <a:bodyPr/>
+                    <a:lstStyle/>
+                    <a:p>
+                      <a:pPr algn="ctr">
+                        <a:buNone/>
+                      </a:pPr>
+                      <a:r>
+                        <a:rPr lang="en-US" dirty="0">
+                          <a:latin typeface="Calibri" panose="020F0502020204030204" pitchFamily="34" charset="0"/>
+                          <a:cs typeface="Calibri" panose="020F0502020204030204" pitchFamily="34" charset="0"/>
+                        </a:rPr>
+                        <a:t>TTT</a:t>
+                      </a:r>
+                    </a:p>
+                  </a:txBody>
+                  <a:tcPr anchor="ctr"/>
+                </a:tc>
+                <a:tc>
+                  <a:txBody>
+                    <a:bodyPr/>
+                    <a:lstStyle/>
+                    <a:p>
+                      <a:pPr algn="ctr">
+                        <a:buNone/>
+                      </a:pPr>
+                      <a:r>
+                        <a:rPr lang="en-US" dirty="0">
+                          <a:latin typeface="Calibri" panose="020F0502020204030204" pitchFamily="34" charset="0"/>
+                          <a:cs typeface="Calibri" panose="020F0502020204030204" pitchFamily="34" charset="0"/>
+                        </a:rPr>
+                        <a:t>CAG</a:t>
+                      </a:r>
+                    </a:p>
+                  </a:txBody>
+                  <a:tcPr anchor="ctr"/>
+                </a:tc>
+                <a:tc>
+                  <a:txBody>
+                    <a:bodyPr/>
+                    <a:lstStyle/>
+                    <a:p>
+                      <a:pPr algn="ctr">
+                        <a:buNone/>
+                      </a:pPr>
+                      <a:r>
+                        <a:rPr lang="en-US" dirty="0">
+                          <a:latin typeface="Calibri" panose="020F0502020204030204" pitchFamily="34" charset="0"/>
+                          <a:cs typeface="Calibri" panose="020F0502020204030204" pitchFamily="34" charset="0"/>
+                        </a:rPr>
+                        <a:t>AAA</a:t>
+                      </a:r>
+                    </a:p>
+                  </a:txBody>
+                  <a:tcPr anchor="ctr"/>
+                </a:tc>
+                <a:tc>
+                  <a:txBody>
+                    <a:bodyPr/>
+                    <a:lstStyle/>
+                    <a:p>
+                      <a:pPr algn="ctr">
+                        <a:buNone/>
+                      </a:pPr>
+                      <a:r>
+                        <a:rPr lang="en-US" dirty="0">
+                          <a:latin typeface="Calibri" panose="020F0502020204030204" pitchFamily="34" charset="0"/>
+                          <a:cs typeface="Calibri" panose="020F0502020204030204" pitchFamily="34" charset="0"/>
+                        </a:rPr>
+                        <a:t>GGC</a:t>
+                      </a:r>
+                    </a:p>
+                  </a:txBody>
+                  <a:tcPr anchor="ctr"/>
+                </a:tc>
+                <a:tc>
+                  <a:txBody>
+                    <a:bodyPr/>
+                    <a:lstStyle/>
+                    <a:p>
+                      <a:pPr algn="ctr">
+                        <a:buNone/>
+                      </a:pPr>
+                      <a:r>
+                        <a:rPr lang="en-US" dirty="0">
+                          <a:latin typeface="Calibri" panose="020F0502020204030204" pitchFamily="34" charset="0"/>
+                          <a:cs typeface="Calibri" panose="020F0502020204030204" pitchFamily="34" charset="0"/>
+                        </a:rPr>
+                        <a:t>…</a:t>
+                      </a:r>
+                    </a:p>
+                  </a:txBody>
+                  <a:tcPr anchor="ctr"/>
+                </a:tc>
+                <a:extLst>
+                  <a:ext uri="{0D108BD9-81ED-4DB2-BD59-A6C34878D82A}">
+                    <a16:rowId xmlns:a16="http://schemas.microsoft.com/office/drawing/2014/main" val="3836387490"/>
+                  </a:ext>
+                </a:extLst>
+              </a:tr>
+              <a:tr h="243597">
+                <a:tc>
+                  <a:txBody>
+                    <a:bodyPr/>
+                    <a:lstStyle/>
+                    <a:p>
+                      <a:pPr algn="ctr">
+                        <a:buNone/>
+                      </a:pPr>
+                      <a:r>
+                        <a:rPr lang="en-US">
+                          <a:latin typeface="Calibri" panose="020F0502020204030204" pitchFamily="34" charset="0"/>
+                          <a:cs typeface="Calibri" panose="020F0502020204030204" pitchFamily="34" charset="0"/>
+                        </a:rPr>
+                        <a:t>ATG</a:t>
+                      </a:r>
+                    </a:p>
+                  </a:txBody>
+                  <a:tcPr anchor="ctr"/>
+                </a:tc>
+                <a:tc>
+                  <a:txBody>
+                    <a:bodyPr/>
+                    <a:lstStyle/>
+                    <a:p>
+                      <a:pPr algn="ctr">
+                        <a:buNone/>
+                      </a:pPr>
+                      <a:r>
+                        <a:rPr lang="en-US">
+                          <a:latin typeface="Calibri" panose="020F0502020204030204" pitchFamily="34" charset="0"/>
+                          <a:cs typeface="Calibri" panose="020F0502020204030204" pitchFamily="34" charset="0"/>
+                        </a:rPr>
+                        <a:t>GCT</a:t>
+                      </a:r>
+                    </a:p>
+                  </a:txBody>
+                  <a:tcPr anchor="ctr"/>
+                </a:tc>
+                <a:tc>
+                  <a:txBody>
+                    <a:bodyPr/>
+                    <a:lstStyle/>
+                    <a:p>
+                      <a:pPr algn="ctr">
+                        <a:buNone/>
+                      </a:pPr>
+                      <a:r>
+                        <a:rPr lang="en-US" dirty="0">
+                          <a:latin typeface="Calibri" panose="020F0502020204030204" pitchFamily="34" charset="0"/>
+                          <a:cs typeface="Calibri" panose="020F0502020204030204" pitchFamily="34" charset="0"/>
+                        </a:rPr>
+                        <a:t>T</a:t>
+                      </a:r>
+                      <a:r>
+                        <a:rPr lang="en-US" b="1" dirty="0">
+                          <a:solidFill>
+                            <a:srgbClr val="7675E6"/>
+                          </a:solidFill>
+                          <a:latin typeface="Calibri" panose="020F0502020204030204" pitchFamily="34" charset="0"/>
+                          <a:cs typeface="Calibri" panose="020F0502020204030204" pitchFamily="34" charset="0"/>
+                        </a:rPr>
+                        <a:t>C</a:t>
+                      </a:r>
+                      <a:r>
+                        <a:rPr lang="en-US" dirty="0">
+                          <a:latin typeface="Calibri" panose="020F0502020204030204" pitchFamily="34" charset="0"/>
+                          <a:cs typeface="Calibri" panose="020F0502020204030204" pitchFamily="34" charset="0"/>
+                        </a:rPr>
+                        <a:t>T</a:t>
+                      </a:r>
+                    </a:p>
+                  </a:txBody>
+                  <a:tcPr anchor="ctr"/>
+                </a:tc>
+                <a:tc>
+                  <a:txBody>
+                    <a:bodyPr/>
+                    <a:lstStyle/>
+                    <a:p>
+                      <a:pPr algn="ctr">
+                        <a:buNone/>
+                      </a:pPr>
+                      <a:r>
+                        <a:rPr lang="en-US">
+                          <a:latin typeface="Calibri" panose="020F0502020204030204" pitchFamily="34" charset="0"/>
+                          <a:cs typeface="Calibri" panose="020F0502020204030204" pitchFamily="34" charset="0"/>
+                        </a:rPr>
+                        <a:t>CAG</a:t>
+                      </a:r>
+                    </a:p>
+                  </a:txBody>
+                  <a:tcPr anchor="ctr"/>
+                </a:tc>
+                <a:tc>
+                  <a:txBody>
+                    <a:bodyPr/>
+                    <a:lstStyle/>
+                    <a:p>
+                      <a:pPr algn="ctr">
+                        <a:buNone/>
+                      </a:pPr>
+                      <a:r>
+                        <a:rPr lang="en-US">
+                          <a:latin typeface="Calibri" panose="020F0502020204030204" pitchFamily="34" charset="0"/>
+                          <a:cs typeface="Calibri" panose="020F0502020204030204" pitchFamily="34" charset="0"/>
+                        </a:rPr>
+                        <a:t>AAA</a:t>
+                      </a:r>
+                    </a:p>
+                  </a:txBody>
+                  <a:tcPr anchor="ctr"/>
+                </a:tc>
+                <a:tc>
+                  <a:txBody>
+                    <a:bodyPr/>
+                    <a:lstStyle/>
+                    <a:p>
+                      <a:pPr algn="ctr">
+                        <a:buNone/>
+                      </a:pPr>
+                      <a:r>
+                        <a:rPr lang="en-US" dirty="0">
+                          <a:latin typeface="Calibri" panose="020F0502020204030204" pitchFamily="34" charset="0"/>
+                          <a:cs typeface="Calibri" panose="020F0502020204030204" pitchFamily="34" charset="0"/>
+                        </a:rPr>
+                        <a:t>GG</a:t>
+                      </a:r>
+                      <a:r>
+                        <a:rPr lang="en-US" b="1" dirty="0">
+                          <a:solidFill>
+                            <a:srgbClr val="7675E6"/>
+                          </a:solidFill>
+                          <a:latin typeface="Calibri" panose="020F0502020204030204" pitchFamily="34" charset="0"/>
+                          <a:cs typeface="Calibri" panose="020F0502020204030204" pitchFamily="34" charset="0"/>
+                        </a:rPr>
+                        <a:t>A</a:t>
+                      </a:r>
+                      <a:endParaRPr lang="en-US" dirty="0">
+                        <a:solidFill>
+                          <a:srgbClr val="7675E6"/>
+                        </a:solidFill>
+                        <a:latin typeface="Calibri" panose="020F0502020204030204" pitchFamily="34" charset="0"/>
+                        <a:cs typeface="Calibri" panose="020F0502020204030204" pitchFamily="34" charset="0"/>
+                      </a:endParaRPr>
+                    </a:p>
+                  </a:txBody>
+                  <a:tcPr anchor="ctr"/>
+                </a:tc>
+                <a:tc>
+                  <a:txBody>
+                    <a:bodyPr/>
+                    <a:lstStyle/>
+                    <a:p>
+                      <a:pPr algn="ctr">
+                        <a:buNone/>
+                      </a:pPr>
+                      <a:r>
+                        <a:rPr lang="en-US" dirty="0">
+                          <a:latin typeface="Calibri" panose="020F0502020204030204" pitchFamily="34" charset="0"/>
+                          <a:cs typeface="Calibri" panose="020F0502020204030204" pitchFamily="34" charset="0"/>
+                        </a:rPr>
+                        <a:t>…</a:t>
+                      </a:r>
+                    </a:p>
+                  </a:txBody>
+                  <a:tcPr anchor="ctr"/>
+                </a:tc>
+                <a:extLst>
+                  <a:ext uri="{0D108BD9-81ED-4DB2-BD59-A6C34878D82A}">
+                    <a16:rowId xmlns:a16="http://schemas.microsoft.com/office/drawing/2014/main" val="2427768056"/>
+                  </a:ext>
+                </a:extLst>
+              </a:tr>
+              <a:tr h="243597">
+                <a:tc>
+                  <a:txBody>
+                    <a:bodyPr/>
+                    <a:lstStyle/>
+                    <a:p>
+                      <a:pPr algn="ctr">
+                        <a:buNone/>
+                      </a:pPr>
+                      <a:r>
+                        <a:rPr lang="en-US">
+                          <a:latin typeface="Calibri" panose="020F0502020204030204" pitchFamily="34" charset="0"/>
+                          <a:cs typeface="Calibri" panose="020F0502020204030204" pitchFamily="34" charset="0"/>
+                        </a:rPr>
+                        <a:t>ATG</a:t>
+                      </a:r>
+                    </a:p>
+                  </a:txBody>
+                  <a:tcPr anchor="ctr"/>
+                </a:tc>
+                <a:tc>
+                  <a:txBody>
+                    <a:bodyPr/>
+                    <a:lstStyle/>
+                    <a:p>
+                      <a:pPr algn="ctr">
+                        <a:buNone/>
+                      </a:pPr>
+                      <a:r>
+                        <a:rPr lang="en-US">
+                          <a:latin typeface="Calibri" panose="020F0502020204030204" pitchFamily="34" charset="0"/>
+                          <a:cs typeface="Calibri" panose="020F0502020204030204" pitchFamily="34" charset="0"/>
+                        </a:rPr>
+                        <a:t>GCT</a:t>
+                      </a:r>
+                    </a:p>
+                  </a:txBody>
+                  <a:tcPr anchor="ctr"/>
+                </a:tc>
+                <a:tc>
+                  <a:txBody>
+                    <a:bodyPr/>
+                    <a:lstStyle/>
+                    <a:p>
+                      <a:pPr algn="ctr">
+                        <a:buNone/>
+                      </a:pPr>
+                      <a:r>
+                        <a:rPr lang="en-US" dirty="0">
+                          <a:latin typeface="Calibri" panose="020F0502020204030204" pitchFamily="34" charset="0"/>
+                          <a:cs typeface="Calibri" panose="020F0502020204030204" pitchFamily="34" charset="0"/>
+                        </a:rPr>
+                        <a:t>TTT</a:t>
+                      </a:r>
+                    </a:p>
+                  </a:txBody>
+                  <a:tcPr anchor="ctr"/>
+                </a:tc>
+                <a:tc>
+                  <a:txBody>
+                    <a:bodyPr/>
+                    <a:lstStyle/>
+                    <a:p>
+                      <a:pPr algn="ctr">
+                        <a:buNone/>
+                      </a:pPr>
+                      <a:r>
+                        <a:rPr lang="en-US" dirty="0">
+                          <a:latin typeface="Calibri" panose="020F0502020204030204" pitchFamily="34" charset="0"/>
+                          <a:cs typeface="Calibri" panose="020F0502020204030204" pitchFamily="34" charset="0"/>
+                        </a:rPr>
+                        <a:t>C</a:t>
+                      </a:r>
+                      <a:r>
+                        <a:rPr lang="en-US" b="1" dirty="0">
+                          <a:solidFill>
+                            <a:srgbClr val="7675E6"/>
+                          </a:solidFill>
+                          <a:latin typeface="Calibri" panose="020F0502020204030204" pitchFamily="34" charset="0"/>
+                          <a:cs typeface="Calibri" panose="020F0502020204030204" pitchFamily="34" charset="0"/>
+                        </a:rPr>
+                        <a:t>-</a:t>
+                      </a:r>
+                      <a:r>
+                        <a:rPr lang="en-US" b="1" dirty="0">
+                          <a:solidFill>
+                            <a:srgbClr val="00B0F0"/>
+                          </a:solidFill>
+                          <a:latin typeface="Calibri" panose="020F0502020204030204" pitchFamily="34" charset="0"/>
+                          <a:cs typeface="Calibri" panose="020F0502020204030204" pitchFamily="34" charset="0"/>
+                        </a:rPr>
+                        <a:t> </a:t>
+                      </a:r>
+                      <a:r>
+                        <a:rPr lang="en-US" dirty="0">
+                          <a:latin typeface="Calibri" panose="020F0502020204030204" pitchFamily="34" charset="0"/>
+                          <a:cs typeface="Calibri" panose="020F0502020204030204" pitchFamily="34" charset="0"/>
+                        </a:rPr>
+                        <a:t>G</a:t>
+                      </a:r>
+                    </a:p>
+                  </a:txBody>
+                  <a:tcPr anchor="ctr"/>
+                </a:tc>
+                <a:tc>
+                  <a:txBody>
+                    <a:bodyPr/>
+                    <a:lstStyle/>
+                    <a:p>
+                      <a:pPr algn="ctr">
+                        <a:buNone/>
+                      </a:pPr>
+                      <a:r>
+                        <a:rPr lang="en-US" dirty="0">
+                          <a:latin typeface="Calibri" panose="020F0502020204030204" pitchFamily="34" charset="0"/>
+                          <a:cs typeface="Calibri" panose="020F0502020204030204" pitchFamily="34" charset="0"/>
+                        </a:rPr>
+                        <a:t>AAA</a:t>
+                      </a:r>
+                    </a:p>
+                  </a:txBody>
+                  <a:tcPr anchor="ctr"/>
+                </a:tc>
+                <a:tc>
+                  <a:txBody>
+                    <a:bodyPr/>
+                    <a:lstStyle/>
+                    <a:p>
+                      <a:pPr algn="ctr">
+                        <a:buNone/>
+                      </a:pPr>
+                      <a:r>
+                        <a:rPr lang="en-US">
+                          <a:latin typeface="Calibri" panose="020F0502020204030204" pitchFamily="34" charset="0"/>
+                          <a:cs typeface="Calibri" panose="020F0502020204030204" pitchFamily="34" charset="0"/>
+                        </a:rPr>
+                        <a:t>GGC</a:t>
+                      </a:r>
+                    </a:p>
+                  </a:txBody>
+                  <a:tcPr anchor="ctr"/>
+                </a:tc>
+                <a:tc>
+                  <a:txBody>
+                    <a:bodyPr/>
+                    <a:lstStyle/>
+                    <a:p>
+                      <a:pPr algn="ctr">
+                        <a:buNone/>
+                      </a:pPr>
+                      <a:r>
+                        <a:rPr lang="en-US" dirty="0">
+                          <a:latin typeface="Calibri" panose="020F0502020204030204" pitchFamily="34" charset="0"/>
+                          <a:cs typeface="Calibri" panose="020F0502020204030204" pitchFamily="34" charset="0"/>
+                        </a:rPr>
+                        <a:t>…</a:t>
+                      </a:r>
+                    </a:p>
+                  </a:txBody>
+                  <a:tcPr anchor="ctr"/>
+                </a:tc>
+                <a:extLst>
+                  <a:ext uri="{0D108BD9-81ED-4DB2-BD59-A6C34878D82A}">
+                    <a16:rowId xmlns:a16="http://schemas.microsoft.com/office/drawing/2014/main" val="3377439741"/>
+                  </a:ext>
+                </a:extLst>
+              </a:tr>
+              <a:tr h="243597">
+                <a:tc>
+                  <a:txBody>
+                    <a:bodyPr/>
+                    <a:lstStyle/>
+                    <a:p>
+                      <a:pPr algn="ctr">
+                        <a:buNone/>
+                      </a:pPr>
+                      <a:r>
+                        <a:rPr lang="en-US" dirty="0">
+                          <a:latin typeface="Calibri" panose="020F0502020204030204" pitchFamily="34" charset="0"/>
+                          <a:cs typeface="Calibri" panose="020F0502020204030204" pitchFamily="34" charset="0"/>
+                        </a:rPr>
+                        <a:t>A</a:t>
+                      </a:r>
+                      <a:r>
+                        <a:rPr lang="en-US" b="1" dirty="0">
+                          <a:solidFill>
+                            <a:srgbClr val="7675E6"/>
+                          </a:solidFill>
+                          <a:latin typeface="Calibri" panose="020F0502020204030204" pitchFamily="34" charset="0"/>
+                          <a:cs typeface="Calibri" panose="020F0502020204030204" pitchFamily="34" charset="0"/>
+                        </a:rPr>
+                        <a:t>C</a:t>
+                      </a:r>
+                      <a:r>
+                        <a:rPr lang="en-US" dirty="0">
+                          <a:latin typeface="Calibri" panose="020F0502020204030204" pitchFamily="34" charset="0"/>
+                          <a:cs typeface="Calibri" panose="020F0502020204030204" pitchFamily="34" charset="0"/>
+                        </a:rPr>
+                        <a:t>G</a:t>
+                      </a:r>
+                    </a:p>
+                  </a:txBody>
+                  <a:tcPr anchor="ctr"/>
+                </a:tc>
+                <a:tc>
+                  <a:txBody>
+                    <a:bodyPr/>
+                    <a:lstStyle/>
+                    <a:p>
+                      <a:pPr algn="ctr">
+                        <a:buNone/>
+                      </a:pPr>
+                      <a:r>
+                        <a:rPr lang="en-US" dirty="0">
+                          <a:latin typeface="Calibri" panose="020F0502020204030204" pitchFamily="34" charset="0"/>
+                          <a:cs typeface="Calibri" panose="020F0502020204030204" pitchFamily="34" charset="0"/>
+                        </a:rPr>
+                        <a:t>GC</a:t>
+                      </a:r>
+                      <a:r>
+                        <a:rPr lang="en-US" b="1" dirty="0">
+                          <a:solidFill>
+                            <a:srgbClr val="7675E6"/>
+                          </a:solidFill>
+                          <a:latin typeface="Calibri" panose="020F0502020204030204" pitchFamily="34" charset="0"/>
+                          <a:cs typeface="Calibri" panose="020F0502020204030204" pitchFamily="34" charset="0"/>
+                        </a:rPr>
+                        <a:t>A</a:t>
+                      </a:r>
+                      <a:endParaRPr lang="en-US" dirty="0">
+                        <a:solidFill>
+                          <a:srgbClr val="7675E6"/>
+                        </a:solidFill>
+                        <a:latin typeface="Calibri" panose="020F0502020204030204" pitchFamily="34" charset="0"/>
+                        <a:cs typeface="Calibri" panose="020F0502020204030204" pitchFamily="34" charset="0"/>
+                      </a:endParaRPr>
+                    </a:p>
+                  </a:txBody>
+                  <a:tcPr anchor="ctr"/>
+                </a:tc>
+                <a:tc>
+                  <a:txBody>
+                    <a:bodyPr/>
+                    <a:lstStyle/>
+                    <a:p>
+                      <a:pPr algn="ctr">
+                        <a:buNone/>
+                      </a:pPr>
+                      <a:r>
+                        <a:rPr lang="en-US">
+                          <a:latin typeface="Calibri" panose="020F0502020204030204" pitchFamily="34" charset="0"/>
+                          <a:cs typeface="Calibri" panose="020F0502020204030204" pitchFamily="34" charset="0"/>
+                        </a:rPr>
+                        <a:t>TTT</a:t>
+                      </a:r>
+                    </a:p>
+                  </a:txBody>
+                  <a:tcPr anchor="ctr"/>
+                </a:tc>
+                <a:tc>
+                  <a:txBody>
+                    <a:bodyPr/>
+                    <a:lstStyle/>
+                    <a:p>
+                      <a:pPr algn="ctr">
+                        <a:buNone/>
+                      </a:pPr>
+                      <a:r>
+                        <a:rPr lang="en-US" dirty="0">
+                          <a:latin typeface="Calibri" panose="020F0502020204030204" pitchFamily="34" charset="0"/>
+                          <a:cs typeface="Calibri" panose="020F0502020204030204" pitchFamily="34" charset="0"/>
+                        </a:rPr>
+                        <a:t>CAG</a:t>
+                      </a:r>
+                    </a:p>
+                  </a:txBody>
+                  <a:tcPr anchor="ctr"/>
+                </a:tc>
+                <a:tc>
+                  <a:txBody>
+                    <a:bodyPr/>
+                    <a:lstStyle/>
+                    <a:p>
+                      <a:pPr algn="ctr">
+                        <a:buNone/>
+                      </a:pPr>
+                      <a:r>
+                        <a:rPr lang="en-US" dirty="0">
+                          <a:latin typeface="Calibri" panose="020F0502020204030204" pitchFamily="34" charset="0"/>
+                          <a:cs typeface="Calibri" panose="020F0502020204030204" pitchFamily="34" charset="0"/>
+                        </a:rPr>
+                        <a:t>AA</a:t>
+                      </a:r>
+                      <a:r>
+                        <a:rPr lang="en-US" b="1" dirty="0">
+                          <a:solidFill>
+                            <a:srgbClr val="7675E6"/>
+                          </a:solidFill>
+                          <a:latin typeface="Calibri" panose="020F0502020204030204" pitchFamily="34" charset="0"/>
+                          <a:cs typeface="Calibri" panose="020F0502020204030204" pitchFamily="34" charset="0"/>
+                        </a:rPr>
+                        <a:t>-</a:t>
+                      </a:r>
+                      <a:r>
+                        <a:rPr lang="en-US" b="1" dirty="0">
+                          <a:solidFill>
+                            <a:srgbClr val="00B0F0"/>
+                          </a:solidFill>
+                          <a:latin typeface="Calibri" panose="020F0502020204030204" pitchFamily="34" charset="0"/>
+                          <a:cs typeface="Calibri" panose="020F0502020204030204" pitchFamily="34" charset="0"/>
+                        </a:rPr>
+                        <a:t> </a:t>
+                      </a:r>
+                    </a:p>
+                  </a:txBody>
+                  <a:tcPr anchor="ctr"/>
+                </a:tc>
+                <a:tc>
+                  <a:txBody>
+                    <a:bodyPr/>
+                    <a:lstStyle/>
+                    <a:p>
+                      <a:pPr algn="ctr">
+                        <a:buNone/>
+                      </a:pPr>
+                      <a:r>
+                        <a:rPr lang="en-US" dirty="0">
+                          <a:latin typeface="Calibri" panose="020F0502020204030204" pitchFamily="34" charset="0"/>
+                          <a:cs typeface="Calibri" panose="020F0502020204030204" pitchFamily="34" charset="0"/>
+                        </a:rPr>
+                        <a:t>GGC</a:t>
+                      </a:r>
+                    </a:p>
+                  </a:txBody>
+                  <a:tcPr anchor="ctr"/>
+                </a:tc>
+                <a:tc>
+                  <a:txBody>
+                    <a:bodyPr/>
+                    <a:lstStyle/>
+                    <a:p>
+                      <a:pPr algn="ctr">
+                        <a:buNone/>
+                      </a:pPr>
+                      <a:r>
+                        <a:rPr lang="en-US" dirty="0">
+                          <a:latin typeface="Calibri" panose="020F0502020204030204" pitchFamily="34" charset="0"/>
+                          <a:cs typeface="Calibri" panose="020F0502020204030204" pitchFamily="34" charset="0"/>
+                        </a:rPr>
+                        <a:t>…</a:t>
+                      </a:r>
+                    </a:p>
+                  </a:txBody>
+                  <a:tcPr anchor="ctr"/>
+                </a:tc>
+                <a:extLst>
+                  <a:ext uri="{0D108BD9-81ED-4DB2-BD59-A6C34878D82A}">
+                    <a16:rowId xmlns:a16="http://schemas.microsoft.com/office/drawing/2014/main" val="335229866"/>
+                  </a:ext>
+                </a:extLst>
+              </a:tr>
+            </a:tbl>
+          </a:graphicData>
+        </a:graphic>
+      </p:graphicFrame>
+      <p:graphicFrame>
+        <p:nvGraphicFramePr>
+          <p:cNvPr id="49" name="Table 48">
+            <a:extLst>
+              <a:ext uri="{FF2B5EF4-FFF2-40B4-BE49-F238E27FC236}">
+                <a16:creationId xmlns:a16="http://schemas.microsoft.com/office/drawing/2014/main" id="{C9C49A05-E366-E33D-DFD4-BDF008255359}"/>
+              </a:ext>
+            </a:extLst>
+          </p:cNvPr>
+          <p:cNvGraphicFramePr>
+            <a:graphicFrameLocks noGrp="1"/>
+          </p:cNvGraphicFramePr>
+          <p:nvPr>
+            <p:extLst>
+              <p:ext uri="{D42A27DB-BD31-4B8C-83A1-F6EECF244321}">
+                <p14:modId xmlns:p14="http://schemas.microsoft.com/office/powerpoint/2010/main" val="1347324556"/>
+              </p:ext>
+            </p:extLst>
+          </p:nvPr>
+        </p:nvGraphicFramePr>
+        <p:xfrm>
+          <a:off x="2838356" y="781246"/>
+          <a:ext cx="4302795" cy="365760"/>
+        </p:xfrm>
+        <a:graphic>
+          <a:graphicData uri="http://schemas.openxmlformats.org/drawingml/2006/table">
+            <a:tbl>
+              <a:tblPr>
+                <a:tableStyleId>{3C2FFA5D-87B4-456A-9821-1D502468CF0F}</a:tableStyleId>
+              </a:tblPr>
+              <a:tblGrid>
+                <a:gridCol w="614685">
+                  <a:extLst>
+                    <a:ext uri="{9D8B030D-6E8A-4147-A177-3AD203B41FA5}">
+                      <a16:colId xmlns:a16="http://schemas.microsoft.com/office/drawing/2014/main" val="3526854328"/>
+                    </a:ext>
+                  </a:extLst>
+                </a:gridCol>
+                <a:gridCol w="614685">
+                  <a:extLst>
+                    <a:ext uri="{9D8B030D-6E8A-4147-A177-3AD203B41FA5}">
+                      <a16:colId xmlns:a16="http://schemas.microsoft.com/office/drawing/2014/main" val="3363055171"/>
+                    </a:ext>
+                  </a:extLst>
+                </a:gridCol>
+                <a:gridCol w="614685">
+                  <a:extLst>
+                    <a:ext uri="{9D8B030D-6E8A-4147-A177-3AD203B41FA5}">
+                      <a16:colId xmlns:a16="http://schemas.microsoft.com/office/drawing/2014/main" val="2428403401"/>
+                    </a:ext>
+                  </a:extLst>
+                </a:gridCol>
+                <a:gridCol w="614685">
+                  <a:extLst>
+                    <a:ext uri="{9D8B030D-6E8A-4147-A177-3AD203B41FA5}">
+                      <a16:colId xmlns:a16="http://schemas.microsoft.com/office/drawing/2014/main" val="2747732061"/>
+                    </a:ext>
+                  </a:extLst>
+                </a:gridCol>
+                <a:gridCol w="614685">
+                  <a:extLst>
+                    <a:ext uri="{9D8B030D-6E8A-4147-A177-3AD203B41FA5}">
+                      <a16:colId xmlns:a16="http://schemas.microsoft.com/office/drawing/2014/main" val="1869642782"/>
+                    </a:ext>
+                  </a:extLst>
+                </a:gridCol>
+                <a:gridCol w="614685">
+                  <a:extLst>
+                    <a:ext uri="{9D8B030D-6E8A-4147-A177-3AD203B41FA5}">
+                      <a16:colId xmlns:a16="http://schemas.microsoft.com/office/drawing/2014/main" val="1253564834"/>
+                    </a:ext>
+                  </a:extLst>
+                </a:gridCol>
+                <a:gridCol w="614685">
+                  <a:extLst>
+                    <a:ext uri="{9D8B030D-6E8A-4147-A177-3AD203B41FA5}">
+                      <a16:colId xmlns:a16="http://schemas.microsoft.com/office/drawing/2014/main" val="1967403460"/>
+                    </a:ext>
+                  </a:extLst>
+                </a:gridCol>
+              </a:tblGrid>
+              <a:tr h="243597">
+                <a:tc>
+                  <a:txBody>
+                    <a:bodyPr/>
+                    <a:lstStyle/>
+                    <a:p>
+                      <a:pPr algn="ctr">
+                        <a:buNone/>
+                      </a:pPr>
+                      <a:r>
+                        <a:rPr lang="en-US" dirty="0">
+                          <a:latin typeface="Calibri" panose="020F0502020204030204" pitchFamily="34" charset="0"/>
+                          <a:cs typeface="Calibri" panose="020F0502020204030204" pitchFamily="34" charset="0"/>
+                        </a:rPr>
+                        <a:t>ATG</a:t>
+                      </a:r>
+                    </a:p>
+                  </a:txBody>
+                  <a:tcPr anchor="ctr"/>
+                </a:tc>
+                <a:tc>
+                  <a:txBody>
+                    <a:bodyPr/>
+                    <a:lstStyle/>
+                    <a:p>
+                      <a:pPr algn="ctr">
+                        <a:buNone/>
+                      </a:pPr>
+                      <a:r>
+                        <a:rPr lang="en-US" dirty="0">
+                          <a:latin typeface="Calibri" panose="020F0502020204030204" pitchFamily="34" charset="0"/>
+                          <a:cs typeface="Calibri" panose="020F0502020204030204" pitchFamily="34" charset="0"/>
+                        </a:rPr>
+                        <a:t>GCT</a:t>
+                      </a:r>
+                    </a:p>
+                  </a:txBody>
+                  <a:tcPr anchor="ctr"/>
+                </a:tc>
+                <a:tc>
+                  <a:txBody>
+                    <a:bodyPr/>
+                    <a:lstStyle/>
+                    <a:p>
+                      <a:pPr algn="ctr">
+                        <a:buNone/>
+                      </a:pPr>
+                      <a:r>
+                        <a:rPr lang="en-US" dirty="0">
+                          <a:latin typeface="Calibri" panose="020F0502020204030204" pitchFamily="34" charset="0"/>
+                          <a:cs typeface="Calibri" panose="020F0502020204030204" pitchFamily="34" charset="0"/>
+                        </a:rPr>
+                        <a:t>TTT</a:t>
+                      </a:r>
+                    </a:p>
+                  </a:txBody>
+                  <a:tcPr anchor="ctr"/>
+                </a:tc>
+                <a:tc>
+                  <a:txBody>
+                    <a:bodyPr/>
+                    <a:lstStyle/>
+                    <a:p>
+                      <a:pPr algn="ctr">
+                        <a:buNone/>
+                      </a:pPr>
+                      <a:r>
+                        <a:rPr lang="en-US" dirty="0">
+                          <a:latin typeface="Calibri" panose="020F0502020204030204" pitchFamily="34" charset="0"/>
+                          <a:cs typeface="Calibri" panose="020F0502020204030204" pitchFamily="34" charset="0"/>
+                        </a:rPr>
+                        <a:t>CAG</a:t>
+                      </a:r>
+                    </a:p>
+                  </a:txBody>
+                  <a:tcPr anchor="ctr"/>
+                </a:tc>
+                <a:tc>
+                  <a:txBody>
+                    <a:bodyPr/>
+                    <a:lstStyle/>
+                    <a:p>
+                      <a:pPr algn="ctr">
+                        <a:buNone/>
+                      </a:pPr>
+                      <a:r>
+                        <a:rPr lang="en-US" dirty="0">
+                          <a:latin typeface="Calibri" panose="020F0502020204030204" pitchFamily="34" charset="0"/>
+                          <a:cs typeface="Calibri" panose="020F0502020204030204" pitchFamily="34" charset="0"/>
+                        </a:rPr>
+                        <a:t>AAA</a:t>
+                      </a:r>
+                    </a:p>
+                  </a:txBody>
+                  <a:tcPr anchor="ctr"/>
+                </a:tc>
+                <a:tc>
+                  <a:txBody>
+                    <a:bodyPr/>
+                    <a:lstStyle/>
+                    <a:p>
+                      <a:pPr algn="ctr">
+                        <a:buNone/>
+                      </a:pPr>
+                      <a:r>
+                        <a:rPr lang="en-US" dirty="0">
+                          <a:latin typeface="Calibri" panose="020F0502020204030204" pitchFamily="34" charset="0"/>
+                          <a:cs typeface="Calibri" panose="020F0502020204030204" pitchFamily="34" charset="0"/>
+                        </a:rPr>
+                        <a:t>GGC</a:t>
+                      </a:r>
+                    </a:p>
+                  </a:txBody>
+                  <a:tcPr anchor="ctr"/>
+                </a:tc>
+                <a:tc>
+                  <a:txBody>
+                    <a:bodyPr/>
+                    <a:lstStyle/>
+                    <a:p>
+                      <a:pPr algn="ctr">
+                        <a:buNone/>
+                      </a:pPr>
+                      <a:r>
+                        <a:rPr lang="en-US" dirty="0">
+                          <a:latin typeface="Calibri" panose="020F0502020204030204" pitchFamily="34" charset="0"/>
+                          <a:cs typeface="Calibri" panose="020F0502020204030204" pitchFamily="34" charset="0"/>
+                        </a:rPr>
+                        <a:t>…</a:t>
+                      </a:r>
+                    </a:p>
+                  </a:txBody>
+                  <a:tcPr anchor="ctr"/>
+                </a:tc>
+                <a:extLst>
+                  <a:ext uri="{0D108BD9-81ED-4DB2-BD59-A6C34878D82A}">
+                    <a16:rowId xmlns:a16="http://schemas.microsoft.com/office/drawing/2014/main" val="569080284"/>
+                  </a:ext>
+                </a:extLst>
+              </a:tr>
+            </a:tbl>
+          </a:graphicData>
+        </a:graphic>
+      </p:graphicFrame>
+      <p:graphicFrame>
+        <p:nvGraphicFramePr>
+          <p:cNvPr id="51" name="Table 50">
+            <a:extLst>
+              <a:ext uri="{FF2B5EF4-FFF2-40B4-BE49-F238E27FC236}">
+                <a16:creationId xmlns:a16="http://schemas.microsoft.com/office/drawing/2014/main" id="{9F737EEF-A005-FD7B-6C74-4B575554986E}"/>
+              </a:ext>
+            </a:extLst>
+          </p:cNvPr>
+          <p:cNvGraphicFramePr>
+            <a:graphicFrameLocks noGrp="1"/>
+          </p:cNvGraphicFramePr>
+          <p:nvPr>
+            <p:extLst>
+              <p:ext uri="{D42A27DB-BD31-4B8C-83A1-F6EECF244321}">
+                <p14:modId xmlns:p14="http://schemas.microsoft.com/office/powerpoint/2010/main" val="358580218"/>
+              </p:ext>
+            </p:extLst>
+          </p:nvPr>
+        </p:nvGraphicFramePr>
+        <p:xfrm>
+          <a:off x="2838356" y="4640869"/>
+          <a:ext cx="4302795" cy="1463040"/>
+        </p:xfrm>
+        <a:graphic>
+          <a:graphicData uri="http://schemas.openxmlformats.org/drawingml/2006/table">
+            <a:tbl>
+              <a:tblPr bandRow="1">
+                <a:tableStyleId>{3C2FFA5D-87B4-456A-9821-1D502468CF0F}</a:tableStyleId>
+              </a:tblPr>
+              <a:tblGrid>
+                <a:gridCol w="614685">
+                  <a:extLst>
+                    <a:ext uri="{9D8B030D-6E8A-4147-A177-3AD203B41FA5}">
+                      <a16:colId xmlns:a16="http://schemas.microsoft.com/office/drawing/2014/main" val="3526854328"/>
+                    </a:ext>
+                  </a:extLst>
+                </a:gridCol>
+                <a:gridCol w="614685">
+                  <a:extLst>
+                    <a:ext uri="{9D8B030D-6E8A-4147-A177-3AD203B41FA5}">
+                      <a16:colId xmlns:a16="http://schemas.microsoft.com/office/drawing/2014/main" val="3363055171"/>
+                    </a:ext>
+                  </a:extLst>
+                </a:gridCol>
+                <a:gridCol w="614685">
+                  <a:extLst>
+                    <a:ext uri="{9D8B030D-6E8A-4147-A177-3AD203B41FA5}">
+                      <a16:colId xmlns:a16="http://schemas.microsoft.com/office/drawing/2014/main" val="2428403401"/>
+                    </a:ext>
+                  </a:extLst>
+                </a:gridCol>
+                <a:gridCol w="614685">
+                  <a:extLst>
+                    <a:ext uri="{9D8B030D-6E8A-4147-A177-3AD203B41FA5}">
+                      <a16:colId xmlns:a16="http://schemas.microsoft.com/office/drawing/2014/main" val="2747732061"/>
+                    </a:ext>
+                  </a:extLst>
+                </a:gridCol>
+                <a:gridCol w="614685">
+                  <a:extLst>
+                    <a:ext uri="{9D8B030D-6E8A-4147-A177-3AD203B41FA5}">
+                      <a16:colId xmlns:a16="http://schemas.microsoft.com/office/drawing/2014/main" val="1869642782"/>
+                    </a:ext>
+                  </a:extLst>
+                </a:gridCol>
+                <a:gridCol w="614685">
+                  <a:extLst>
+                    <a:ext uri="{9D8B030D-6E8A-4147-A177-3AD203B41FA5}">
+                      <a16:colId xmlns:a16="http://schemas.microsoft.com/office/drawing/2014/main" val="1253564834"/>
+                    </a:ext>
+                  </a:extLst>
+                </a:gridCol>
+                <a:gridCol w="614685">
+                  <a:extLst>
+                    <a:ext uri="{9D8B030D-6E8A-4147-A177-3AD203B41FA5}">
+                      <a16:colId xmlns:a16="http://schemas.microsoft.com/office/drawing/2014/main" val="3744933017"/>
+                    </a:ext>
+                  </a:extLst>
+                </a:gridCol>
+              </a:tblGrid>
+              <a:tr h="243597">
+                <a:tc>
+                  <a:txBody>
+                    <a:bodyPr/>
+                    <a:lstStyle/>
+                    <a:p>
+                      <a:pPr algn="ctr">
+                        <a:buNone/>
+                      </a:pPr>
+                      <a:r>
+                        <a:rPr lang="en-US" dirty="0">
+                          <a:latin typeface="Calibri" panose="020F0502020204030204" pitchFamily="34" charset="0"/>
+                          <a:cs typeface="Calibri" panose="020F0502020204030204" pitchFamily="34" charset="0"/>
+                        </a:rPr>
+                        <a:t>ATG</a:t>
+                      </a:r>
+                    </a:p>
+                  </a:txBody>
+                  <a:tcPr anchor="ctr"/>
+                </a:tc>
+                <a:tc>
+                  <a:txBody>
+                    <a:bodyPr/>
+                    <a:lstStyle/>
+                    <a:p>
+                      <a:pPr algn="ctr">
+                        <a:buNone/>
+                      </a:pPr>
+                      <a:r>
+                        <a:rPr lang="en-US" dirty="0">
+                          <a:latin typeface="Calibri" panose="020F0502020204030204" pitchFamily="34" charset="0"/>
+                          <a:cs typeface="Calibri" panose="020F0502020204030204" pitchFamily="34" charset="0"/>
+                        </a:rPr>
+                        <a:t>G</a:t>
+                      </a:r>
+                      <a:r>
+                        <a:rPr lang="en-US" b="1" dirty="0">
+                          <a:solidFill>
+                            <a:srgbClr val="7675E6"/>
+                          </a:solidFill>
+                          <a:latin typeface="Calibri" panose="020F0502020204030204" pitchFamily="34" charset="0"/>
+                          <a:cs typeface="Calibri" panose="020F0502020204030204" pitchFamily="34" charset="0"/>
+                        </a:rPr>
+                        <a:t>T</a:t>
+                      </a:r>
+                      <a:r>
+                        <a:rPr lang="en-US" dirty="0">
+                          <a:latin typeface="Calibri" panose="020F0502020204030204" pitchFamily="34" charset="0"/>
+                          <a:cs typeface="Calibri" panose="020F0502020204030204" pitchFamily="34" charset="0"/>
+                        </a:rPr>
+                        <a:t>T</a:t>
+                      </a:r>
+                    </a:p>
+                  </a:txBody>
+                  <a:tcPr anchor="ctr"/>
+                </a:tc>
+                <a:tc>
+                  <a:txBody>
+                    <a:bodyPr/>
+                    <a:lstStyle/>
+                    <a:p>
+                      <a:pPr algn="ctr">
+                        <a:buNone/>
+                      </a:pPr>
+                      <a:r>
+                        <a:rPr lang="en-US" dirty="0">
+                          <a:latin typeface="Calibri" panose="020F0502020204030204" pitchFamily="34" charset="0"/>
+                          <a:cs typeface="Calibri" panose="020F0502020204030204" pitchFamily="34" charset="0"/>
+                        </a:rPr>
+                        <a:t>TT</a:t>
+                      </a:r>
+                      <a:r>
+                        <a:rPr lang="en-US" b="1" dirty="0">
+                          <a:solidFill>
+                            <a:srgbClr val="FF0000"/>
+                          </a:solidFill>
+                          <a:latin typeface="Calibri" panose="020F0502020204030204" pitchFamily="34" charset="0"/>
+                          <a:cs typeface="Calibri" panose="020F0502020204030204" pitchFamily="34" charset="0"/>
+                        </a:rPr>
+                        <a:t>G</a:t>
+                      </a:r>
+                      <a:endParaRPr lang="en-US" b="1" dirty="0">
+                        <a:latin typeface="Calibri" panose="020F0502020204030204" pitchFamily="34" charset="0"/>
+                        <a:cs typeface="Calibri" panose="020F0502020204030204" pitchFamily="34" charset="0"/>
+                      </a:endParaRPr>
+                    </a:p>
+                  </a:txBody>
+                  <a:tcPr anchor="ctr"/>
+                </a:tc>
+                <a:tc>
+                  <a:txBody>
+                    <a:bodyPr/>
+                    <a:lstStyle/>
+                    <a:p>
+                      <a:pPr algn="ctr">
+                        <a:buNone/>
+                      </a:pPr>
+                      <a:r>
+                        <a:rPr lang="en-US" dirty="0">
+                          <a:latin typeface="Calibri" panose="020F0502020204030204" pitchFamily="34" charset="0"/>
+                          <a:cs typeface="Calibri" panose="020F0502020204030204" pitchFamily="34" charset="0"/>
+                        </a:rPr>
+                        <a:t>CAG</a:t>
+                      </a:r>
+                    </a:p>
+                  </a:txBody>
+                  <a:tcPr anchor="ctr"/>
+                </a:tc>
+                <a:tc>
+                  <a:txBody>
+                    <a:bodyPr/>
+                    <a:lstStyle/>
+                    <a:p>
+                      <a:pPr algn="ctr">
+                        <a:buNone/>
+                      </a:pPr>
+                      <a:r>
+                        <a:rPr lang="en-US" dirty="0">
+                          <a:latin typeface="Calibri" panose="020F0502020204030204" pitchFamily="34" charset="0"/>
+                          <a:cs typeface="Calibri" panose="020F0502020204030204" pitchFamily="34" charset="0"/>
+                        </a:rPr>
+                        <a:t>AAA</a:t>
+                      </a:r>
+                    </a:p>
+                  </a:txBody>
+                  <a:tcPr anchor="ctr"/>
+                </a:tc>
+                <a:tc>
+                  <a:txBody>
+                    <a:bodyPr/>
+                    <a:lstStyle/>
+                    <a:p>
+                      <a:pPr algn="ctr">
+                        <a:buNone/>
+                      </a:pPr>
+                      <a:r>
+                        <a:rPr lang="en-US" dirty="0">
+                          <a:latin typeface="Calibri" panose="020F0502020204030204" pitchFamily="34" charset="0"/>
+                          <a:cs typeface="Calibri" panose="020F0502020204030204" pitchFamily="34" charset="0"/>
+                        </a:rPr>
+                        <a:t>GGC</a:t>
+                      </a:r>
+                    </a:p>
+                  </a:txBody>
+                  <a:tcPr anchor="ctr"/>
+                </a:tc>
+                <a:tc>
+                  <a:txBody>
+                    <a:bodyPr/>
+                    <a:lstStyle/>
+                    <a:p>
+                      <a:pPr algn="ctr">
+                        <a:buNone/>
+                      </a:pPr>
+                      <a:r>
+                        <a:rPr lang="en-US" dirty="0">
+                          <a:latin typeface="Calibri" panose="020F0502020204030204" pitchFamily="34" charset="0"/>
+                          <a:cs typeface="Calibri" panose="020F0502020204030204" pitchFamily="34" charset="0"/>
+                        </a:rPr>
+                        <a:t>…</a:t>
+                      </a:r>
+                    </a:p>
+                  </a:txBody>
+                  <a:tcPr anchor="ctr"/>
+                </a:tc>
+                <a:extLst>
+                  <a:ext uri="{0D108BD9-81ED-4DB2-BD59-A6C34878D82A}">
+                    <a16:rowId xmlns:a16="http://schemas.microsoft.com/office/drawing/2014/main" val="3836387490"/>
+                  </a:ext>
+                </a:extLst>
+              </a:tr>
+              <a:tr h="243597">
+                <a:tc>
+                  <a:txBody>
+                    <a:bodyPr/>
+                    <a:lstStyle/>
+                    <a:p>
+                      <a:pPr algn="ctr">
+                        <a:buNone/>
+                      </a:pPr>
+                      <a:r>
+                        <a:rPr lang="en-US">
+                          <a:latin typeface="Calibri" panose="020F0502020204030204" pitchFamily="34" charset="0"/>
+                          <a:cs typeface="Calibri" panose="020F0502020204030204" pitchFamily="34" charset="0"/>
+                        </a:rPr>
+                        <a:t>ATG</a:t>
+                      </a:r>
+                    </a:p>
+                  </a:txBody>
+                  <a:tcPr anchor="ctr"/>
+                </a:tc>
+                <a:tc>
+                  <a:txBody>
+                    <a:bodyPr/>
+                    <a:lstStyle/>
+                    <a:p>
+                      <a:pPr algn="ctr">
+                        <a:buNone/>
+                      </a:pPr>
+                      <a:r>
+                        <a:rPr lang="en-US">
+                          <a:latin typeface="Calibri" panose="020F0502020204030204" pitchFamily="34" charset="0"/>
+                          <a:cs typeface="Calibri" panose="020F0502020204030204" pitchFamily="34" charset="0"/>
+                        </a:rPr>
+                        <a:t>GCT</a:t>
+                      </a:r>
+                    </a:p>
+                  </a:txBody>
+                  <a:tcPr anchor="ctr"/>
+                </a:tc>
+                <a:tc>
+                  <a:txBody>
+                    <a:bodyPr/>
+                    <a:lstStyle/>
+                    <a:p>
+                      <a:pPr algn="ctr">
+                        <a:buNone/>
+                      </a:pPr>
+                      <a:r>
+                        <a:rPr lang="en-US" dirty="0">
+                          <a:latin typeface="Calibri" panose="020F0502020204030204" pitchFamily="34" charset="0"/>
+                          <a:cs typeface="Calibri" panose="020F0502020204030204" pitchFamily="34" charset="0"/>
+                        </a:rPr>
+                        <a:t>T</a:t>
+                      </a:r>
+                      <a:r>
+                        <a:rPr lang="en-US" b="1" dirty="0">
+                          <a:solidFill>
+                            <a:srgbClr val="7675E6"/>
+                          </a:solidFill>
+                          <a:latin typeface="Calibri" panose="020F0502020204030204" pitchFamily="34" charset="0"/>
+                          <a:cs typeface="Calibri" panose="020F0502020204030204" pitchFamily="34" charset="0"/>
+                        </a:rPr>
+                        <a:t>C</a:t>
+                      </a:r>
+                      <a:r>
+                        <a:rPr lang="en-US" b="1" dirty="0">
+                          <a:solidFill>
+                            <a:srgbClr val="FF0000"/>
+                          </a:solidFill>
+                          <a:latin typeface="Calibri" panose="020F0502020204030204" pitchFamily="34" charset="0"/>
+                          <a:cs typeface="Calibri" panose="020F0502020204030204" pitchFamily="34" charset="0"/>
+                        </a:rPr>
+                        <a:t>G</a:t>
+                      </a:r>
+                      <a:endParaRPr lang="en-US" b="1" dirty="0">
+                        <a:latin typeface="Calibri" panose="020F0502020204030204" pitchFamily="34" charset="0"/>
+                        <a:cs typeface="Calibri" panose="020F0502020204030204" pitchFamily="34" charset="0"/>
+                      </a:endParaRPr>
+                    </a:p>
+                  </a:txBody>
+                  <a:tcPr anchor="ctr"/>
+                </a:tc>
+                <a:tc>
+                  <a:txBody>
+                    <a:bodyPr/>
+                    <a:lstStyle/>
+                    <a:p>
+                      <a:pPr algn="ctr">
+                        <a:buNone/>
+                      </a:pPr>
+                      <a:r>
+                        <a:rPr lang="en-US">
+                          <a:latin typeface="Calibri" panose="020F0502020204030204" pitchFamily="34" charset="0"/>
+                          <a:cs typeface="Calibri" panose="020F0502020204030204" pitchFamily="34" charset="0"/>
+                        </a:rPr>
+                        <a:t>CAG</a:t>
+                      </a:r>
+                    </a:p>
+                  </a:txBody>
+                  <a:tcPr anchor="ctr"/>
+                </a:tc>
+                <a:tc>
+                  <a:txBody>
+                    <a:bodyPr/>
+                    <a:lstStyle/>
+                    <a:p>
+                      <a:pPr algn="ctr">
+                        <a:buNone/>
+                      </a:pPr>
+                      <a:r>
+                        <a:rPr lang="en-US" dirty="0">
+                          <a:latin typeface="Calibri" panose="020F0502020204030204" pitchFamily="34" charset="0"/>
+                          <a:cs typeface="Calibri" panose="020F0502020204030204" pitchFamily="34" charset="0"/>
+                        </a:rPr>
+                        <a:t>AAA</a:t>
+                      </a:r>
+                    </a:p>
+                  </a:txBody>
+                  <a:tcPr anchor="ctr"/>
+                </a:tc>
+                <a:tc>
+                  <a:txBody>
+                    <a:bodyPr/>
+                    <a:lstStyle/>
+                    <a:p>
+                      <a:pPr algn="ctr">
+                        <a:buNone/>
+                      </a:pPr>
+                      <a:r>
+                        <a:rPr lang="en-US" dirty="0">
+                          <a:latin typeface="Calibri" panose="020F0502020204030204" pitchFamily="34" charset="0"/>
+                          <a:cs typeface="Calibri" panose="020F0502020204030204" pitchFamily="34" charset="0"/>
+                        </a:rPr>
+                        <a:t>GG</a:t>
+                      </a:r>
+                      <a:r>
+                        <a:rPr lang="en-US" b="1" dirty="0">
+                          <a:solidFill>
+                            <a:srgbClr val="7675E6"/>
+                          </a:solidFill>
+                          <a:latin typeface="Calibri" panose="020F0502020204030204" pitchFamily="34" charset="0"/>
+                          <a:cs typeface="Calibri" panose="020F0502020204030204" pitchFamily="34" charset="0"/>
+                        </a:rPr>
+                        <a:t>A</a:t>
+                      </a:r>
+                      <a:endParaRPr lang="en-US" dirty="0">
+                        <a:solidFill>
+                          <a:srgbClr val="7675E6"/>
+                        </a:solidFill>
+                        <a:latin typeface="Calibri" panose="020F0502020204030204" pitchFamily="34" charset="0"/>
+                        <a:cs typeface="Calibri" panose="020F0502020204030204" pitchFamily="34" charset="0"/>
+                      </a:endParaRPr>
+                    </a:p>
+                  </a:txBody>
+                  <a:tcPr anchor="ctr"/>
+                </a:tc>
+                <a:tc>
+                  <a:txBody>
+                    <a:bodyPr/>
+                    <a:lstStyle/>
+                    <a:p>
+                      <a:pPr algn="ctr">
+                        <a:buNone/>
+                      </a:pPr>
+                      <a:r>
+                        <a:rPr lang="en-US" dirty="0">
+                          <a:latin typeface="Calibri" panose="020F0502020204030204" pitchFamily="34" charset="0"/>
+                          <a:cs typeface="Calibri" panose="020F0502020204030204" pitchFamily="34" charset="0"/>
+                        </a:rPr>
+                        <a:t>…</a:t>
+                      </a:r>
+                    </a:p>
+                  </a:txBody>
+                  <a:tcPr anchor="ctr"/>
+                </a:tc>
+                <a:extLst>
+                  <a:ext uri="{0D108BD9-81ED-4DB2-BD59-A6C34878D82A}">
+                    <a16:rowId xmlns:a16="http://schemas.microsoft.com/office/drawing/2014/main" val="2427768056"/>
+                  </a:ext>
+                </a:extLst>
+              </a:tr>
+              <a:tr h="243597">
+                <a:tc>
+                  <a:txBody>
+                    <a:bodyPr/>
+                    <a:lstStyle/>
+                    <a:p>
+                      <a:pPr algn="ctr">
+                        <a:buNone/>
+                      </a:pPr>
+                      <a:r>
+                        <a:rPr lang="en-US">
+                          <a:latin typeface="Calibri" panose="020F0502020204030204" pitchFamily="34" charset="0"/>
+                          <a:cs typeface="Calibri" panose="020F0502020204030204" pitchFamily="34" charset="0"/>
+                        </a:rPr>
+                        <a:t>ATG</a:t>
+                      </a:r>
+                    </a:p>
+                  </a:txBody>
+                  <a:tcPr anchor="ctr"/>
+                </a:tc>
+                <a:tc>
+                  <a:txBody>
+                    <a:bodyPr/>
+                    <a:lstStyle/>
+                    <a:p>
+                      <a:pPr algn="ctr">
+                        <a:buNone/>
+                      </a:pPr>
+                      <a:r>
+                        <a:rPr lang="en-US">
+                          <a:latin typeface="Calibri" panose="020F0502020204030204" pitchFamily="34" charset="0"/>
+                          <a:cs typeface="Calibri" panose="020F0502020204030204" pitchFamily="34" charset="0"/>
+                        </a:rPr>
+                        <a:t>GCT</a:t>
+                      </a:r>
+                    </a:p>
+                  </a:txBody>
+                  <a:tcPr anchor="ctr"/>
+                </a:tc>
+                <a:tc>
+                  <a:txBody>
+                    <a:bodyPr/>
+                    <a:lstStyle/>
+                    <a:p>
+                      <a:pPr algn="ctr">
+                        <a:buNone/>
+                      </a:pPr>
+                      <a:r>
+                        <a:rPr lang="en-US" dirty="0">
+                          <a:latin typeface="Calibri" panose="020F0502020204030204" pitchFamily="34" charset="0"/>
+                          <a:cs typeface="Calibri" panose="020F0502020204030204" pitchFamily="34" charset="0"/>
+                        </a:rPr>
+                        <a:t>TT</a:t>
+                      </a:r>
+                      <a:r>
+                        <a:rPr lang="en-US" b="1" dirty="0">
+                          <a:solidFill>
+                            <a:srgbClr val="FF0000"/>
+                          </a:solidFill>
+                          <a:latin typeface="Calibri" panose="020F0502020204030204" pitchFamily="34" charset="0"/>
+                          <a:cs typeface="Calibri" panose="020F0502020204030204" pitchFamily="34" charset="0"/>
+                        </a:rPr>
+                        <a:t>G</a:t>
+                      </a:r>
+                      <a:endParaRPr lang="en-US" b="1" dirty="0">
+                        <a:latin typeface="Calibri" panose="020F0502020204030204" pitchFamily="34" charset="0"/>
+                        <a:cs typeface="Calibri" panose="020F0502020204030204" pitchFamily="34" charset="0"/>
+                      </a:endParaRPr>
+                    </a:p>
+                  </a:txBody>
+                  <a:tcPr anchor="ctr"/>
+                </a:tc>
+                <a:tc>
+                  <a:txBody>
+                    <a:bodyPr/>
+                    <a:lstStyle/>
+                    <a:p>
+                      <a:pPr algn="ctr">
+                        <a:buNone/>
+                      </a:pPr>
+                      <a:r>
+                        <a:rPr lang="en-US" dirty="0">
+                          <a:latin typeface="Calibri" panose="020F0502020204030204" pitchFamily="34" charset="0"/>
+                          <a:cs typeface="Calibri" panose="020F0502020204030204" pitchFamily="34" charset="0"/>
+                        </a:rPr>
+                        <a:t>C</a:t>
+                      </a:r>
+                      <a:r>
+                        <a:rPr lang="en-US" b="1" dirty="0">
+                          <a:solidFill>
+                            <a:srgbClr val="7675E6"/>
+                          </a:solidFill>
+                          <a:latin typeface="Calibri" panose="020F0502020204030204" pitchFamily="34" charset="0"/>
+                          <a:cs typeface="Calibri" panose="020F0502020204030204" pitchFamily="34" charset="0"/>
+                        </a:rPr>
+                        <a:t>- </a:t>
+                      </a:r>
+                      <a:r>
+                        <a:rPr lang="en-US" dirty="0">
+                          <a:latin typeface="Calibri" panose="020F0502020204030204" pitchFamily="34" charset="0"/>
+                          <a:cs typeface="Calibri" panose="020F0502020204030204" pitchFamily="34" charset="0"/>
+                        </a:rPr>
+                        <a:t>G</a:t>
+                      </a:r>
+                    </a:p>
+                  </a:txBody>
+                  <a:tcPr anchor="ctr"/>
+                </a:tc>
+                <a:tc>
+                  <a:txBody>
+                    <a:bodyPr/>
+                    <a:lstStyle/>
+                    <a:p>
+                      <a:pPr algn="ctr">
+                        <a:buNone/>
+                      </a:pPr>
+                      <a:r>
+                        <a:rPr lang="en-US" dirty="0">
+                          <a:latin typeface="Calibri" panose="020F0502020204030204" pitchFamily="34" charset="0"/>
+                          <a:cs typeface="Calibri" panose="020F0502020204030204" pitchFamily="34" charset="0"/>
+                        </a:rPr>
+                        <a:t>AAA</a:t>
+                      </a:r>
+                    </a:p>
+                  </a:txBody>
+                  <a:tcPr anchor="ctr"/>
+                </a:tc>
+                <a:tc>
+                  <a:txBody>
+                    <a:bodyPr/>
+                    <a:lstStyle/>
+                    <a:p>
+                      <a:pPr algn="ctr">
+                        <a:buNone/>
+                      </a:pPr>
+                      <a:r>
+                        <a:rPr lang="en-US">
+                          <a:latin typeface="Calibri" panose="020F0502020204030204" pitchFamily="34" charset="0"/>
+                          <a:cs typeface="Calibri" panose="020F0502020204030204" pitchFamily="34" charset="0"/>
+                        </a:rPr>
+                        <a:t>GGC</a:t>
+                      </a:r>
+                    </a:p>
+                  </a:txBody>
+                  <a:tcPr anchor="ctr"/>
+                </a:tc>
+                <a:tc>
+                  <a:txBody>
+                    <a:bodyPr/>
+                    <a:lstStyle/>
+                    <a:p>
+                      <a:pPr algn="ctr">
+                        <a:buNone/>
+                      </a:pPr>
+                      <a:r>
+                        <a:rPr lang="en-US" dirty="0">
+                          <a:latin typeface="Calibri" panose="020F0502020204030204" pitchFamily="34" charset="0"/>
+                          <a:cs typeface="Calibri" panose="020F0502020204030204" pitchFamily="34" charset="0"/>
+                        </a:rPr>
+                        <a:t>…</a:t>
+                      </a:r>
+                    </a:p>
+                  </a:txBody>
+                  <a:tcPr anchor="ctr"/>
+                </a:tc>
+                <a:extLst>
+                  <a:ext uri="{0D108BD9-81ED-4DB2-BD59-A6C34878D82A}">
+                    <a16:rowId xmlns:a16="http://schemas.microsoft.com/office/drawing/2014/main" val="3377439741"/>
+                  </a:ext>
+                </a:extLst>
+              </a:tr>
+              <a:tr h="243597">
+                <a:tc>
+                  <a:txBody>
+                    <a:bodyPr/>
+                    <a:lstStyle/>
+                    <a:p>
+                      <a:pPr algn="ctr">
+                        <a:buNone/>
+                      </a:pPr>
+                      <a:r>
+                        <a:rPr lang="en-US" dirty="0">
+                          <a:latin typeface="Calibri" panose="020F0502020204030204" pitchFamily="34" charset="0"/>
+                          <a:cs typeface="Calibri" panose="020F0502020204030204" pitchFamily="34" charset="0"/>
+                        </a:rPr>
+                        <a:t>A</a:t>
+                      </a:r>
+                      <a:r>
+                        <a:rPr lang="en-US" b="1" dirty="0">
+                          <a:solidFill>
+                            <a:srgbClr val="7675E6"/>
+                          </a:solidFill>
+                          <a:latin typeface="Calibri" panose="020F0502020204030204" pitchFamily="34" charset="0"/>
+                          <a:cs typeface="Calibri" panose="020F0502020204030204" pitchFamily="34" charset="0"/>
+                        </a:rPr>
+                        <a:t>C</a:t>
+                      </a:r>
+                      <a:r>
+                        <a:rPr lang="en-US" dirty="0">
+                          <a:latin typeface="Calibri" panose="020F0502020204030204" pitchFamily="34" charset="0"/>
+                          <a:cs typeface="Calibri" panose="020F0502020204030204" pitchFamily="34" charset="0"/>
+                        </a:rPr>
+                        <a:t>G</a:t>
+                      </a:r>
+                    </a:p>
+                  </a:txBody>
+                  <a:tcPr anchor="ctr"/>
+                </a:tc>
+                <a:tc>
+                  <a:txBody>
+                    <a:bodyPr/>
+                    <a:lstStyle/>
+                    <a:p>
+                      <a:pPr algn="ctr">
+                        <a:buNone/>
+                      </a:pPr>
+                      <a:r>
+                        <a:rPr lang="en-US" dirty="0">
+                          <a:latin typeface="Calibri" panose="020F0502020204030204" pitchFamily="34" charset="0"/>
+                          <a:cs typeface="Calibri" panose="020F0502020204030204" pitchFamily="34" charset="0"/>
+                        </a:rPr>
+                        <a:t>GC</a:t>
+                      </a:r>
+                      <a:r>
+                        <a:rPr lang="en-US" b="1" dirty="0">
+                          <a:solidFill>
+                            <a:srgbClr val="7675E6"/>
+                          </a:solidFill>
+                          <a:latin typeface="Calibri" panose="020F0502020204030204" pitchFamily="34" charset="0"/>
+                          <a:cs typeface="Calibri" panose="020F0502020204030204" pitchFamily="34" charset="0"/>
+                        </a:rPr>
+                        <a:t>A</a:t>
+                      </a:r>
+                      <a:endParaRPr lang="en-US" dirty="0">
+                        <a:solidFill>
+                          <a:srgbClr val="7675E6"/>
+                        </a:solidFill>
+                        <a:latin typeface="Calibri" panose="020F0502020204030204" pitchFamily="34" charset="0"/>
+                        <a:cs typeface="Calibri" panose="020F0502020204030204" pitchFamily="34" charset="0"/>
+                      </a:endParaRPr>
+                    </a:p>
+                  </a:txBody>
+                  <a:tcPr anchor="ctr"/>
+                </a:tc>
+                <a:tc>
+                  <a:txBody>
+                    <a:bodyPr/>
+                    <a:lstStyle/>
+                    <a:p>
+                      <a:pPr algn="ctr">
+                        <a:buNone/>
+                      </a:pPr>
+                      <a:r>
+                        <a:rPr lang="en-US" dirty="0">
+                          <a:latin typeface="Calibri" panose="020F0502020204030204" pitchFamily="34" charset="0"/>
+                          <a:cs typeface="Calibri" panose="020F0502020204030204" pitchFamily="34" charset="0"/>
+                        </a:rPr>
+                        <a:t>TT</a:t>
+                      </a:r>
+                      <a:r>
+                        <a:rPr lang="en-US" b="1" dirty="0">
+                          <a:solidFill>
+                            <a:srgbClr val="FF0000"/>
+                          </a:solidFill>
+                          <a:latin typeface="Calibri" panose="020F0502020204030204" pitchFamily="34" charset="0"/>
+                          <a:cs typeface="Calibri" panose="020F0502020204030204" pitchFamily="34" charset="0"/>
+                        </a:rPr>
+                        <a:t>G</a:t>
+                      </a:r>
+                      <a:endParaRPr lang="en-US" b="1" dirty="0">
+                        <a:latin typeface="Calibri" panose="020F0502020204030204" pitchFamily="34" charset="0"/>
+                        <a:cs typeface="Calibri" panose="020F0502020204030204" pitchFamily="34" charset="0"/>
+                      </a:endParaRPr>
+                    </a:p>
+                  </a:txBody>
+                  <a:tcPr anchor="ctr"/>
+                </a:tc>
+                <a:tc>
+                  <a:txBody>
+                    <a:bodyPr/>
+                    <a:lstStyle/>
+                    <a:p>
+                      <a:pPr algn="ctr">
+                        <a:buNone/>
+                      </a:pPr>
+                      <a:r>
+                        <a:rPr lang="en-US" dirty="0">
+                          <a:latin typeface="Calibri" panose="020F0502020204030204" pitchFamily="34" charset="0"/>
+                          <a:cs typeface="Calibri" panose="020F0502020204030204" pitchFamily="34" charset="0"/>
+                        </a:rPr>
+                        <a:t>CAG</a:t>
+                      </a:r>
+                    </a:p>
+                  </a:txBody>
+                  <a:tcPr anchor="ctr"/>
+                </a:tc>
+                <a:tc>
+                  <a:txBody>
+                    <a:bodyPr/>
+                    <a:lstStyle/>
+                    <a:p>
+                      <a:pPr algn="ctr">
+                        <a:buNone/>
+                      </a:pPr>
+                      <a:r>
+                        <a:rPr lang="en-US" dirty="0">
+                          <a:latin typeface="Calibri" panose="020F0502020204030204" pitchFamily="34" charset="0"/>
+                          <a:cs typeface="Calibri" panose="020F0502020204030204" pitchFamily="34" charset="0"/>
+                        </a:rPr>
+                        <a:t>AA</a:t>
+                      </a:r>
+                      <a:r>
+                        <a:rPr lang="en-US" b="1" dirty="0">
+                          <a:solidFill>
+                            <a:srgbClr val="7675E6"/>
+                          </a:solidFill>
+                          <a:latin typeface="Calibri" panose="020F0502020204030204" pitchFamily="34" charset="0"/>
+                          <a:cs typeface="Calibri" panose="020F0502020204030204" pitchFamily="34" charset="0"/>
+                        </a:rPr>
+                        <a:t>- </a:t>
+                      </a:r>
+                    </a:p>
+                  </a:txBody>
+                  <a:tcPr anchor="ctr"/>
+                </a:tc>
+                <a:tc>
+                  <a:txBody>
+                    <a:bodyPr/>
+                    <a:lstStyle/>
+                    <a:p>
+                      <a:pPr algn="ctr">
+                        <a:buNone/>
+                      </a:pPr>
+                      <a:r>
+                        <a:rPr lang="en-US" dirty="0">
+                          <a:latin typeface="Calibri" panose="020F0502020204030204" pitchFamily="34" charset="0"/>
+                          <a:cs typeface="Calibri" panose="020F0502020204030204" pitchFamily="34" charset="0"/>
+                        </a:rPr>
+                        <a:t>GGC</a:t>
+                      </a:r>
+                    </a:p>
+                  </a:txBody>
+                  <a:tcPr anchor="ctr"/>
+                </a:tc>
+                <a:tc>
+                  <a:txBody>
+                    <a:bodyPr/>
+                    <a:lstStyle/>
+                    <a:p>
+                      <a:pPr algn="ctr">
+                        <a:buNone/>
+                      </a:pPr>
+                      <a:r>
+                        <a:rPr lang="en-US" dirty="0">
+                          <a:latin typeface="Calibri" panose="020F0502020204030204" pitchFamily="34" charset="0"/>
+                          <a:cs typeface="Calibri" panose="020F0502020204030204" pitchFamily="34" charset="0"/>
+                        </a:rPr>
+                        <a:t>…</a:t>
+                      </a:r>
+                    </a:p>
+                  </a:txBody>
+                  <a:tcPr anchor="ctr"/>
+                </a:tc>
+                <a:extLst>
+                  <a:ext uri="{0D108BD9-81ED-4DB2-BD59-A6C34878D82A}">
+                    <a16:rowId xmlns:a16="http://schemas.microsoft.com/office/drawing/2014/main" val="335229866"/>
+                  </a:ext>
+                </a:extLst>
+              </a:tr>
+            </a:tbl>
+          </a:graphicData>
+        </a:graphic>
+      </p:graphicFrame>
+      <p:graphicFrame>
+        <p:nvGraphicFramePr>
+          <p:cNvPr id="54" name="Table 53">
+            <a:extLst>
+              <a:ext uri="{FF2B5EF4-FFF2-40B4-BE49-F238E27FC236}">
+                <a16:creationId xmlns:a16="http://schemas.microsoft.com/office/drawing/2014/main" id="{73E84BF2-4255-6CB5-2274-DC2B51D2CBFB}"/>
+              </a:ext>
+            </a:extLst>
+          </p:cNvPr>
+          <p:cNvGraphicFramePr>
+            <a:graphicFrameLocks noGrp="1"/>
+          </p:cNvGraphicFramePr>
+          <p:nvPr>
+            <p:extLst>
+              <p:ext uri="{D42A27DB-BD31-4B8C-83A1-F6EECF244321}">
+                <p14:modId xmlns:p14="http://schemas.microsoft.com/office/powerpoint/2010/main" val="4022610592"/>
+              </p:ext>
+            </p:extLst>
+          </p:nvPr>
+        </p:nvGraphicFramePr>
+        <p:xfrm>
+          <a:off x="2838356" y="4164281"/>
+          <a:ext cx="4302795" cy="365760"/>
+        </p:xfrm>
+        <a:graphic>
+          <a:graphicData uri="http://schemas.openxmlformats.org/drawingml/2006/table">
+            <a:tbl>
+              <a:tblPr>
+                <a:tableStyleId>{3C2FFA5D-87B4-456A-9821-1D502468CF0F}</a:tableStyleId>
+              </a:tblPr>
+              <a:tblGrid>
+                <a:gridCol w="614685">
+                  <a:extLst>
+                    <a:ext uri="{9D8B030D-6E8A-4147-A177-3AD203B41FA5}">
+                      <a16:colId xmlns:a16="http://schemas.microsoft.com/office/drawing/2014/main" val="3526854328"/>
+                    </a:ext>
+                  </a:extLst>
+                </a:gridCol>
+                <a:gridCol w="614685">
+                  <a:extLst>
+                    <a:ext uri="{9D8B030D-6E8A-4147-A177-3AD203B41FA5}">
+                      <a16:colId xmlns:a16="http://schemas.microsoft.com/office/drawing/2014/main" val="3363055171"/>
+                    </a:ext>
+                  </a:extLst>
+                </a:gridCol>
+                <a:gridCol w="614685">
+                  <a:extLst>
+                    <a:ext uri="{9D8B030D-6E8A-4147-A177-3AD203B41FA5}">
+                      <a16:colId xmlns:a16="http://schemas.microsoft.com/office/drawing/2014/main" val="2428403401"/>
+                    </a:ext>
+                  </a:extLst>
+                </a:gridCol>
+                <a:gridCol w="614685">
+                  <a:extLst>
+                    <a:ext uri="{9D8B030D-6E8A-4147-A177-3AD203B41FA5}">
+                      <a16:colId xmlns:a16="http://schemas.microsoft.com/office/drawing/2014/main" val="2747732061"/>
+                    </a:ext>
+                  </a:extLst>
+                </a:gridCol>
+                <a:gridCol w="614685">
+                  <a:extLst>
+                    <a:ext uri="{9D8B030D-6E8A-4147-A177-3AD203B41FA5}">
+                      <a16:colId xmlns:a16="http://schemas.microsoft.com/office/drawing/2014/main" val="1869642782"/>
+                    </a:ext>
+                  </a:extLst>
+                </a:gridCol>
+                <a:gridCol w="614685">
+                  <a:extLst>
+                    <a:ext uri="{9D8B030D-6E8A-4147-A177-3AD203B41FA5}">
+                      <a16:colId xmlns:a16="http://schemas.microsoft.com/office/drawing/2014/main" val="1253564834"/>
+                    </a:ext>
+                  </a:extLst>
+                </a:gridCol>
+                <a:gridCol w="614685">
+                  <a:extLst>
+                    <a:ext uri="{9D8B030D-6E8A-4147-A177-3AD203B41FA5}">
+                      <a16:colId xmlns:a16="http://schemas.microsoft.com/office/drawing/2014/main" val="1967403460"/>
+                    </a:ext>
+                  </a:extLst>
+                </a:gridCol>
+              </a:tblGrid>
+              <a:tr h="243597">
+                <a:tc>
+                  <a:txBody>
+                    <a:bodyPr/>
+                    <a:lstStyle/>
+                    <a:p>
+                      <a:pPr algn="ctr">
+                        <a:buNone/>
+                      </a:pPr>
+                      <a:r>
+                        <a:rPr lang="en-US" dirty="0">
+                          <a:latin typeface="Calibri" panose="020F0502020204030204" pitchFamily="34" charset="0"/>
+                          <a:cs typeface="Calibri" panose="020F0502020204030204" pitchFamily="34" charset="0"/>
+                        </a:rPr>
+                        <a:t>ATG</a:t>
+                      </a:r>
+                    </a:p>
+                  </a:txBody>
+                  <a:tcPr anchor="ctr"/>
+                </a:tc>
+                <a:tc>
+                  <a:txBody>
+                    <a:bodyPr/>
+                    <a:lstStyle/>
+                    <a:p>
+                      <a:pPr algn="ctr">
+                        <a:buNone/>
+                      </a:pPr>
+                      <a:r>
+                        <a:rPr lang="en-US" dirty="0">
+                          <a:latin typeface="Calibri" panose="020F0502020204030204" pitchFamily="34" charset="0"/>
+                          <a:cs typeface="Calibri" panose="020F0502020204030204" pitchFamily="34" charset="0"/>
+                        </a:rPr>
+                        <a:t>GCT</a:t>
+                      </a:r>
+                    </a:p>
+                  </a:txBody>
+                  <a:tcPr anchor="ctr"/>
+                </a:tc>
+                <a:tc>
+                  <a:txBody>
+                    <a:bodyPr/>
+                    <a:lstStyle/>
+                    <a:p>
+                      <a:pPr algn="ctr">
+                        <a:buNone/>
+                      </a:pPr>
+                      <a:r>
+                        <a:rPr lang="en-US" dirty="0">
+                          <a:latin typeface="Calibri" panose="020F0502020204030204" pitchFamily="34" charset="0"/>
+                          <a:cs typeface="Calibri" panose="020F0502020204030204" pitchFamily="34" charset="0"/>
+                        </a:rPr>
+                        <a:t>TT</a:t>
+                      </a:r>
+                      <a:r>
+                        <a:rPr lang="en-US" b="1" dirty="0">
+                          <a:solidFill>
+                            <a:srgbClr val="FF0000"/>
+                          </a:solidFill>
+                          <a:latin typeface="Calibri" panose="020F0502020204030204" pitchFamily="34" charset="0"/>
+                          <a:cs typeface="Calibri" panose="020F0502020204030204" pitchFamily="34" charset="0"/>
+                        </a:rPr>
+                        <a:t>G</a:t>
+                      </a:r>
+                    </a:p>
+                  </a:txBody>
+                  <a:tcPr anchor="ctr"/>
+                </a:tc>
+                <a:tc>
+                  <a:txBody>
+                    <a:bodyPr/>
+                    <a:lstStyle/>
+                    <a:p>
+                      <a:pPr algn="ctr">
+                        <a:buNone/>
+                      </a:pPr>
+                      <a:r>
+                        <a:rPr lang="en-US" dirty="0">
+                          <a:latin typeface="Calibri" panose="020F0502020204030204" pitchFamily="34" charset="0"/>
+                          <a:cs typeface="Calibri" panose="020F0502020204030204" pitchFamily="34" charset="0"/>
+                        </a:rPr>
+                        <a:t>CAG</a:t>
+                      </a:r>
+                    </a:p>
+                  </a:txBody>
+                  <a:tcPr anchor="ctr"/>
+                </a:tc>
+                <a:tc>
+                  <a:txBody>
+                    <a:bodyPr/>
+                    <a:lstStyle/>
+                    <a:p>
+                      <a:pPr algn="ctr">
+                        <a:buNone/>
+                      </a:pPr>
+                      <a:r>
+                        <a:rPr lang="en-US" dirty="0">
+                          <a:latin typeface="Calibri" panose="020F0502020204030204" pitchFamily="34" charset="0"/>
+                          <a:cs typeface="Calibri" panose="020F0502020204030204" pitchFamily="34" charset="0"/>
+                        </a:rPr>
+                        <a:t>AAA</a:t>
+                      </a:r>
+                    </a:p>
+                  </a:txBody>
+                  <a:tcPr anchor="ctr"/>
+                </a:tc>
+                <a:tc>
+                  <a:txBody>
+                    <a:bodyPr/>
+                    <a:lstStyle/>
+                    <a:p>
+                      <a:pPr algn="ctr">
+                        <a:buNone/>
+                      </a:pPr>
+                      <a:r>
+                        <a:rPr lang="en-US" dirty="0">
+                          <a:latin typeface="Calibri" panose="020F0502020204030204" pitchFamily="34" charset="0"/>
+                          <a:cs typeface="Calibri" panose="020F0502020204030204" pitchFamily="34" charset="0"/>
+                        </a:rPr>
+                        <a:t>GGC</a:t>
+                      </a:r>
+                    </a:p>
+                  </a:txBody>
+                  <a:tcPr anchor="ctr"/>
+                </a:tc>
+                <a:tc>
+                  <a:txBody>
+                    <a:bodyPr/>
+                    <a:lstStyle/>
+                    <a:p>
+                      <a:pPr algn="ctr">
+                        <a:buNone/>
+                      </a:pPr>
+                      <a:r>
+                        <a:rPr lang="en-US" dirty="0">
+                          <a:latin typeface="Calibri" panose="020F0502020204030204" pitchFamily="34" charset="0"/>
+                          <a:cs typeface="Calibri" panose="020F0502020204030204" pitchFamily="34" charset="0"/>
+                        </a:rPr>
+                        <a:t>…</a:t>
+                      </a:r>
+                    </a:p>
+                  </a:txBody>
+                  <a:tcPr anchor="ctr"/>
+                </a:tc>
+                <a:extLst>
+                  <a:ext uri="{0D108BD9-81ED-4DB2-BD59-A6C34878D82A}">
+                    <a16:rowId xmlns:a16="http://schemas.microsoft.com/office/drawing/2014/main" val="569080284"/>
+                  </a:ext>
+                </a:extLst>
+              </a:tr>
+            </a:tbl>
+          </a:graphicData>
+        </a:graphic>
+      </p:graphicFrame>
+      <p:sp>
+        <p:nvSpPr>
+          <p:cNvPr id="28" name="Lightning Bolt 27">
+            <a:extLst>
+              <a:ext uri="{FF2B5EF4-FFF2-40B4-BE49-F238E27FC236}">
+                <a16:creationId xmlns:a16="http://schemas.microsoft.com/office/drawing/2014/main" id="{3A776C11-87A9-801C-DD6A-9A7E3606D0E4}"/>
+              </a:ext>
+            </a:extLst>
+          </p:cNvPr>
+          <p:cNvSpPr/>
+          <p:nvPr/>
+        </p:nvSpPr>
+        <p:spPr>
+          <a:xfrm rot="19910345" flipH="1">
+            <a:off x="4297953" y="3663334"/>
+            <a:ext cx="422196" cy="478945"/>
+          </a:xfrm>
+          <a:prstGeom prst="lightningBolt">
+            <a:avLst/>
+          </a:prstGeom>
+          <a:solidFill>
+            <a:srgbClr val="FF7E79"/>
+          </a:solidFill>
+          <a:ln w="12700" cap="flat" cmpd="sng" algn="ctr">
+            <a:solidFill>
+              <a:srgbClr val="FF0000"/>
+            </a:solidFill>
+            <a:prstDash val="solid"/>
+            <a:miter lim="800000"/>
+          </a:ln>
+          <a:effectLst/>
+        </p:spPr>
+        <p:style>
+          <a:lnRef idx="2">
+            <a:schemeClr val="accent1">
+              <a:shade val="50000"/>
+            </a:schemeClr>
+          </a:lnRef>
+          <a:fillRef idx="1">
+            <a:schemeClr val="accent1"/>
+          </a:fillRef>
+          <a:effectRef idx="0">
+            <a:schemeClr val="accent1"/>
+          </a:effectRef>
+          <a:fontRef idx="minor">
+            <a:schemeClr val="lt1"/>
+          </a:fontRef>
+        </p:style>
+        <p:txBody>
+          <a:bodyPr rtlCol="0" anchor="ctr"/>
+          <a:lstStyle/>
+          <a:p>
+            <a:pPr algn="ctr"/>
+            <a:endParaRPr lang="en-US" dirty="0">
+              <a:latin typeface="Calibri" panose="020F0502020204030204" pitchFamily="34" charset="0"/>
+              <a:cs typeface="Calibri" panose="020F0502020204030204" pitchFamily="34" charset="0"/>
+            </a:endParaRPr>
+          </a:p>
+        </p:txBody>
+      </p:sp>
+      <p:grpSp>
+        <p:nvGrpSpPr>
+          <p:cNvPr id="64" name="Group 63">
+            <a:extLst>
+              <a:ext uri="{FF2B5EF4-FFF2-40B4-BE49-F238E27FC236}">
+                <a16:creationId xmlns:a16="http://schemas.microsoft.com/office/drawing/2014/main" id="{DD4935DD-4F3C-B844-46BF-01A029E58CF7}"/>
+              </a:ext>
+            </a:extLst>
+          </p:cNvPr>
+          <p:cNvGrpSpPr/>
+          <p:nvPr/>
+        </p:nvGrpSpPr>
+        <p:grpSpPr>
+          <a:xfrm>
+            <a:off x="2077653" y="5951621"/>
+            <a:ext cx="2813233" cy="369332"/>
+            <a:chOff x="2077653" y="5951621"/>
+            <a:chExt cx="2813233" cy="369332"/>
+          </a:xfrm>
+        </p:grpSpPr>
+        <p:sp>
+          <p:nvSpPr>
+            <p:cNvPr id="60" name="TextBox 59">
+              <a:extLst>
+                <a:ext uri="{FF2B5EF4-FFF2-40B4-BE49-F238E27FC236}">
+                  <a16:creationId xmlns:a16="http://schemas.microsoft.com/office/drawing/2014/main" id="{8F39D66A-6F33-E7C3-FD7B-03E79148A817}"/>
+                </a:ext>
+              </a:extLst>
+            </p:cNvPr>
+            <p:cNvSpPr txBox="1"/>
+            <p:nvPr/>
+          </p:nvSpPr>
+          <p:spPr>
+            <a:xfrm>
+              <a:off x="4509050" y="5951621"/>
+              <a:ext cx="381836" cy="369332"/>
+            </a:xfrm>
+            <a:prstGeom prst="rect">
+              <a:avLst/>
+            </a:prstGeom>
+            <a:noFill/>
+          </p:spPr>
+          <p:txBody>
+            <a:bodyPr wrap="none" rtlCol="0">
+              <a:spAutoFit/>
+            </a:bodyPr>
+            <a:lstStyle/>
+            <a:p>
+              <a:r>
+                <a:rPr lang="en-US" dirty="0"/>
+                <a:t>…</a:t>
+              </a:r>
+            </a:p>
+          </p:txBody>
+        </p:sp>
+        <p:sp>
+          <p:nvSpPr>
+            <p:cNvPr id="61" name="TextBox 60">
+              <a:extLst>
+                <a:ext uri="{FF2B5EF4-FFF2-40B4-BE49-F238E27FC236}">
+                  <a16:creationId xmlns:a16="http://schemas.microsoft.com/office/drawing/2014/main" id="{EE09D964-FC59-B282-ABB3-7CE9A63D772E}"/>
+                </a:ext>
+              </a:extLst>
+            </p:cNvPr>
+            <p:cNvSpPr txBox="1"/>
+            <p:nvPr/>
+          </p:nvSpPr>
+          <p:spPr>
+            <a:xfrm>
+              <a:off x="2077653" y="5951621"/>
+              <a:ext cx="381836" cy="369332"/>
+            </a:xfrm>
+            <a:prstGeom prst="rect">
+              <a:avLst/>
+            </a:prstGeom>
+            <a:noFill/>
+          </p:spPr>
+          <p:txBody>
+            <a:bodyPr wrap="none" rtlCol="0">
+              <a:spAutoFit/>
+            </a:bodyPr>
+            <a:lstStyle/>
+            <a:p>
+              <a:r>
+                <a:rPr lang="en-US" dirty="0"/>
+                <a:t>…</a:t>
+              </a:r>
+            </a:p>
+          </p:txBody>
+        </p:sp>
+      </p:grpSp>
+      <p:grpSp>
+        <p:nvGrpSpPr>
+          <p:cNvPr id="65" name="Group 64">
+            <a:extLst>
+              <a:ext uri="{FF2B5EF4-FFF2-40B4-BE49-F238E27FC236}">
+                <a16:creationId xmlns:a16="http://schemas.microsoft.com/office/drawing/2014/main" id="{7BEF4BA0-1467-282D-1DC1-83822AF2CA64}"/>
+              </a:ext>
+            </a:extLst>
+          </p:cNvPr>
+          <p:cNvGrpSpPr/>
+          <p:nvPr/>
+        </p:nvGrpSpPr>
+        <p:grpSpPr>
+          <a:xfrm>
+            <a:off x="2077653" y="2565293"/>
+            <a:ext cx="2813233" cy="369332"/>
+            <a:chOff x="2077653" y="5951621"/>
+            <a:chExt cx="2813233" cy="369332"/>
+          </a:xfrm>
+        </p:grpSpPr>
+        <p:sp>
+          <p:nvSpPr>
+            <p:cNvPr id="66" name="TextBox 65">
+              <a:extLst>
+                <a:ext uri="{FF2B5EF4-FFF2-40B4-BE49-F238E27FC236}">
+                  <a16:creationId xmlns:a16="http://schemas.microsoft.com/office/drawing/2014/main" id="{2EB32575-7F7A-6238-159A-A8B2CA8F42F4}"/>
+                </a:ext>
+              </a:extLst>
+            </p:cNvPr>
+            <p:cNvSpPr txBox="1"/>
+            <p:nvPr/>
+          </p:nvSpPr>
+          <p:spPr>
+            <a:xfrm>
+              <a:off x="4509050" y="5951621"/>
+              <a:ext cx="381836" cy="369332"/>
+            </a:xfrm>
+            <a:prstGeom prst="rect">
+              <a:avLst/>
+            </a:prstGeom>
+            <a:noFill/>
+          </p:spPr>
+          <p:txBody>
+            <a:bodyPr wrap="none" rtlCol="0">
+              <a:spAutoFit/>
+            </a:bodyPr>
+            <a:lstStyle/>
+            <a:p>
+              <a:r>
+                <a:rPr lang="en-US" dirty="0"/>
+                <a:t>…</a:t>
+              </a:r>
+            </a:p>
+          </p:txBody>
+        </p:sp>
+        <p:sp>
+          <p:nvSpPr>
+            <p:cNvPr id="67" name="TextBox 66">
+              <a:extLst>
+                <a:ext uri="{FF2B5EF4-FFF2-40B4-BE49-F238E27FC236}">
+                  <a16:creationId xmlns:a16="http://schemas.microsoft.com/office/drawing/2014/main" id="{3B772855-D8A1-5017-C213-01BEF005187B}"/>
+                </a:ext>
+              </a:extLst>
+            </p:cNvPr>
+            <p:cNvSpPr txBox="1"/>
+            <p:nvPr/>
+          </p:nvSpPr>
+          <p:spPr>
+            <a:xfrm>
+              <a:off x="2077653" y="5951621"/>
+              <a:ext cx="381836" cy="369332"/>
+            </a:xfrm>
+            <a:prstGeom prst="rect">
+              <a:avLst/>
+            </a:prstGeom>
+            <a:noFill/>
+          </p:spPr>
+          <p:txBody>
+            <a:bodyPr wrap="none" rtlCol="0">
+              <a:spAutoFit/>
+            </a:bodyPr>
+            <a:lstStyle/>
+            <a:p>
+              <a:r>
+                <a:rPr lang="en-US" dirty="0"/>
+                <a:t>…</a:t>
+              </a:r>
+            </a:p>
+          </p:txBody>
+        </p:sp>
+      </p:grpSp>
+    </p:spTree>
+    <p:extLst>
+      <p:ext uri="{BB962C8B-B14F-4D97-AF65-F5344CB8AC3E}">
+        <p14:creationId xmlns:p14="http://schemas.microsoft.com/office/powerpoint/2010/main" val="1939166179"/>
+      </p:ext>
+    </p:extLst>
+  </p:cSld>
+  <p:clrMapOvr>
+    <a:masterClrMapping/>
+  </p:clrMapOvr>
+</p:sld>
+</file>
+
+<file path=ppt/slides/slide3.xml><?xml version="1.0" encoding="utf-8"?>
+<p:sld xmlns:a="http://schemas.openxmlformats.org/drawingml/2006/main" xmlns:r="http://schemas.openxmlformats.org/officeDocument/2006/relationships" xmlns:p="http://schemas.openxmlformats.org/presentationml/2006/main">
+  <p:cSld>
+    <p:spTree>
+      <p:nvGrpSpPr>
+        <p:cNvPr id="1" name=""/>
+        <p:cNvGrpSpPr/>
+        <p:nvPr/>
+      </p:nvGrpSpPr>
+      <p:grpSpPr>
+        <a:xfrm>
+          <a:off x="0" y="0"/>
+          <a:ext cx="0" cy="0"/>
+          <a:chOff x="0" y="0"/>
+          <a:chExt cx="0" cy="0"/>
+        </a:xfrm>
+      </p:grpSpPr>
+      <p:sp>
+        <p:nvSpPr>
+          <p:cNvPr id="36" name="Lightning Bolt 35">
+            <a:extLst>
+              <a:ext uri="{FF2B5EF4-FFF2-40B4-BE49-F238E27FC236}">
+                <a16:creationId xmlns:a16="http://schemas.microsoft.com/office/drawing/2014/main" id="{4D3DDBE4-5415-10C1-7674-F3B1D0E410CA}"/>
+              </a:ext>
+            </a:extLst>
+          </p:cNvPr>
+          <p:cNvSpPr/>
+          <p:nvPr/>
+        </p:nvSpPr>
+        <p:spPr>
+          <a:xfrm rot="19910345" flipH="1">
+            <a:off x="2068210" y="2956409"/>
+            <a:ext cx="251025" cy="244976"/>
+          </a:xfrm>
+          <a:prstGeom prst="lightningBolt">
+            <a:avLst/>
+          </a:prstGeom>
+          <a:solidFill>
+            <a:srgbClr val="FF7E79"/>
+          </a:solidFill>
+          <a:ln w="12700" cap="flat" cmpd="sng" algn="ctr">
+            <a:solidFill>
+              <a:srgbClr val="FF0000"/>
+            </a:solidFill>
+            <a:prstDash val="solid"/>
+            <a:miter lim="800000"/>
+          </a:ln>
+          <a:effectLst/>
+        </p:spPr>
+        <p:style>
+          <a:lnRef idx="2">
+            <a:schemeClr val="accent1">
+              <a:shade val="50000"/>
+            </a:schemeClr>
+          </a:lnRef>
+          <a:fillRef idx="1">
+            <a:schemeClr val="accent1"/>
+          </a:fillRef>
+          <a:effectRef idx="0">
+            <a:schemeClr val="accent1"/>
+          </a:effectRef>
+          <a:fontRef idx="minor">
+            <a:schemeClr val="lt1"/>
+          </a:fontRef>
+        </p:style>
+        <p:txBody>
+          <a:bodyPr rtlCol="0" anchor="ctr"/>
+          <a:lstStyle/>
+          <a:p>
+            <a:pPr algn="ctr"/>
+            <a:endParaRPr lang="en-US" dirty="0">
+              <a:latin typeface="Calibri" panose="020F0502020204030204" pitchFamily="34" charset="0"/>
+              <a:cs typeface="Calibri" panose="020F0502020204030204" pitchFamily="34" charset="0"/>
+            </a:endParaRPr>
+          </a:p>
+        </p:txBody>
+      </p:sp>
+      <p:sp>
+        <p:nvSpPr>
+          <p:cNvPr id="33" name="Triangle 32">
+            <a:extLst>
+              <a:ext uri="{FF2B5EF4-FFF2-40B4-BE49-F238E27FC236}">
+                <a16:creationId xmlns:a16="http://schemas.microsoft.com/office/drawing/2014/main" id="{917FFB64-1E0F-0306-65AF-3A859A1AB54B}"/>
+              </a:ext>
+            </a:extLst>
+          </p:cNvPr>
+          <p:cNvSpPr/>
+          <p:nvPr/>
+        </p:nvSpPr>
+        <p:spPr>
+          <a:xfrm rot="10800000">
+            <a:off x="8592452" y="3757958"/>
+            <a:ext cx="3478340" cy="493256"/>
+          </a:xfrm>
+          <a:prstGeom prst="triangle">
+            <a:avLst/>
+          </a:prstGeom>
+          <a:gradFill flip="none" rotWithShape="1">
+            <a:gsLst>
+              <a:gs pos="0">
+                <a:schemeClr val="accent2">
+                  <a:tint val="66000"/>
+                  <a:satMod val="160000"/>
+                </a:schemeClr>
+              </a:gs>
+              <a:gs pos="50000">
+                <a:schemeClr val="accent2">
+                  <a:tint val="44500"/>
+                  <a:satMod val="160000"/>
+                </a:schemeClr>
+              </a:gs>
+              <a:gs pos="100000">
+                <a:schemeClr val="accent2">
+                  <a:tint val="23500"/>
+                  <a:satMod val="160000"/>
+                </a:schemeClr>
+              </a:gs>
+            </a:gsLst>
+            <a:lin ang="5400000" scaled="1"/>
+            <a:tileRect/>
+          </a:gradFill>
+          <a:ln>
+            <a:noFill/>
+          </a:ln>
+        </p:spPr>
+        <p:style>
+          <a:lnRef idx="2">
+            <a:schemeClr val="accent6"/>
+          </a:lnRef>
+          <a:fillRef idx="1">
+            <a:schemeClr val="lt1"/>
+          </a:fillRef>
+          <a:effectRef idx="0">
+            <a:schemeClr val="accent6"/>
+          </a:effectRef>
+          <a:fontRef idx="minor">
+            <a:schemeClr val="dk1"/>
+          </a:fontRef>
+        </p:style>
+        <p:txBody>
+          <a:bodyPr rtlCol="0" anchor="ctr"/>
+          <a:lstStyle/>
+          <a:p>
+            <a:pPr algn="ctr"/>
+            <a:endParaRPr lang="en-US"/>
+          </a:p>
+        </p:txBody>
+      </p:sp>
+      <p:grpSp>
+        <p:nvGrpSpPr>
+          <p:cNvPr id="13" name="Group 12">
+            <a:extLst>
+              <a:ext uri="{FF2B5EF4-FFF2-40B4-BE49-F238E27FC236}">
+                <a16:creationId xmlns:a16="http://schemas.microsoft.com/office/drawing/2014/main" id="{1AE070BD-A189-879F-0279-18C719B55654}"/>
+              </a:ext>
+            </a:extLst>
+          </p:cNvPr>
+          <p:cNvGrpSpPr/>
+          <p:nvPr/>
+        </p:nvGrpSpPr>
+        <p:grpSpPr>
+          <a:xfrm>
+            <a:off x="8621314" y="3310156"/>
+            <a:ext cx="3478340" cy="237688"/>
+            <a:chOff x="2113613" y="2383437"/>
+            <a:chExt cx="5850173" cy="464695"/>
+          </a:xfrm>
+        </p:grpSpPr>
+        <p:cxnSp>
+          <p:nvCxnSpPr>
+            <p:cNvPr id="6" name="Straight Arrow Connector 5">
+              <a:extLst>
+                <a:ext uri="{FF2B5EF4-FFF2-40B4-BE49-F238E27FC236}">
+                  <a16:creationId xmlns:a16="http://schemas.microsoft.com/office/drawing/2014/main" id="{5F0334AF-9185-CD69-55C1-A07EE031D43C}"/>
+                </a:ext>
+              </a:extLst>
+            </p:cNvPr>
+            <p:cNvCxnSpPr>
+              <a:cxnSpLocks/>
+            </p:cNvCxnSpPr>
+            <p:nvPr/>
+          </p:nvCxnSpPr>
+          <p:spPr>
+            <a:xfrm>
+              <a:off x="2113613" y="2615784"/>
+              <a:ext cx="5850173" cy="0"/>
+            </a:xfrm>
+            <a:prstGeom prst="straightConnector1">
+              <a:avLst/>
+            </a:prstGeom>
+            <a:ln>
+              <a:tailEnd type="triangle"/>
+            </a:ln>
+          </p:spPr>
+          <p:style>
+            <a:lnRef idx="2">
+              <a:schemeClr val="dk1"/>
+            </a:lnRef>
+            <a:fillRef idx="0">
+              <a:schemeClr val="dk1"/>
+            </a:fillRef>
+            <a:effectRef idx="1">
+              <a:schemeClr val="dk1"/>
+            </a:effectRef>
+            <a:fontRef idx="minor">
+              <a:schemeClr val="tx1"/>
+            </a:fontRef>
+          </p:style>
+        </p:cxnSp>
+        <p:sp>
+          <p:nvSpPr>
+            <p:cNvPr id="4" name="Rectangle 3">
+              <a:extLst>
+                <a:ext uri="{FF2B5EF4-FFF2-40B4-BE49-F238E27FC236}">
+                  <a16:creationId xmlns:a16="http://schemas.microsoft.com/office/drawing/2014/main" id="{81FAB377-7A83-22C4-8DD1-45BA35369318}"/>
+                </a:ext>
+              </a:extLst>
+            </p:cNvPr>
+            <p:cNvSpPr/>
+            <p:nvPr/>
+          </p:nvSpPr>
+          <p:spPr>
+            <a:xfrm>
+              <a:off x="2878113" y="2383437"/>
+              <a:ext cx="1321748" cy="464695"/>
+            </a:xfrm>
+            <a:prstGeom prst="rect">
+              <a:avLst/>
+            </a:prstGeom>
+          </p:spPr>
+          <p:style>
+            <a:lnRef idx="2">
+              <a:schemeClr val="accent6">
+                <a:shade val="15000"/>
+              </a:schemeClr>
+            </a:lnRef>
+            <a:fillRef idx="1">
+              <a:schemeClr val="accent6"/>
+            </a:fillRef>
+            <a:effectRef idx="0">
+              <a:schemeClr val="accent6"/>
+            </a:effectRef>
+            <a:fontRef idx="minor">
+              <a:schemeClr val="lt1"/>
+            </a:fontRef>
+          </p:style>
+          <p:txBody>
+            <a:bodyPr rtlCol="0" anchor="ctr"/>
+            <a:lstStyle/>
+            <a:p>
+              <a:pPr algn="ctr"/>
+              <a:endParaRPr lang="en-US"/>
+            </a:p>
+          </p:txBody>
+        </p:sp>
+        <p:sp>
+          <p:nvSpPr>
+            <p:cNvPr id="8" name="Rectangle 7">
+              <a:extLst>
+                <a:ext uri="{FF2B5EF4-FFF2-40B4-BE49-F238E27FC236}">
+                  <a16:creationId xmlns:a16="http://schemas.microsoft.com/office/drawing/2014/main" id="{D5699CA9-A539-C2AA-48CF-B9E23A5348D8}"/>
+                </a:ext>
+              </a:extLst>
+            </p:cNvPr>
+            <p:cNvSpPr/>
+            <p:nvPr/>
+          </p:nvSpPr>
+          <p:spPr>
+            <a:xfrm>
+              <a:off x="4667927" y="2383437"/>
+              <a:ext cx="712147" cy="464695"/>
+            </a:xfrm>
+            <a:prstGeom prst="rect">
+              <a:avLst/>
+            </a:prstGeom>
+          </p:spPr>
+          <p:style>
+            <a:lnRef idx="2">
+              <a:schemeClr val="accent3">
+                <a:shade val="15000"/>
+              </a:schemeClr>
+            </a:lnRef>
+            <a:fillRef idx="1">
+              <a:schemeClr val="accent3"/>
+            </a:fillRef>
+            <a:effectRef idx="0">
+              <a:schemeClr val="accent3"/>
+            </a:effectRef>
+            <a:fontRef idx="minor">
+              <a:schemeClr val="lt1"/>
+            </a:fontRef>
+          </p:style>
+          <p:txBody>
+            <a:bodyPr rtlCol="0" anchor="ctr"/>
+            <a:lstStyle/>
+            <a:p>
+              <a:pPr algn="ctr"/>
+              <a:endParaRPr lang="en-US"/>
+            </a:p>
+          </p:txBody>
+        </p:sp>
+        <p:sp>
+          <p:nvSpPr>
+            <p:cNvPr id="11" name="Rectangle 10">
+              <a:extLst>
+                <a:ext uri="{FF2B5EF4-FFF2-40B4-BE49-F238E27FC236}">
+                  <a16:creationId xmlns:a16="http://schemas.microsoft.com/office/drawing/2014/main" id="{180C0360-EE76-749D-49BE-9771C44E7007}"/>
+                </a:ext>
+              </a:extLst>
+            </p:cNvPr>
+            <p:cNvSpPr/>
+            <p:nvPr/>
+          </p:nvSpPr>
+          <p:spPr>
+            <a:xfrm>
+              <a:off x="6326606" y="2383437"/>
+              <a:ext cx="1321748" cy="464695"/>
+            </a:xfrm>
+            <a:prstGeom prst="rect">
+              <a:avLst/>
+            </a:prstGeom>
+          </p:spPr>
+          <p:style>
+            <a:lnRef idx="2">
+              <a:schemeClr val="accent1">
+                <a:shade val="15000"/>
+              </a:schemeClr>
+            </a:lnRef>
+            <a:fillRef idx="1">
+              <a:schemeClr val="accent1"/>
+            </a:fillRef>
+            <a:effectRef idx="0">
+              <a:schemeClr val="accent1"/>
+            </a:effectRef>
+            <a:fontRef idx="minor">
+              <a:schemeClr val="lt1"/>
+            </a:fontRef>
+          </p:style>
+          <p:txBody>
+            <a:bodyPr rtlCol="0" anchor="ctr"/>
+            <a:lstStyle/>
+            <a:p>
+              <a:pPr algn="ctr"/>
+              <a:endParaRPr lang="en-US"/>
+            </a:p>
+          </p:txBody>
+        </p:sp>
+      </p:grpSp>
+      <p:sp>
+        <p:nvSpPr>
+          <p:cNvPr id="12" name="TextBox 11">
+            <a:extLst>
+              <a:ext uri="{FF2B5EF4-FFF2-40B4-BE49-F238E27FC236}">
+                <a16:creationId xmlns:a16="http://schemas.microsoft.com/office/drawing/2014/main" id="{53D9FE33-C304-DD02-9C0B-928BCE15E6F7}"/>
+              </a:ext>
+            </a:extLst>
+          </p:cNvPr>
+          <p:cNvSpPr txBox="1"/>
+          <p:nvPr/>
+        </p:nvSpPr>
+        <p:spPr>
+          <a:xfrm>
+            <a:off x="8420356" y="2443881"/>
+            <a:ext cx="2250788" cy="369332"/>
+          </a:xfrm>
+          <a:prstGeom prst="rect">
+            <a:avLst/>
+          </a:prstGeom>
+          <a:noFill/>
+        </p:spPr>
+        <p:txBody>
+          <a:bodyPr wrap="square" rtlCol="0">
+            <a:spAutoFit/>
+          </a:bodyPr>
+          <a:lstStyle/>
+          <a:p>
+            <a:r>
+              <a:rPr lang="en-US" dirty="0">
+                <a:latin typeface="Calibri" panose="020F0502020204030204" pitchFamily="34" charset="0"/>
+                <a:cs typeface="Calibri" panose="020F0502020204030204" pitchFamily="34" charset="0"/>
+              </a:rPr>
+              <a:t>Splicing Variants</a:t>
+            </a:r>
+          </a:p>
+        </p:txBody>
+      </p:sp>
+      <p:grpSp>
+        <p:nvGrpSpPr>
+          <p:cNvPr id="19" name="Group 18">
+            <a:extLst>
+              <a:ext uri="{FF2B5EF4-FFF2-40B4-BE49-F238E27FC236}">
+                <a16:creationId xmlns:a16="http://schemas.microsoft.com/office/drawing/2014/main" id="{7A0A27E6-33B4-4414-89CF-6BC1BF6B13B9}"/>
+              </a:ext>
+            </a:extLst>
+          </p:cNvPr>
+          <p:cNvGrpSpPr/>
+          <p:nvPr/>
+        </p:nvGrpSpPr>
+        <p:grpSpPr>
+          <a:xfrm>
+            <a:off x="9541379" y="4254901"/>
+            <a:ext cx="1580485" cy="237688"/>
+            <a:chOff x="2878113" y="2383437"/>
+            <a:chExt cx="2658196" cy="464695"/>
+          </a:xfrm>
+        </p:grpSpPr>
+        <p:sp>
+          <p:nvSpPr>
+            <p:cNvPr id="21" name="Rectangle 20">
+              <a:extLst>
+                <a:ext uri="{FF2B5EF4-FFF2-40B4-BE49-F238E27FC236}">
+                  <a16:creationId xmlns:a16="http://schemas.microsoft.com/office/drawing/2014/main" id="{1FEE3E9D-EEDF-C9CF-E4F2-1DEDE26A6E0B}"/>
+                </a:ext>
+              </a:extLst>
+            </p:cNvPr>
+            <p:cNvSpPr/>
+            <p:nvPr/>
+          </p:nvSpPr>
+          <p:spPr>
+            <a:xfrm>
+              <a:off x="2878113" y="2383437"/>
+              <a:ext cx="1321748" cy="464695"/>
+            </a:xfrm>
+            <a:prstGeom prst="rect">
+              <a:avLst/>
+            </a:prstGeom>
+          </p:spPr>
+          <p:style>
+            <a:lnRef idx="2">
+              <a:schemeClr val="accent6">
+                <a:shade val="15000"/>
+              </a:schemeClr>
+            </a:lnRef>
+            <a:fillRef idx="1">
+              <a:schemeClr val="accent6"/>
+            </a:fillRef>
+            <a:effectRef idx="0">
+              <a:schemeClr val="accent6"/>
+            </a:effectRef>
+            <a:fontRef idx="minor">
+              <a:schemeClr val="lt1"/>
+            </a:fontRef>
+          </p:style>
+          <p:txBody>
+            <a:bodyPr rtlCol="0" anchor="ctr"/>
+            <a:lstStyle/>
+            <a:p>
+              <a:pPr algn="ctr"/>
+              <a:endParaRPr lang="en-US"/>
+            </a:p>
+          </p:txBody>
+        </p:sp>
+        <p:sp>
+          <p:nvSpPr>
+            <p:cNvPr id="23" name="Rectangle 22">
+              <a:extLst>
+                <a:ext uri="{FF2B5EF4-FFF2-40B4-BE49-F238E27FC236}">
+                  <a16:creationId xmlns:a16="http://schemas.microsoft.com/office/drawing/2014/main" id="{CB3E133C-F782-F611-F0DD-FC92691A2496}"/>
+                </a:ext>
+              </a:extLst>
+            </p:cNvPr>
+            <p:cNvSpPr/>
+            <p:nvPr/>
+          </p:nvSpPr>
+          <p:spPr>
+            <a:xfrm>
+              <a:off x="4214561" y="2383437"/>
+              <a:ext cx="1321748" cy="464695"/>
+            </a:xfrm>
+            <a:prstGeom prst="rect">
+              <a:avLst/>
+            </a:prstGeom>
+          </p:spPr>
+          <p:style>
+            <a:lnRef idx="2">
+              <a:schemeClr val="accent1">
+                <a:shade val="15000"/>
+              </a:schemeClr>
+            </a:lnRef>
+            <a:fillRef idx="1">
+              <a:schemeClr val="accent1"/>
+            </a:fillRef>
+            <a:effectRef idx="0">
+              <a:schemeClr val="accent1"/>
+            </a:effectRef>
+            <a:fontRef idx="minor">
+              <a:schemeClr val="lt1"/>
+            </a:fontRef>
+          </p:style>
+          <p:txBody>
+            <a:bodyPr rtlCol="0" anchor="ctr"/>
+            <a:lstStyle/>
+            <a:p>
+              <a:pPr algn="ctr"/>
+              <a:endParaRPr lang="en-US"/>
+            </a:p>
+          </p:txBody>
+        </p:sp>
+      </p:grpSp>
+      <p:sp>
+        <p:nvSpPr>
+          <p:cNvPr id="26" name="TextBox 25">
+            <a:extLst>
+              <a:ext uri="{FF2B5EF4-FFF2-40B4-BE49-F238E27FC236}">
+                <a16:creationId xmlns:a16="http://schemas.microsoft.com/office/drawing/2014/main" id="{FE339DAE-C284-B473-976C-C478831D802C}"/>
+              </a:ext>
+            </a:extLst>
+          </p:cNvPr>
+          <p:cNvSpPr txBox="1"/>
+          <p:nvPr/>
+        </p:nvSpPr>
+        <p:spPr>
+          <a:xfrm>
+            <a:off x="9246829" y="3573293"/>
+            <a:ext cx="352502" cy="369332"/>
+          </a:xfrm>
+          <a:prstGeom prst="rect">
+            <a:avLst/>
+          </a:prstGeom>
+          <a:noFill/>
+        </p:spPr>
+        <p:txBody>
+          <a:bodyPr wrap="square">
+            <a:spAutoFit/>
+          </a:bodyPr>
+          <a:lstStyle/>
+          <a:p>
+            <a:pPr algn="ctr"/>
+            <a:r>
+              <a:rPr lang="en-US" b="0" i="0" dirty="0">
+                <a:solidFill>
+                  <a:srgbClr val="474747"/>
+                </a:solidFill>
+                <a:effectLst/>
+                <a:latin typeface="Google Sans"/>
+              </a:rPr>
+              <a:t>✅</a:t>
+            </a:r>
+            <a:endParaRPr lang="en-US" dirty="0"/>
+          </a:p>
+        </p:txBody>
+      </p:sp>
+      <p:sp>
+        <p:nvSpPr>
+          <p:cNvPr id="27" name="TextBox 26">
+            <a:extLst>
+              <a:ext uri="{FF2B5EF4-FFF2-40B4-BE49-F238E27FC236}">
+                <a16:creationId xmlns:a16="http://schemas.microsoft.com/office/drawing/2014/main" id="{1614F424-BA31-1796-EA76-D1965CA29F20}"/>
+              </a:ext>
+            </a:extLst>
+          </p:cNvPr>
+          <p:cNvSpPr txBox="1"/>
+          <p:nvPr/>
+        </p:nvSpPr>
+        <p:spPr>
+          <a:xfrm>
+            <a:off x="11385324" y="3566893"/>
+            <a:ext cx="352502" cy="369332"/>
+          </a:xfrm>
+          <a:prstGeom prst="rect">
+            <a:avLst/>
+          </a:prstGeom>
+          <a:noFill/>
+        </p:spPr>
+        <p:txBody>
+          <a:bodyPr wrap="square">
+            <a:spAutoFit/>
+          </a:bodyPr>
+          <a:lstStyle/>
+          <a:p>
+            <a:pPr algn="ctr"/>
+            <a:r>
+              <a:rPr lang="en-US" b="0" i="0" dirty="0">
+                <a:solidFill>
+                  <a:srgbClr val="474747"/>
+                </a:solidFill>
+                <a:effectLst/>
+                <a:latin typeface="Google Sans"/>
+              </a:rPr>
+              <a:t>✅</a:t>
+            </a:r>
+            <a:endParaRPr lang="en-US" dirty="0"/>
+          </a:p>
+        </p:txBody>
+      </p:sp>
+      <p:sp>
+        <p:nvSpPr>
+          <p:cNvPr id="29" name="TextBox 28">
+            <a:extLst>
+              <a:ext uri="{FF2B5EF4-FFF2-40B4-BE49-F238E27FC236}">
+                <a16:creationId xmlns:a16="http://schemas.microsoft.com/office/drawing/2014/main" id="{CF25D73A-2C01-B84A-0EA4-83AF05888A55}"/>
+              </a:ext>
+            </a:extLst>
+          </p:cNvPr>
+          <p:cNvSpPr txBox="1"/>
+          <p:nvPr/>
+        </p:nvSpPr>
+        <p:spPr>
+          <a:xfrm>
+            <a:off x="10179864" y="3573292"/>
+            <a:ext cx="352501" cy="369332"/>
+          </a:xfrm>
+          <a:prstGeom prst="rect">
+            <a:avLst/>
+          </a:prstGeom>
+          <a:noFill/>
+        </p:spPr>
+        <p:txBody>
+          <a:bodyPr wrap="square">
+            <a:spAutoFit/>
+          </a:bodyPr>
+          <a:lstStyle/>
+          <a:p>
+            <a:pPr algn="ctr"/>
+            <a:r>
+              <a:rPr lang="en-US" dirty="0"/>
+              <a:t>❌</a:t>
+            </a:r>
+          </a:p>
+        </p:txBody>
+      </p:sp>
+      <p:sp>
+        <p:nvSpPr>
+          <p:cNvPr id="30" name="Lightning Bolt 29">
+            <a:extLst>
+              <a:ext uri="{FF2B5EF4-FFF2-40B4-BE49-F238E27FC236}">
+                <a16:creationId xmlns:a16="http://schemas.microsoft.com/office/drawing/2014/main" id="{05AECE9C-E88F-689E-4925-5131B76FE277}"/>
+              </a:ext>
+            </a:extLst>
+          </p:cNvPr>
+          <p:cNvSpPr/>
+          <p:nvPr/>
+        </p:nvSpPr>
+        <p:spPr>
+          <a:xfrm rot="19910345" flipH="1">
+            <a:off x="10074992" y="2994995"/>
+            <a:ext cx="251025" cy="244976"/>
+          </a:xfrm>
+          <a:prstGeom prst="lightningBolt">
+            <a:avLst/>
+          </a:prstGeom>
+          <a:solidFill>
+            <a:srgbClr val="FF7E79"/>
+          </a:solidFill>
+          <a:ln w="12700" cap="flat" cmpd="sng" algn="ctr">
+            <a:solidFill>
+              <a:srgbClr val="FF0000"/>
+            </a:solidFill>
+            <a:prstDash val="solid"/>
+            <a:miter lim="800000"/>
+          </a:ln>
+          <a:effectLst/>
+        </p:spPr>
+        <p:style>
+          <a:lnRef idx="2">
+            <a:schemeClr val="accent1">
+              <a:shade val="50000"/>
+            </a:schemeClr>
+          </a:lnRef>
+          <a:fillRef idx="1">
+            <a:schemeClr val="accent1"/>
+          </a:fillRef>
+          <a:effectRef idx="0">
+            <a:schemeClr val="accent1"/>
+          </a:effectRef>
+          <a:fontRef idx="minor">
+            <a:schemeClr val="lt1"/>
+          </a:fontRef>
+        </p:style>
+        <p:txBody>
+          <a:bodyPr rtlCol="0" anchor="ctr"/>
+          <a:lstStyle/>
+          <a:p>
+            <a:pPr algn="ctr"/>
+            <a:endParaRPr lang="en-US" dirty="0">
+              <a:latin typeface="Calibri" panose="020F0502020204030204" pitchFamily="34" charset="0"/>
+              <a:cs typeface="Calibri" panose="020F0502020204030204" pitchFamily="34" charset="0"/>
+            </a:endParaRPr>
+          </a:p>
+        </p:txBody>
+      </p:sp>
+      <p:sp>
+        <p:nvSpPr>
+          <p:cNvPr id="32" name="TextBox 31">
+            <a:extLst>
+              <a:ext uri="{FF2B5EF4-FFF2-40B4-BE49-F238E27FC236}">
+                <a16:creationId xmlns:a16="http://schemas.microsoft.com/office/drawing/2014/main" id="{A71CD91A-43D8-7911-074B-311380B5A5BB}"/>
+              </a:ext>
+            </a:extLst>
+          </p:cNvPr>
+          <p:cNvSpPr txBox="1"/>
+          <p:nvPr/>
+        </p:nvSpPr>
+        <p:spPr>
+          <a:xfrm>
+            <a:off x="482309" y="2443881"/>
+            <a:ext cx="2250788" cy="369332"/>
+          </a:xfrm>
+          <a:prstGeom prst="rect">
+            <a:avLst/>
+          </a:prstGeom>
+          <a:noFill/>
+        </p:spPr>
+        <p:txBody>
+          <a:bodyPr wrap="square" rtlCol="0">
+            <a:spAutoFit/>
+          </a:bodyPr>
+          <a:lstStyle/>
+          <a:p>
+            <a:r>
+              <a:rPr lang="en-US" b="1" dirty="0">
+                <a:latin typeface="Calibri" panose="020F0502020204030204" pitchFamily="34" charset="0"/>
+                <a:cs typeface="Calibri" panose="020F0502020204030204" pitchFamily="34" charset="0"/>
+              </a:rPr>
+              <a:t>Missense Variants</a:t>
+            </a:r>
+          </a:p>
+        </p:txBody>
+      </p:sp>
+      <p:sp>
+        <p:nvSpPr>
+          <p:cNvPr id="37" name="Triangle 36">
+            <a:extLst>
+              <a:ext uri="{FF2B5EF4-FFF2-40B4-BE49-F238E27FC236}">
+                <a16:creationId xmlns:a16="http://schemas.microsoft.com/office/drawing/2014/main" id="{4298125A-0DAF-A29B-5E97-4FA86F906EC0}"/>
+              </a:ext>
+            </a:extLst>
+          </p:cNvPr>
+          <p:cNvSpPr/>
+          <p:nvPr/>
+        </p:nvSpPr>
+        <p:spPr>
+          <a:xfrm rot="10800000">
+            <a:off x="518130" y="3757958"/>
+            <a:ext cx="3688110" cy="493256"/>
+          </a:xfrm>
+          <a:prstGeom prst="triangle">
+            <a:avLst/>
+          </a:prstGeom>
+          <a:gradFill flip="none" rotWithShape="1">
+            <a:gsLst>
+              <a:gs pos="0">
+                <a:schemeClr val="accent2">
+                  <a:tint val="66000"/>
+                  <a:satMod val="160000"/>
+                </a:schemeClr>
+              </a:gs>
+              <a:gs pos="50000">
+                <a:schemeClr val="accent2">
+                  <a:tint val="44500"/>
+                  <a:satMod val="160000"/>
+                </a:schemeClr>
+              </a:gs>
+              <a:gs pos="100000">
+                <a:schemeClr val="accent2">
+                  <a:tint val="23500"/>
+                  <a:satMod val="160000"/>
+                </a:schemeClr>
+              </a:gs>
+            </a:gsLst>
+            <a:lin ang="5400000" scaled="1"/>
+            <a:tileRect/>
+          </a:gradFill>
+          <a:ln>
+            <a:noFill/>
+          </a:ln>
+        </p:spPr>
+        <p:style>
+          <a:lnRef idx="2">
+            <a:schemeClr val="accent6"/>
+          </a:lnRef>
+          <a:fillRef idx="1">
+            <a:schemeClr val="lt1"/>
+          </a:fillRef>
+          <a:effectRef idx="0">
+            <a:schemeClr val="accent6"/>
+          </a:effectRef>
+          <a:fontRef idx="minor">
+            <a:schemeClr val="dk1"/>
+          </a:fontRef>
+        </p:style>
+        <p:txBody>
+          <a:bodyPr rtlCol="0" anchor="ctr"/>
+          <a:lstStyle/>
+          <a:p>
+            <a:pPr algn="ctr"/>
+            <a:endParaRPr lang="en-US"/>
+          </a:p>
+        </p:txBody>
+      </p:sp>
+      <p:graphicFrame>
+        <p:nvGraphicFramePr>
+          <p:cNvPr id="38" name="Table 37">
+            <a:extLst>
+              <a:ext uri="{FF2B5EF4-FFF2-40B4-BE49-F238E27FC236}">
+                <a16:creationId xmlns:a16="http://schemas.microsoft.com/office/drawing/2014/main" id="{0DEF340A-3B25-77C6-1B8F-AD1E7DDB337B}"/>
+              </a:ext>
+            </a:extLst>
+          </p:cNvPr>
+          <p:cNvGraphicFramePr>
+            <a:graphicFrameLocks noGrp="1"/>
+          </p:cNvGraphicFramePr>
+          <p:nvPr>
+            <p:extLst>
+              <p:ext uri="{D42A27DB-BD31-4B8C-83A1-F6EECF244321}">
+                <p14:modId xmlns:p14="http://schemas.microsoft.com/office/powerpoint/2010/main" val="3215585717"/>
+              </p:ext>
+            </p:extLst>
+          </p:nvPr>
+        </p:nvGraphicFramePr>
+        <p:xfrm>
+          <a:off x="518131" y="3284708"/>
+          <a:ext cx="3688110" cy="365760"/>
+        </p:xfrm>
+        <a:graphic>
+          <a:graphicData uri="http://schemas.openxmlformats.org/drawingml/2006/table">
+            <a:tbl>
+              <a:tblPr>
+                <a:tableStyleId>{3C2FFA5D-87B4-456A-9821-1D502468CF0F}</a:tableStyleId>
+              </a:tblPr>
+              <a:tblGrid>
+                <a:gridCol w="614685">
+                  <a:extLst>
+                    <a:ext uri="{9D8B030D-6E8A-4147-A177-3AD203B41FA5}">
+                      <a16:colId xmlns:a16="http://schemas.microsoft.com/office/drawing/2014/main" val="506285589"/>
+                    </a:ext>
+                  </a:extLst>
+                </a:gridCol>
+                <a:gridCol w="614685">
+                  <a:extLst>
+                    <a:ext uri="{9D8B030D-6E8A-4147-A177-3AD203B41FA5}">
+                      <a16:colId xmlns:a16="http://schemas.microsoft.com/office/drawing/2014/main" val="230299700"/>
+                    </a:ext>
+                  </a:extLst>
+                </a:gridCol>
+                <a:gridCol w="614685">
+                  <a:extLst>
+                    <a:ext uri="{9D8B030D-6E8A-4147-A177-3AD203B41FA5}">
+                      <a16:colId xmlns:a16="http://schemas.microsoft.com/office/drawing/2014/main" val="1651777764"/>
+                    </a:ext>
+                  </a:extLst>
+                </a:gridCol>
+                <a:gridCol w="614685">
+                  <a:extLst>
+                    <a:ext uri="{9D8B030D-6E8A-4147-A177-3AD203B41FA5}">
+                      <a16:colId xmlns:a16="http://schemas.microsoft.com/office/drawing/2014/main" val="1947530268"/>
+                    </a:ext>
+                  </a:extLst>
+                </a:gridCol>
+                <a:gridCol w="614685">
+                  <a:extLst>
+                    <a:ext uri="{9D8B030D-6E8A-4147-A177-3AD203B41FA5}">
+                      <a16:colId xmlns:a16="http://schemas.microsoft.com/office/drawing/2014/main" val="25731248"/>
+                    </a:ext>
+                  </a:extLst>
+                </a:gridCol>
+                <a:gridCol w="614685">
+                  <a:extLst>
+                    <a:ext uri="{9D8B030D-6E8A-4147-A177-3AD203B41FA5}">
+                      <a16:colId xmlns:a16="http://schemas.microsoft.com/office/drawing/2014/main" val="2902588092"/>
+                    </a:ext>
+                  </a:extLst>
+                </a:gridCol>
+              </a:tblGrid>
+              <a:tr h="243597">
+                <a:tc>
+                  <a:txBody>
+                    <a:bodyPr/>
+                    <a:lstStyle/>
+                    <a:p>
+                      <a:pPr algn="ctr">
+                        <a:buNone/>
+                      </a:pPr>
+                      <a:r>
+                        <a:rPr lang="en-US" dirty="0">
+                          <a:latin typeface="Calibri" panose="020F0502020204030204" pitchFamily="34" charset="0"/>
+                          <a:cs typeface="Calibri" panose="020F0502020204030204" pitchFamily="34" charset="0"/>
+                        </a:rPr>
+                        <a:t>ATG</a:t>
+                      </a:r>
+                    </a:p>
+                  </a:txBody>
+                  <a:tcPr anchor="ctr"/>
+                </a:tc>
+                <a:tc>
+                  <a:txBody>
+                    <a:bodyPr/>
+                    <a:lstStyle/>
+                    <a:p>
+                      <a:pPr algn="ctr">
+                        <a:buNone/>
+                      </a:pPr>
+                      <a:r>
+                        <a:rPr lang="en-US" dirty="0">
+                          <a:latin typeface="Calibri" panose="020F0502020204030204" pitchFamily="34" charset="0"/>
+                          <a:cs typeface="Calibri" panose="020F0502020204030204" pitchFamily="34" charset="0"/>
+                        </a:rPr>
+                        <a:t>GCT</a:t>
+                      </a:r>
+                    </a:p>
+                  </a:txBody>
+                  <a:tcPr anchor="ctr"/>
+                </a:tc>
+                <a:tc>
+                  <a:txBody>
+                    <a:bodyPr/>
+                    <a:lstStyle/>
+                    <a:p>
+                      <a:pPr algn="ctr">
+                        <a:buNone/>
+                      </a:pPr>
+                      <a:r>
+                        <a:rPr lang="en-US" dirty="0">
+                          <a:latin typeface="Calibri" panose="020F0502020204030204" pitchFamily="34" charset="0"/>
+                          <a:cs typeface="Calibri" panose="020F0502020204030204" pitchFamily="34" charset="0"/>
+                        </a:rPr>
+                        <a:t>TT</a:t>
+                      </a:r>
+                      <a:r>
+                        <a:rPr lang="en-US" b="1" dirty="0">
+                          <a:solidFill>
+                            <a:srgbClr val="FF0000"/>
+                          </a:solidFill>
+                          <a:latin typeface="Calibri" panose="020F0502020204030204" pitchFamily="34" charset="0"/>
+                          <a:cs typeface="Calibri" panose="020F0502020204030204" pitchFamily="34" charset="0"/>
+                        </a:rPr>
+                        <a:t>G</a:t>
+                      </a:r>
+                    </a:p>
+                  </a:txBody>
+                  <a:tcPr anchor="ctr"/>
+                </a:tc>
+                <a:tc>
+                  <a:txBody>
+                    <a:bodyPr/>
+                    <a:lstStyle/>
+                    <a:p>
+                      <a:pPr algn="ctr">
+                        <a:buNone/>
+                      </a:pPr>
+                      <a:r>
+                        <a:rPr lang="en-US" dirty="0">
+                          <a:latin typeface="Calibri" panose="020F0502020204030204" pitchFamily="34" charset="0"/>
+                          <a:cs typeface="Calibri" panose="020F0502020204030204" pitchFamily="34" charset="0"/>
+                        </a:rPr>
+                        <a:t>CAG</a:t>
+                      </a:r>
+                    </a:p>
+                  </a:txBody>
+                  <a:tcPr anchor="ctr"/>
+                </a:tc>
+                <a:tc>
+                  <a:txBody>
+                    <a:bodyPr/>
+                    <a:lstStyle/>
+                    <a:p>
+                      <a:pPr algn="ctr">
+                        <a:buNone/>
+                      </a:pPr>
+                      <a:r>
+                        <a:rPr lang="en-US" dirty="0">
+                          <a:latin typeface="Calibri" panose="020F0502020204030204" pitchFamily="34" charset="0"/>
+                          <a:cs typeface="Calibri" panose="020F0502020204030204" pitchFamily="34" charset="0"/>
+                        </a:rPr>
+                        <a:t>AAA</a:t>
+                      </a:r>
+                    </a:p>
+                  </a:txBody>
+                  <a:tcPr anchor="ctr"/>
+                </a:tc>
+                <a:tc>
+                  <a:txBody>
+                    <a:bodyPr/>
+                    <a:lstStyle/>
+                    <a:p>
+                      <a:pPr algn="ctr">
+                        <a:buNone/>
+                      </a:pPr>
+                      <a:r>
+                        <a:rPr lang="en-US" dirty="0">
+                          <a:latin typeface="Calibri" panose="020F0502020204030204" pitchFamily="34" charset="0"/>
+                          <a:cs typeface="Calibri" panose="020F0502020204030204" pitchFamily="34" charset="0"/>
+                        </a:rPr>
+                        <a:t>GGC</a:t>
+                      </a:r>
+                    </a:p>
+                  </a:txBody>
+                  <a:tcPr anchor="ctr"/>
+                </a:tc>
+                <a:extLst>
+                  <a:ext uri="{0D108BD9-81ED-4DB2-BD59-A6C34878D82A}">
+                    <a16:rowId xmlns:a16="http://schemas.microsoft.com/office/drawing/2014/main" val="328898243"/>
+                  </a:ext>
+                </a:extLst>
+              </a:tr>
+            </a:tbl>
+          </a:graphicData>
+        </a:graphic>
+      </p:graphicFrame>
+      <p:graphicFrame>
+        <p:nvGraphicFramePr>
+          <p:cNvPr id="39" name="Table 38">
+            <a:extLst>
+              <a:ext uri="{FF2B5EF4-FFF2-40B4-BE49-F238E27FC236}">
+                <a16:creationId xmlns:a16="http://schemas.microsoft.com/office/drawing/2014/main" id="{AD74C262-DAAD-C4B3-5790-4F30BE49E355}"/>
+              </a:ext>
+            </a:extLst>
+          </p:cNvPr>
+          <p:cNvGraphicFramePr>
+            <a:graphicFrameLocks noGrp="1"/>
+          </p:cNvGraphicFramePr>
+          <p:nvPr>
+            <p:extLst>
+              <p:ext uri="{D42A27DB-BD31-4B8C-83A1-F6EECF244321}">
+                <p14:modId xmlns:p14="http://schemas.microsoft.com/office/powerpoint/2010/main" val="4292290825"/>
+              </p:ext>
+            </p:extLst>
+          </p:nvPr>
+        </p:nvGraphicFramePr>
+        <p:xfrm>
+          <a:off x="518130" y="4228475"/>
+          <a:ext cx="3688110" cy="365760"/>
+        </p:xfrm>
+        <a:graphic>
+          <a:graphicData uri="http://schemas.openxmlformats.org/drawingml/2006/table">
+            <a:tbl>
+              <a:tblPr>
+                <a:tableStyleId>{69C7853C-536D-4A76-A0AE-DD22124D55A5}</a:tableStyleId>
+              </a:tblPr>
+              <a:tblGrid>
+                <a:gridCol w="614685">
+                  <a:extLst>
+                    <a:ext uri="{9D8B030D-6E8A-4147-A177-3AD203B41FA5}">
+                      <a16:colId xmlns:a16="http://schemas.microsoft.com/office/drawing/2014/main" val="506285589"/>
+                    </a:ext>
+                  </a:extLst>
+                </a:gridCol>
+                <a:gridCol w="614685">
+                  <a:extLst>
+                    <a:ext uri="{9D8B030D-6E8A-4147-A177-3AD203B41FA5}">
+                      <a16:colId xmlns:a16="http://schemas.microsoft.com/office/drawing/2014/main" val="230299700"/>
+                    </a:ext>
+                  </a:extLst>
+                </a:gridCol>
+                <a:gridCol w="614685">
+                  <a:extLst>
+                    <a:ext uri="{9D8B030D-6E8A-4147-A177-3AD203B41FA5}">
+                      <a16:colId xmlns:a16="http://schemas.microsoft.com/office/drawing/2014/main" val="1651777764"/>
+                    </a:ext>
+                  </a:extLst>
+                </a:gridCol>
+                <a:gridCol w="614685">
+                  <a:extLst>
+                    <a:ext uri="{9D8B030D-6E8A-4147-A177-3AD203B41FA5}">
+                      <a16:colId xmlns:a16="http://schemas.microsoft.com/office/drawing/2014/main" val="1947530268"/>
+                    </a:ext>
+                  </a:extLst>
+                </a:gridCol>
+                <a:gridCol w="614685">
+                  <a:extLst>
+                    <a:ext uri="{9D8B030D-6E8A-4147-A177-3AD203B41FA5}">
+                      <a16:colId xmlns:a16="http://schemas.microsoft.com/office/drawing/2014/main" val="25731248"/>
+                    </a:ext>
+                  </a:extLst>
+                </a:gridCol>
+                <a:gridCol w="614685">
+                  <a:extLst>
+                    <a:ext uri="{9D8B030D-6E8A-4147-A177-3AD203B41FA5}">
+                      <a16:colId xmlns:a16="http://schemas.microsoft.com/office/drawing/2014/main" val="2902588092"/>
+                    </a:ext>
+                  </a:extLst>
+                </a:gridCol>
+              </a:tblGrid>
+              <a:tr h="243597">
+                <a:tc>
+                  <a:txBody>
+                    <a:bodyPr/>
+                    <a:lstStyle/>
+                    <a:p>
+                      <a:pPr algn="ctr">
+                        <a:buNone/>
+                      </a:pPr>
+                      <a:r>
+                        <a:rPr lang="en-US" dirty="0"/>
+                        <a:t>M</a:t>
+                      </a:r>
+                      <a:endParaRPr lang="en-US" dirty="0">
+                        <a:latin typeface="Calibri" panose="020F0502020204030204" pitchFamily="34" charset="0"/>
+                        <a:cs typeface="Calibri" panose="020F0502020204030204" pitchFamily="34" charset="0"/>
+                      </a:endParaRPr>
+                    </a:p>
+                  </a:txBody>
+                  <a:tcPr anchor="ctr"/>
+                </a:tc>
+                <a:tc>
+                  <a:txBody>
+                    <a:bodyPr/>
+                    <a:lstStyle/>
+                    <a:p>
+                      <a:pPr algn="ctr">
+                        <a:buNone/>
+                      </a:pPr>
+                      <a:r>
+                        <a:rPr lang="en-US" dirty="0"/>
+                        <a:t>A</a:t>
+                      </a:r>
+                      <a:endParaRPr lang="en-US" dirty="0">
+                        <a:latin typeface="Calibri" panose="020F0502020204030204" pitchFamily="34" charset="0"/>
+                        <a:cs typeface="Calibri" panose="020F0502020204030204" pitchFamily="34" charset="0"/>
+                      </a:endParaRPr>
+                    </a:p>
+                  </a:txBody>
+                  <a:tcPr anchor="ctr"/>
+                </a:tc>
+                <a:tc>
+                  <a:txBody>
+                    <a:bodyPr/>
+                    <a:lstStyle/>
+                    <a:p>
+                      <a:pPr algn="ctr">
+                        <a:buNone/>
+                      </a:pPr>
+                      <a:r>
+                        <a:rPr lang="en-US" b="1" dirty="0">
+                          <a:solidFill>
+                            <a:srgbClr val="FF0000"/>
+                          </a:solidFill>
+                        </a:rPr>
+                        <a:t>L</a:t>
+                      </a:r>
+                      <a:endParaRPr lang="en-US" b="1" dirty="0">
+                        <a:solidFill>
+                          <a:srgbClr val="FF0000"/>
+                        </a:solidFill>
+                        <a:latin typeface="Calibri" panose="020F0502020204030204" pitchFamily="34" charset="0"/>
+                        <a:cs typeface="Calibri" panose="020F0502020204030204" pitchFamily="34" charset="0"/>
+                      </a:endParaRPr>
+                    </a:p>
+                  </a:txBody>
+                  <a:tcPr anchor="ctr"/>
+                </a:tc>
+                <a:tc>
+                  <a:txBody>
+                    <a:bodyPr/>
+                    <a:lstStyle/>
+                    <a:p>
+                      <a:pPr algn="ctr">
+                        <a:buNone/>
+                      </a:pPr>
+                      <a:r>
+                        <a:rPr lang="en-US" dirty="0">
+                          <a:latin typeface="Calibri" panose="020F0502020204030204" pitchFamily="34" charset="0"/>
+                          <a:cs typeface="Calibri" panose="020F0502020204030204" pitchFamily="34" charset="0"/>
+                        </a:rPr>
+                        <a:t>Q</a:t>
+                      </a:r>
+                    </a:p>
+                  </a:txBody>
+                  <a:tcPr anchor="ctr"/>
+                </a:tc>
+                <a:tc>
+                  <a:txBody>
+                    <a:bodyPr/>
+                    <a:lstStyle/>
+                    <a:p>
+                      <a:pPr algn="ctr">
+                        <a:buNone/>
+                      </a:pPr>
+                      <a:r>
+                        <a:rPr lang="en-US" dirty="0">
+                          <a:latin typeface="Calibri" panose="020F0502020204030204" pitchFamily="34" charset="0"/>
+                          <a:cs typeface="Calibri" panose="020F0502020204030204" pitchFamily="34" charset="0"/>
+                        </a:rPr>
+                        <a:t>K</a:t>
+                      </a:r>
+                    </a:p>
+                  </a:txBody>
+                  <a:tcPr anchor="ctr"/>
+                </a:tc>
+                <a:tc>
+                  <a:txBody>
+                    <a:bodyPr/>
+                    <a:lstStyle/>
+                    <a:p>
+                      <a:pPr algn="ctr">
+                        <a:buNone/>
+                      </a:pPr>
+                      <a:r>
+                        <a:rPr lang="en-US" dirty="0"/>
+                        <a:t>G</a:t>
+                      </a:r>
+                      <a:endParaRPr lang="en-US" dirty="0">
+                        <a:latin typeface="Calibri" panose="020F0502020204030204" pitchFamily="34" charset="0"/>
+                        <a:cs typeface="Calibri" panose="020F0502020204030204" pitchFamily="34" charset="0"/>
+                      </a:endParaRPr>
+                    </a:p>
+                  </a:txBody>
+                  <a:tcPr anchor="ctr"/>
+                </a:tc>
+                <a:extLst>
+                  <a:ext uri="{0D108BD9-81ED-4DB2-BD59-A6C34878D82A}">
+                    <a16:rowId xmlns:a16="http://schemas.microsoft.com/office/drawing/2014/main" val="328898243"/>
+                  </a:ext>
+                </a:extLst>
+              </a:tr>
+            </a:tbl>
+          </a:graphicData>
+        </a:graphic>
+      </p:graphicFrame>
+      <p:sp>
+        <p:nvSpPr>
+          <p:cNvPr id="40" name="Triangle 39">
+            <a:extLst>
+              <a:ext uri="{FF2B5EF4-FFF2-40B4-BE49-F238E27FC236}">
+                <a16:creationId xmlns:a16="http://schemas.microsoft.com/office/drawing/2014/main" id="{6B32B20A-A92D-62FE-76E1-C3722CAB2F9E}"/>
+              </a:ext>
+            </a:extLst>
+          </p:cNvPr>
+          <p:cNvSpPr/>
+          <p:nvPr/>
+        </p:nvSpPr>
+        <p:spPr>
+          <a:xfrm rot="10800000">
+            <a:off x="4498059" y="3757958"/>
+            <a:ext cx="3478340" cy="493256"/>
+          </a:xfrm>
+          <a:prstGeom prst="triangle">
+            <a:avLst/>
+          </a:prstGeom>
+          <a:gradFill flip="none" rotWithShape="1">
+            <a:gsLst>
+              <a:gs pos="0">
+                <a:schemeClr val="accent2">
+                  <a:tint val="66000"/>
+                  <a:satMod val="160000"/>
+                </a:schemeClr>
+              </a:gs>
+              <a:gs pos="50000">
+                <a:schemeClr val="accent2">
+                  <a:tint val="44500"/>
+                  <a:satMod val="160000"/>
+                </a:schemeClr>
+              </a:gs>
+              <a:gs pos="100000">
+                <a:schemeClr val="accent2">
+                  <a:tint val="23500"/>
+                  <a:satMod val="160000"/>
+                </a:schemeClr>
+              </a:gs>
+            </a:gsLst>
+            <a:lin ang="5400000" scaled="1"/>
+            <a:tileRect/>
+          </a:gradFill>
+          <a:ln>
+            <a:noFill/>
+          </a:ln>
+        </p:spPr>
+        <p:style>
+          <a:lnRef idx="2">
+            <a:schemeClr val="accent6"/>
+          </a:lnRef>
+          <a:fillRef idx="1">
+            <a:schemeClr val="lt1"/>
+          </a:fillRef>
+          <a:effectRef idx="0">
+            <a:schemeClr val="accent6"/>
+          </a:effectRef>
+          <a:fontRef idx="minor">
+            <a:schemeClr val="dk1"/>
+          </a:fontRef>
+        </p:style>
+        <p:txBody>
+          <a:bodyPr rtlCol="0" anchor="ctr"/>
+          <a:lstStyle/>
+          <a:p>
+            <a:pPr algn="ctr"/>
+            <a:endParaRPr lang="en-US"/>
+          </a:p>
+        </p:txBody>
+      </p:sp>
+      <p:grpSp>
+        <p:nvGrpSpPr>
+          <p:cNvPr id="41" name="Group 40">
+            <a:extLst>
+              <a:ext uri="{FF2B5EF4-FFF2-40B4-BE49-F238E27FC236}">
+                <a16:creationId xmlns:a16="http://schemas.microsoft.com/office/drawing/2014/main" id="{6F2088E0-682B-C952-97E2-72D75D78DAE6}"/>
+              </a:ext>
+            </a:extLst>
+          </p:cNvPr>
+          <p:cNvGrpSpPr/>
+          <p:nvPr/>
+        </p:nvGrpSpPr>
+        <p:grpSpPr>
+          <a:xfrm>
+            <a:off x="4540656" y="3300129"/>
+            <a:ext cx="3478340" cy="243431"/>
+            <a:chOff x="2113613" y="2372209"/>
+            <a:chExt cx="5850173" cy="475923"/>
+          </a:xfrm>
+        </p:grpSpPr>
+        <p:cxnSp>
+          <p:nvCxnSpPr>
+            <p:cNvPr id="42" name="Straight Arrow Connector 41">
+              <a:extLst>
+                <a:ext uri="{FF2B5EF4-FFF2-40B4-BE49-F238E27FC236}">
+                  <a16:creationId xmlns:a16="http://schemas.microsoft.com/office/drawing/2014/main" id="{3470D21E-B880-1EE5-27EE-4A9D0B124637}"/>
+                </a:ext>
+              </a:extLst>
+            </p:cNvPr>
+            <p:cNvCxnSpPr>
+              <a:cxnSpLocks/>
+            </p:cNvCxnSpPr>
+            <p:nvPr/>
+          </p:nvCxnSpPr>
+          <p:spPr>
+            <a:xfrm>
+              <a:off x="2113613" y="2615784"/>
+              <a:ext cx="5850173" cy="0"/>
+            </a:xfrm>
+            <a:prstGeom prst="straightConnector1">
+              <a:avLst/>
+            </a:prstGeom>
+            <a:ln>
+              <a:tailEnd type="triangle"/>
+            </a:ln>
+          </p:spPr>
+          <p:style>
+            <a:lnRef idx="2">
+              <a:schemeClr val="dk1"/>
+            </a:lnRef>
+            <a:fillRef idx="0">
+              <a:schemeClr val="dk1"/>
+            </a:fillRef>
+            <a:effectRef idx="1">
+              <a:schemeClr val="dk1"/>
+            </a:effectRef>
+            <a:fontRef idx="minor">
+              <a:schemeClr val="tx1"/>
+            </a:fontRef>
+          </p:style>
+        </p:cxnSp>
+        <p:sp>
+          <p:nvSpPr>
+            <p:cNvPr id="43" name="Rectangle 42">
+              <a:extLst>
+                <a:ext uri="{FF2B5EF4-FFF2-40B4-BE49-F238E27FC236}">
+                  <a16:creationId xmlns:a16="http://schemas.microsoft.com/office/drawing/2014/main" id="{1DF0BD0A-2374-2438-43EA-308707B50749}"/>
+                </a:ext>
+              </a:extLst>
+            </p:cNvPr>
+            <p:cNvSpPr/>
+            <p:nvPr/>
+          </p:nvSpPr>
+          <p:spPr>
+            <a:xfrm>
+              <a:off x="5992077" y="2372209"/>
+              <a:ext cx="163905" cy="464695"/>
+            </a:xfrm>
+            <a:prstGeom prst="rect">
+              <a:avLst/>
+            </a:prstGeom>
+          </p:spPr>
+          <p:style>
+            <a:lnRef idx="2">
+              <a:schemeClr val="accent6">
+                <a:shade val="15000"/>
+              </a:schemeClr>
+            </a:lnRef>
+            <a:fillRef idx="1">
+              <a:schemeClr val="accent6"/>
+            </a:fillRef>
+            <a:effectRef idx="0">
+              <a:schemeClr val="accent6"/>
+            </a:effectRef>
+            <a:fontRef idx="minor">
+              <a:schemeClr val="lt1"/>
+            </a:fontRef>
+          </p:style>
+          <p:txBody>
+            <a:bodyPr rtlCol="0" anchor="ctr"/>
+            <a:lstStyle/>
+            <a:p>
+              <a:pPr algn="ctr"/>
+              <a:endParaRPr lang="en-US"/>
+            </a:p>
+          </p:txBody>
+        </p:sp>
+        <p:sp>
+          <p:nvSpPr>
+            <p:cNvPr id="44" name="Rectangle 43">
+              <a:extLst>
+                <a:ext uri="{FF2B5EF4-FFF2-40B4-BE49-F238E27FC236}">
+                  <a16:creationId xmlns:a16="http://schemas.microsoft.com/office/drawing/2014/main" id="{4BFA33D5-50FA-0699-F67E-1ED36A1911A6}"/>
+                </a:ext>
+              </a:extLst>
+            </p:cNvPr>
+            <p:cNvSpPr/>
+            <p:nvPr/>
+          </p:nvSpPr>
+          <p:spPr>
+            <a:xfrm>
+              <a:off x="6967026" y="2383437"/>
+              <a:ext cx="88311" cy="464695"/>
+            </a:xfrm>
+            <a:prstGeom prst="rect">
+              <a:avLst/>
+            </a:prstGeom>
+          </p:spPr>
+          <p:style>
+            <a:lnRef idx="2">
+              <a:schemeClr val="accent3">
+                <a:shade val="15000"/>
+              </a:schemeClr>
+            </a:lnRef>
+            <a:fillRef idx="1">
+              <a:schemeClr val="accent3"/>
+            </a:fillRef>
+            <a:effectRef idx="0">
+              <a:schemeClr val="accent3"/>
+            </a:effectRef>
+            <a:fontRef idx="minor">
+              <a:schemeClr val="lt1"/>
+            </a:fontRef>
+          </p:style>
+          <p:txBody>
+            <a:bodyPr rtlCol="0" anchor="ctr"/>
+            <a:lstStyle/>
+            <a:p>
+              <a:pPr algn="ctr"/>
+              <a:endParaRPr lang="en-US"/>
+            </a:p>
+          </p:txBody>
+        </p:sp>
+        <p:sp>
+          <p:nvSpPr>
+            <p:cNvPr id="45" name="Rectangle 44">
+              <a:extLst>
+                <a:ext uri="{FF2B5EF4-FFF2-40B4-BE49-F238E27FC236}">
+                  <a16:creationId xmlns:a16="http://schemas.microsoft.com/office/drawing/2014/main" id="{BC58861D-AF80-6D1E-E026-A92279BBBB9C}"/>
+                </a:ext>
+              </a:extLst>
+            </p:cNvPr>
+            <p:cNvSpPr/>
+            <p:nvPr/>
+          </p:nvSpPr>
+          <p:spPr>
+            <a:xfrm>
+              <a:off x="7484447" y="2383437"/>
+              <a:ext cx="163905" cy="464695"/>
+            </a:xfrm>
+            <a:prstGeom prst="rect">
+              <a:avLst/>
+            </a:prstGeom>
+          </p:spPr>
+          <p:style>
+            <a:lnRef idx="2">
+              <a:schemeClr val="accent1">
+                <a:shade val="15000"/>
+              </a:schemeClr>
+            </a:lnRef>
+            <a:fillRef idx="1">
+              <a:schemeClr val="accent1"/>
+            </a:fillRef>
+            <a:effectRef idx="0">
+              <a:schemeClr val="accent1"/>
+            </a:effectRef>
+            <a:fontRef idx="minor">
+              <a:schemeClr val="lt1"/>
+            </a:fontRef>
+          </p:style>
+          <p:txBody>
+            <a:bodyPr rtlCol="0" anchor="ctr"/>
+            <a:lstStyle/>
+            <a:p>
+              <a:pPr algn="ctr"/>
+              <a:endParaRPr lang="en-US"/>
+            </a:p>
+          </p:txBody>
+        </p:sp>
+        <p:sp>
+          <p:nvSpPr>
+            <p:cNvPr id="57" name="Rectangle 56">
+              <a:extLst>
+                <a:ext uri="{FF2B5EF4-FFF2-40B4-BE49-F238E27FC236}">
+                  <a16:creationId xmlns:a16="http://schemas.microsoft.com/office/drawing/2014/main" id="{9A4E72A0-DE04-ED4E-EFAE-2886ED2ACD5B}"/>
+                </a:ext>
+              </a:extLst>
+            </p:cNvPr>
+            <p:cNvSpPr/>
+            <p:nvPr/>
+          </p:nvSpPr>
+          <p:spPr>
+            <a:xfrm>
+              <a:off x="3120241" y="2513789"/>
+              <a:ext cx="2271241" cy="212093"/>
+            </a:xfrm>
+            <a:prstGeom prst="rect">
+              <a:avLst/>
+            </a:prstGeom>
+          </p:spPr>
+          <p:style>
+            <a:lnRef idx="2">
+              <a:schemeClr val="accent6"/>
+            </a:lnRef>
+            <a:fillRef idx="1">
+              <a:schemeClr val="lt1"/>
+            </a:fillRef>
+            <a:effectRef idx="0">
+              <a:schemeClr val="accent6"/>
+            </a:effectRef>
+            <a:fontRef idx="minor">
+              <a:schemeClr val="dk1"/>
+            </a:fontRef>
+          </p:style>
+          <p:txBody>
+            <a:bodyPr rtlCol="0" anchor="ctr"/>
+            <a:lstStyle/>
+            <a:p>
+              <a:pPr algn="ctr"/>
+              <a:endParaRPr lang="en-US"/>
+            </a:p>
+          </p:txBody>
+        </p:sp>
+      </p:grpSp>
+      <p:sp>
+        <p:nvSpPr>
+          <p:cNvPr id="46" name="TextBox 45">
+            <a:extLst>
+              <a:ext uri="{FF2B5EF4-FFF2-40B4-BE49-F238E27FC236}">
+                <a16:creationId xmlns:a16="http://schemas.microsoft.com/office/drawing/2014/main" id="{BAFB3738-B28F-90C6-B05D-23788B98C5E1}"/>
+              </a:ext>
+            </a:extLst>
+          </p:cNvPr>
+          <p:cNvSpPr txBox="1"/>
+          <p:nvPr/>
+        </p:nvSpPr>
+        <p:spPr>
+          <a:xfrm>
+            <a:off x="4781300" y="2464322"/>
+            <a:ext cx="2250788" cy="369332"/>
+          </a:xfrm>
+          <a:prstGeom prst="rect">
+            <a:avLst/>
+          </a:prstGeom>
+          <a:noFill/>
+        </p:spPr>
+        <p:txBody>
+          <a:bodyPr wrap="square" rtlCol="0">
+            <a:spAutoFit/>
+          </a:bodyPr>
+          <a:lstStyle/>
+          <a:p>
+            <a:r>
+              <a:rPr lang="en-US" b="1" dirty="0">
+                <a:latin typeface="Calibri" panose="020F0502020204030204" pitchFamily="34" charset="0"/>
+                <a:cs typeface="Calibri" panose="020F0502020204030204" pitchFamily="34" charset="0"/>
+              </a:rPr>
+              <a:t>UTR Variants</a:t>
+            </a:r>
+          </a:p>
+        </p:txBody>
+      </p:sp>
+      <p:sp>
+        <p:nvSpPr>
+          <p:cNvPr id="53" name="Lightning Bolt 52">
+            <a:extLst>
+              <a:ext uri="{FF2B5EF4-FFF2-40B4-BE49-F238E27FC236}">
+                <a16:creationId xmlns:a16="http://schemas.microsoft.com/office/drawing/2014/main" id="{3CDF2278-76D3-27C6-8682-1266EB978A43}"/>
+              </a:ext>
+            </a:extLst>
+          </p:cNvPr>
+          <p:cNvSpPr/>
+          <p:nvPr/>
+        </p:nvSpPr>
+        <p:spPr>
+          <a:xfrm rot="19910345" flipH="1">
+            <a:off x="6212463" y="3047018"/>
+            <a:ext cx="251025" cy="244976"/>
+          </a:xfrm>
+          <a:prstGeom prst="lightningBolt">
+            <a:avLst/>
+          </a:prstGeom>
+          <a:solidFill>
+            <a:srgbClr val="FF7E79"/>
+          </a:solidFill>
+          <a:ln w="12700" cap="flat" cmpd="sng" algn="ctr">
+            <a:solidFill>
+              <a:srgbClr val="FF0000"/>
+            </a:solidFill>
+            <a:prstDash val="solid"/>
+            <a:miter lim="800000"/>
+          </a:ln>
+          <a:effectLst/>
+        </p:spPr>
+        <p:style>
+          <a:lnRef idx="2">
+            <a:schemeClr val="accent1">
+              <a:shade val="50000"/>
+            </a:schemeClr>
+          </a:lnRef>
+          <a:fillRef idx="1">
+            <a:schemeClr val="accent1"/>
+          </a:fillRef>
+          <a:effectRef idx="0">
+            <a:schemeClr val="accent1"/>
+          </a:effectRef>
+          <a:fontRef idx="minor">
+            <a:schemeClr val="lt1"/>
+          </a:fontRef>
+        </p:style>
+        <p:txBody>
+          <a:bodyPr rtlCol="0" anchor="ctr"/>
+          <a:lstStyle/>
+          <a:p>
+            <a:pPr algn="ctr"/>
+            <a:endParaRPr lang="en-US" dirty="0">
+              <a:latin typeface="Calibri" panose="020F0502020204030204" pitchFamily="34" charset="0"/>
+              <a:cs typeface="Calibri" panose="020F0502020204030204" pitchFamily="34" charset="0"/>
+            </a:endParaRPr>
+          </a:p>
+        </p:txBody>
+      </p:sp>
+      <p:sp>
+        <p:nvSpPr>
+          <p:cNvPr id="58" name="Rounded Rectangle 57">
+            <a:extLst>
+              <a:ext uri="{FF2B5EF4-FFF2-40B4-BE49-F238E27FC236}">
+                <a16:creationId xmlns:a16="http://schemas.microsoft.com/office/drawing/2014/main" id="{FEEF92A0-5571-6E73-A464-B9CB7AAA0E50}"/>
+              </a:ext>
+            </a:extLst>
+          </p:cNvPr>
+          <p:cNvSpPr/>
+          <p:nvPr/>
+        </p:nvSpPr>
+        <p:spPr>
+          <a:xfrm>
+            <a:off x="205100" y="2808928"/>
+            <a:ext cx="4170116" cy="2583468"/>
+          </a:xfrm>
+          <a:prstGeom prst="roundRect">
+            <a:avLst/>
+          </a:prstGeom>
+          <a:noFill/>
+          <a:ln>
+            <a:prstDash val="dash"/>
+          </a:ln>
+        </p:spPr>
+        <p:style>
+          <a:lnRef idx="2">
+            <a:schemeClr val="accent1">
+              <a:shade val="15000"/>
+            </a:schemeClr>
+          </a:lnRef>
+          <a:fillRef idx="1">
+            <a:schemeClr val="accent1"/>
+          </a:fillRef>
+          <a:effectRef idx="0">
+            <a:schemeClr val="accent1"/>
+          </a:effectRef>
+          <a:fontRef idx="minor">
+            <a:schemeClr val="lt1"/>
+          </a:fontRef>
+        </p:style>
+        <p:txBody>
+          <a:bodyPr rtlCol="0" anchor="ctr"/>
+          <a:lstStyle/>
+          <a:p>
+            <a:pPr algn="ctr"/>
+            <a:endParaRPr lang="en-US"/>
+          </a:p>
+        </p:txBody>
+      </p:sp>
+      <p:sp>
+        <p:nvSpPr>
+          <p:cNvPr id="60" name="Rounded Rectangle 59">
+            <a:extLst>
+              <a:ext uri="{FF2B5EF4-FFF2-40B4-BE49-F238E27FC236}">
+                <a16:creationId xmlns:a16="http://schemas.microsoft.com/office/drawing/2014/main" id="{4D3E16AF-700A-BC96-6875-BD68C4AA98BD}"/>
+              </a:ext>
+            </a:extLst>
+          </p:cNvPr>
+          <p:cNvSpPr/>
+          <p:nvPr/>
+        </p:nvSpPr>
+        <p:spPr>
+          <a:xfrm>
+            <a:off x="4442457" y="2808928"/>
+            <a:ext cx="4170116" cy="2583468"/>
+          </a:xfrm>
+          <a:prstGeom prst="roundRect">
+            <a:avLst/>
+          </a:prstGeom>
+          <a:noFill/>
+          <a:ln>
+            <a:prstDash val="dash"/>
+          </a:ln>
+        </p:spPr>
+        <p:style>
+          <a:lnRef idx="2">
+            <a:schemeClr val="accent1">
+              <a:shade val="15000"/>
+            </a:schemeClr>
+          </a:lnRef>
+          <a:fillRef idx="1">
+            <a:schemeClr val="accent1"/>
+          </a:fillRef>
+          <a:effectRef idx="0">
+            <a:schemeClr val="accent1"/>
+          </a:effectRef>
+          <a:fontRef idx="minor">
+            <a:schemeClr val="lt1"/>
+          </a:fontRef>
+        </p:style>
+        <p:txBody>
+          <a:bodyPr rtlCol="0" anchor="ctr"/>
+          <a:lstStyle/>
+          <a:p>
+            <a:pPr algn="ctr"/>
+            <a:endParaRPr lang="en-US"/>
+          </a:p>
+        </p:txBody>
+      </p:sp>
+    </p:spTree>
+    <p:extLst>
+      <p:ext uri="{BB962C8B-B14F-4D97-AF65-F5344CB8AC3E}">
+        <p14:creationId xmlns:p14="http://schemas.microsoft.com/office/powerpoint/2010/main" val="1101484512"/>
       </p:ext>
     </p:extLst>
   </p:cSld>
